--- a/Reading Course/Presentations/Advanced Game Theory.pptx
+++ b/Reading Course/Presentations/Advanced Game Theory.pptx
@@ -5,13 +5,14 @@
     <p:sldMasterId id="2147483648" r:id="rId1"/>
   </p:sldMasterIdLst>
   <p:notesMasterIdLst>
-    <p:notesMasterId r:id="rId6"/>
+    <p:notesMasterId r:id="rId7"/>
   </p:notesMasterIdLst>
   <p:sldIdLst>
     <p:sldId id="291" r:id="rId2"/>
     <p:sldId id="304" r:id="rId3"/>
     <p:sldId id="327" r:id="rId4"/>
     <p:sldId id="325" r:id="rId5"/>
+    <p:sldId id="328" r:id="rId6"/>
   </p:sldIdLst>
   <p:sldSz cx="12192000" cy="6858000"/>
   <p:notesSz cx="6858000" cy="8891588"/>
@@ -127,7 +128,7 @@
 <file path=ppt/revisionInfo.xml><?xml version="1.0" encoding="utf-8"?>
 <p1510:revInfo xmlns:a="http://schemas.openxmlformats.org/drawingml/2006/main" xmlns:r="http://schemas.openxmlformats.org/officeDocument/2006/relationships" xmlns:p1510="http://schemas.microsoft.com/office/powerpoint/2015/10/main">
   <p1510:revLst>
-    <p1510:client id="{7B722D95-ED78-4CA4-B975-9EB3D90BBE34}" v="660" dt="2026-02-25T04:39:00.552"/>
+    <p1510:client id="{7B722D95-ED78-4CA4-B975-9EB3D90BBE34}" v="790" dt="2026-03-02T15:41:08.506"/>
   </p1510:revLst>
 </p1510:revInfo>
 </file>
@@ -137,17 +138,10 @@
   <pc:docChgLst>
     <pc:chgData name="Jacob Wyngaard" userId="6181fcd471e98458" providerId="LiveId" clId="{788BA123-62C9-4DDC-86E5-A6BCA4600216}"/>
     <pc:docChg chg="undo custSel addSld delSld modSld sldOrd">
-      <pc:chgData name="Jacob Wyngaard" userId="6181fcd471e98458" providerId="LiveId" clId="{788BA123-62C9-4DDC-86E5-A6BCA4600216}" dt="2026-02-25T04:39:00.552" v="1351" actId="20577"/>
+      <pc:chgData name="Jacob Wyngaard" userId="6181fcd471e98458" providerId="LiveId" clId="{788BA123-62C9-4DDC-86E5-A6BCA4600216}" dt="2026-03-02T15:41:31.387" v="1603" actId="47"/>
       <pc:docMkLst>
         <pc:docMk/>
       </pc:docMkLst>
-      <pc:sldChg chg="add del">
-        <pc:chgData name="Jacob Wyngaard" userId="6181fcd471e98458" providerId="LiveId" clId="{788BA123-62C9-4DDC-86E5-A6BCA4600216}" dt="2026-02-25T04:00:37.286" v="22" actId="47"/>
-        <pc:sldMkLst>
-          <pc:docMk/>
-          <pc:sldMk cId="2457022423" sldId="277"/>
-        </pc:sldMkLst>
-      </pc:sldChg>
       <pc:sldChg chg="delSp modSp mod">
         <pc:chgData name="Jacob Wyngaard" userId="6181fcd471e98458" providerId="LiveId" clId="{788BA123-62C9-4DDC-86E5-A6BCA4600216}" dt="2026-02-25T04:02:08.413" v="110" actId="478"/>
         <pc:sldMkLst>
@@ -162,78 +156,6 @@
             <ac:spMk id="9" creationId="{146DFEDC-5C40-1E05-3C8E-45F902F03177}"/>
           </ac:spMkLst>
         </pc:spChg>
-        <pc:picChg chg="del">
-          <ac:chgData name="Jacob Wyngaard" userId="6181fcd471e98458" providerId="LiveId" clId="{788BA123-62C9-4DDC-86E5-A6BCA4600216}" dt="2026-02-25T04:02:08.413" v="110" actId="478"/>
-          <ac:picMkLst>
-            <pc:docMk/>
-            <pc:sldMk cId="606609933" sldId="291"/>
-            <ac:picMk id="3" creationId="{CE09EE05-A5B9-1FBF-2DBB-C555BB643101}"/>
-          </ac:picMkLst>
-        </pc:picChg>
-        <pc:picChg chg="del">
-          <ac:chgData name="Jacob Wyngaard" userId="6181fcd471e98458" providerId="LiveId" clId="{788BA123-62C9-4DDC-86E5-A6BCA4600216}" dt="2026-02-25T04:02:07.867" v="109" actId="478"/>
-          <ac:picMkLst>
-            <pc:docMk/>
-            <pc:sldMk cId="606609933" sldId="291"/>
-            <ac:picMk id="5" creationId="{4C457158-DF9F-C419-9A83-2FA4F37689F7}"/>
-          </ac:picMkLst>
-        </pc:picChg>
-      </pc:sldChg>
-      <pc:sldChg chg="add del">
-        <pc:chgData name="Jacob Wyngaard" userId="6181fcd471e98458" providerId="LiveId" clId="{788BA123-62C9-4DDC-86E5-A6BCA4600216}" dt="2026-02-25T04:00:37.286" v="22" actId="47"/>
-        <pc:sldMkLst>
-          <pc:docMk/>
-          <pc:sldMk cId="3199105467" sldId="292"/>
-        </pc:sldMkLst>
-      </pc:sldChg>
-      <pc:sldChg chg="add del">
-        <pc:chgData name="Jacob Wyngaard" userId="6181fcd471e98458" providerId="LiveId" clId="{788BA123-62C9-4DDC-86E5-A6BCA4600216}" dt="2026-02-25T04:00:37.286" v="22" actId="47"/>
-        <pc:sldMkLst>
-          <pc:docMk/>
-          <pc:sldMk cId="1828421699" sldId="297"/>
-        </pc:sldMkLst>
-      </pc:sldChg>
-      <pc:sldChg chg="add del">
-        <pc:chgData name="Jacob Wyngaard" userId="6181fcd471e98458" providerId="LiveId" clId="{788BA123-62C9-4DDC-86E5-A6BCA4600216}" dt="2026-02-25T04:00:37.286" v="22" actId="47"/>
-        <pc:sldMkLst>
-          <pc:docMk/>
-          <pc:sldMk cId="3026030696" sldId="298"/>
-        </pc:sldMkLst>
-      </pc:sldChg>
-      <pc:sldChg chg="add del">
-        <pc:chgData name="Jacob Wyngaard" userId="6181fcd471e98458" providerId="LiveId" clId="{788BA123-62C9-4DDC-86E5-A6BCA4600216}" dt="2026-02-25T04:00:37.286" v="22" actId="47"/>
-        <pc:sldMkLst>
-          <pc:docMk/>
-          <pc:sldMk cId="105783776" sldId="299"/>
-        </pc:sldMkLst>
-      </pc:sldChg>
-      <pc:sldChg chg="add del">
-        <pc:chgData name="Jacob Wyngaard" userId="6181fcd471e98458" providerId="LiveId" clId="{788BA123-62C9-4DDC-86E5-A6BCA4600216}" dt="2026-02-25T04:00:37.286" v="22" actId="47"/>
-        <pc:sldMkLst>
-          <pc:docMk/>
-          <pc:sldMk cId="1159773281" sldId="300"/>
-        </pc:sldMkLst>
-      </pc:sldChg>
-      <pc:sldChg chg="add del">
-        <pc:chgData name="Jacob Wyngaard" userId="6181fcd471e98458" providerId="LiveId" clId="{788BA123-62C9-4DDC-86E5-A6BCA4600216}" dt="2026-02-25T04:00:37.286" v="22" actId="47"/>
-        <pc:sldMkLst>
-          <pc:docMk/>
-          <pc:sldMk cId="2955935516" sldId="301"/>
-        </pc:sldMkLst>
-      </pc:sldChg>
-      <pc:sldChg chg="add del">
-        <pc:chgData name="Jacob Wyngaard" userId="6181fcd471e98458" providerId="LiveId" clId="{788BA123-62C9-4DDC-86E5-A6BCA4600216}" dt="2026-02-25T04:00:37.286" v="22" actId="47"/>
-        <pc:sldMkLst>
-          <pc:docMk/>
-          <pc:sldMk cId="969326362" sldId="302"/>
-        </pc:sldMkLst>
-      </pc:sldChg>
-      <pc:sldChg chg="add del">
-        <pc:chgData name="Jacob Wyngaard" userId="6181fcd471e98458" providerId="LiveId" clId="{788BA123-62C9-4DDC-86E5-A6BCA4600216}" dt="2026-02-25T04:00:37.286" v="22" actId="47"/>
-        <pc:sldMkLst>
-          <pc:docMk/>
-          <pc:sldMk cId="1276044030" sldId="303"/>
-        </pc:sldMkLst>
       </pc:sldChg>
       <pc:sldChg chg="addSp delSp mod">
         <pc:chgData name="Jacob Wyngaard" userId="6181fcd471e98458" providerId="LiveId" clId="{788BA123-62C9-4DDC-86E5-A6BCA4600216}" dt="2026-02-25T04:00:29.203" v="20" actId="478"/>
@@ -298,207 +220,18 @@
           </ac:spMkLst>
         </pc:spChg>
       </pc:sldChg>
-      <pc:sldChg chg="del">
-        <pc:chgData name="Jacob Wyngaard" userId="6181fcd471e98458" providerId="LiveId" clId="{788BA123-62C9-4DDC-86E5-A6BCA4600216}" dt="2026-02-25T04:00:59.367" v="31" actId="47"/>
-        <pc:sldMkLst>
-          <pc:docMk/>
-          <pc:sldMk cId="3396362434" sldId="306"/>
-        </pc:sldMkLst>
-      </pc:sldChg>
-      <pc:sldChg chg="del">
-        <pc:chgData name="Jacob Wyngaard" userId="6181fcd471e98458" providerId="LiveId" clId="{788BA123-62C9-4DDC-86E5-A6BCA4600216}" dt="2026-02-25T04:00:59.367" v="31" actId="47"/>
-        <pc:sldMkLst>
-          <pc:docMk/>
-          <pc:sldMk cId="2869556279" sldId="307"/>
-        </pc:sldMkLst>
-      </pc:sldChg>
-      <pc:sldChg chg="del">
-        <pc:chgData name="Jacob Wyngaard" userId="6181fcd471e98458" providerId="LiveId" clId="{788BA123-62C9-4DDC-86E5-A6BCA4600216}" dt="2026-02-25T04:00:59.367" v="31" actId="47"/>
-        <pc:sldMkLst>
-          <pc:docMk/>
-          <pc:sldMk cId="74585992" sldId="308"/>
-        </pc:sldMkLst>
-      </pc:sldChg>
-      <pc:sldChg chg="del">
-        <pc:chgData name="Jacob Wyngaard" userId="6181fcd471e98458" providerId="LiveId" clId="{788BA123-62C9-4DDC-86E5-A6BCA4600216}" dt="2026-02-25T04:00:59.367" v="31" actId="47"/>
-        <pc:sldMkLst>
-          <pc:docMk/>
-          <pc:sldMk cId="2843278506" sldId="309"/>
-        </pc:sldMkLst>
-      </pc:sldChg>
-      <pc:sldChg chg="del">
-        <pc:chgData name="Jacob Wyngaard" userId="6181fcd471e98458" providerId="LiveId" clId="{788BA123-62C9-4DDC-86E5-A6BCA4600216}" dt="2026-02-25T04:00:59.367" v="31" actId="47"/>
-        <pc:sldMkLst>
-          <pc:docMk/>
-          <pc:sldMk cId="3006645019" sldId="310"/>
-        </pc:sldMkLst>
-      </pc:sldChg>
-      <pc:sldChg chg="del">
-        <pc:chgData name="Jacob Wyngaard" userId="6181fcd471e98458" providerId="LiveId" clId="{788BA123-62C9-4DDC-86E5-A6BCA4600216}" dt="2026-02-25T04:00:59.367" v="31" actId="47"/>
-        <pc:sldMkLst>
-          <pc:docMk/>
-          <pc:sldMk cId="1247703661" sldId="311"/>
-        </pc:sldMkLst>
-      </pc:sldChg>
-      <pc:sldChg chg="del">
-        <pc:chgData name="Jacob Wyngaard" userId="6181fcd471e98458" providerId="LiveId" clId="{788BA123-62C9-4DDC-86E5-A6BCA4600216}" dt="2026-02-25T04:00:59.367" v="31" actId="47"/>
-        <pc:sldMkLst>
-          <pc:docMk/>
-          <pc:sldMk cId="464485421" sldId="312"/>
-        </pc:sldMkLst>
-      </pc:sldChg>
-      <pc:sldChg chg="del">
-        <pc:chgData name="Jacob Wyngaard" userId="6181fcd471e98458" providerId="LiveId" clId="{788BA123-62C9-4DDC-86E5-A6BCA4600216}" dt="2026-02-25T04:00:59.367" v="31" actId="47"/>
-        <pc:sldMkLst>
-          <pc:docMk/>
-          <pc:sldMk cId="3454015702" sldId="313"/>
-        </pc:sldMkLst>
-      </pc:sldChg>
-      <pc:sldChg chg="del">
-        <pc:chgData name="Jacob Wyngaard" userId="6181fcd471e98458" providerId="LiveId" clId="{788BA123-62C9-4DDC-86E5-A6BCA4600216}" dt="2026-02-25T04:00:59.367" v="31" actId="47"/>
-        <pc:sldMkLst>
-          <pc:docMk/>
-          <pc:sldMk cId="3304399246" sldId="314"/>
-        </pc:sldMkLst>
-      </pc:sldChg>
-      <pc:sldChg chg="del">
-        <pc:chgData name="Jacob Wyngaard" userId="6181fcd471e98458" providerId="LiveId" clId="{788BA123-62C9-4DDC-86E5-A6BCA4600216}" dt="2026-02-25T04:00:59.367" v="31" actId="47"/>
-        <pc:sldMkLst>
-          <pc:docMk/>
-          <pc:sldMk cId="63278093" sldId="315"/>
-        </pc:sldMkLst>
-      </pc:sldChg>
-      <pc:sldChg chg="del">
-        <pc:chgData name="Jacob Wyngaard" userId="6181fcd471e98458" providerId="LiveId" clId="{788BA123-62C9-4DDC-86E5-A6BCA4600216}" dt="2026-02-25T04:00:59.367" v="31" actId="47"/>
-        <pc:sldMkLst>
-          <pc:docMk/>
-          <pc:sldMk cId="2270300997" sldId="316"/>
-        </pc:sldMkLst>
-      </pc:sldChg>
-      <pc:sldChg chg="del">
-        <pc:chgData name="Jacob Wyngaard" userId="6181fcd471e98458" providerId="LiveId" clId="{788BA123-62C9-4DDC-86E5-A6BCA4600216}" dt="2026-02-25T04:00:59.367" v="31" actId="47"/>
-        <pc:sldMkLst>
-          <pc:docMk/>
-          <pc:sldMk cId="2445621450" sldId="317"/>
-        </pc:sldMkLst>
-      </pc:sldChg>
-      <pc:sldChg chg="del">
-        <pc:chgData name="Jacob Wyngaard" userId="6181fcd471e98458" providerId="LiveId" clId="{788BA123-62C9-4DDC-86E5-A6BCA4600216}" dt="2026-02-25T04:00:59.367" v="31" actId="47"/>
-        <pc:sldMkLst>
-          <pc:docMk/>
-          <pc:sldMk cId="625058028" sldId="318"/>
-        </pc:sldMkLst>
-      </pc:sldChg>
-      <pc:sldChg chg="del">
-        <pc:chgData name="Jacob Wyngaard" userId="6181fcd471e98458" providerId="LiveId" clId="{788BA123-62C9-4DDC-86E5-A6BCA4600216}" dt="2026-02-25T04:00:59.367" v="31" actId="47"/>
-        <pc:sldMkLst>
-          <pc:docMk/>
-          <pc:sldMk cId="1294231129" sldId="319"/>
-        </pc:sldMkLst>
-      </pc:sldChg>
-      <pc:sldChg chg="del">
-        <pc:chgData name="Jacob Wyngaard" userId="6181fcd471e98458" providerId="LiveId" clId="{788BA123-62C9-4DDC-86E5-A6BCA4600216}" dt="2026-02-25T04:00:59.367" v="31" actId="47"/>
-        <pc:sldMkLst>
-          <pc:docMk/>
-          <pc:sldMk cId="3861588753" sldId="320"/>
-        </pc:sldMkLst>
-      </pc:sldChg>
-      <pc:sldChg chg="del">
-        <pc:chgData name="Jacob Wyngaard" userId="6181fcd471e98458" providerId="LiveId" clId="{788BA123-62C9-4DDC-86E5-A6BCA4600216}" dt="2026-02-25T04:00:59.367" v="31" actId="47"/>
-        <pc:sldMkLst>
-          <pc:docMk/>
-          <pc:sldMk cId="838202772" sldId="321"/>
-        </pc:sldMkLst>
-      </pc:sldChg>
-      <pc:sldChg chg="del">
-        <pc:chgData name="Jacob Wyngaard" userId="6181fcd471e98458" providerId="LiveId" clId="{788BA123-62C9-4DDC-86E5-A6BCA4600216}" dt="2026-02-25T04:00:59.367" v="31" actId="47"/>
-        <pc:sldMkLst>
-          <pc:docMk/>
-          <pc:sldMk cId="3397499750" sldId="322"/>
-        </pc:sldMkLst>
-      </pc:sldChg>
-      <pc:sldChg chg="del">
-        <pc:chgData name="Jacob Wyngaard" userId="6181fcd471e98458" providerId="LiveId" clId="{788BA123-62C9-4DDC-86E5-A6BCA4600216}" dt="2026-02-25T04:00:59.367" v="31" actId="47"/>
-        <pc:sldMkLst>
-          <pc:docMk/>
-          <pc:sldMk cId="3555738580" sldId="323"/>
-        </pc:sldMkLst>
-      </pc:sldChg>
-      <pc:sldChg chg="del">
-        <pc:chgData name="Jacob Wyngaard" userId="6181fcd471e98458" providerId="LiveId" clId="{788BA123-62C9-4DDC-86E5-A6BCA4600216}" dt="2026-02-25T04:00:59.367" v="31" actId="47"/>
-        <pc:sldMkLst>
-          <pc:docMk/>
-          <pc:sldMk cId="1447560798" sldId="324"/>
-        </pc:sldMkLst>
-      </pc:sldChg>
       <pc:sldChg chg="addSp delSp modSp add mod">
         <pc:chgData name="Jacob Wyngaard" userId="6181fcd471e98458" providerId="LiveId" clId="{788BA123-62C9-4DDC-86E5-A6BCA4600216}" dt="2026-02-25T04:39:00.552" v="1351" actId="20577"/>
         <pc:sldMkLst>
           <pc:docMk/>
           <pc:sldMk cId="3167256528" sldId="325"/>
         </pc:sldMkLst>
-        <pc:spChg chg="del mod">
-          <ac:chgData name="Jacob Wyngaard" userId="6181fcd471e98458" providerId="LiveId" clId="{788BA123-62C9-4DDC-86E5-A6BCA4600216}" dt="2026-02-25T04:27:48.929" v="1018" actId="478"/>
-          <ac:spMkLst>
-            <pc:docMk/>
-            <pc:sldMk cId="3167256528" sldId="325"/>
-            <ac:spMk id="2" creationId="{7F448A0B-7C41-4189-EDC2-1D28554EDCDB}"/>
-          </ac:spMkLst>
-        </pc:spChg>
-        <pc:spChg chg="add del mod">
-          <ac:chgData name="Jacob Wyngaard" userId="6181fcd471e98458" providerId="LiveId" clId="{788BA123-62C9-4DDC-86E5-A6BCA4600216}" dt="2026-02-25T04:36:38.106" v="1265" actId="478"/>
-          <ac:spMkLst>
-            <pc:docMk/>
-            <pc:sldMk cId="3167256528" sldId="325"/>
-            <ac:spMk id="3" creationId="{34809210-4E26-F8DB-0222-134FA18D8157}"/>
-          </ac:spMkLst>
-        </pc:spChg>
-        <pc:spChg chg="del">
-          <ac:chgData name="Jacob Wyngaard" userId="6181fcd471e98458" providerId="LiveId" clId="{788BA123-62C9-4DDC-86E5-A6BCA4600216}" dt="2026-02-25T04:00:53.122" v="27" actId="478"/>
-          <ac:spMkLst>
-            <pc:docMk/>
-            <pc:sldMk cId="3167256528" sldId="325"/>
-            <ac:spMk id="3" creationId="{89DF4E2F-C27A-7EC9-2449-64BC7971B4B2}"/>
-          </ac:spMkLst>
-        </pc:spChg>
-        <pc:spChg chg="add del mod">
-          <ac:chgData name="Jacob Wyngaard" userId="6181fcd471e98458" providerId="LiveId" clId="{788BA123-62C9-4DDC-86E5-A6BCA4600216}" dt="2026-02-25T04:27:48.033" v="1017" actId="478"/>
-          <ac:spMkLst>
-            <pc:docMk/>
-            <pc:sldMk cId="3167256528" sldId="325"/>
-            <ac:spMk id="4" creationId="{8E84D567-C31D-140A-DA7F-5A70B0B897C7}"/>
-          </ac:spMkLst>
-        </pc:spChg>
-        <pc:spChg chg="add del mod">
-          <ac:chgData name="Jacob Wyngaard" userId="6181fcd471e98458" providerId="LiveId" clId="{788BA123-62C9-4DDC-86E5-A6BCA4600216}" dt="2026-02-25T04:38:10.940" v="1288" actId="478"/>
-          <ac:spMkLst>
-            <pc:docMk/>
-            <pc:sldMk cId="3167256528" sldId="325"/>
-            <ac:spMk id="5" creationId="{5D235108-FBC3-6AC2-BC99-D3A127EFD331}"/>
-          </ac:spMkLst>
-        </pc:spChg>
-        <pc:spChg chg="del">
-          <ac:chgData name="Jacob Wyngaard" userId="6181fcd471e98458" providerId="LiveId" clId="{788BA123-62C9-4DDC-86E5-A6BCA4600216}" dt="2026-02-25T04:00:53.757" v="28" actId="478"/>
-          <ac:spMkLst>
-            <pc:docMk/>
-            <pc:sldMk cId="3167256528" sldId="325"/>
-            <ac:spMk id="5" creationId="{FE19F218-7A01-BB8D-5528-A8F39F72AA01}"/>
-          </ac:spMkLst>
-        </pc:spChg>
         <pc:spChg chg="add mod">
           <ac:chgData name="Jacob Wyngaard" userId="6181fcd471e98458" providerId="LiveId" clId="{788BA123-62C9-4DDC-86E5-A6BCA4600216}" dt="2026-02-25T04:39:00.552" v="1351" actId="20577"/>
           <ac:spMkLst>
             <pc:docMk/>
             <pc:sldMk cId="3167256528" sldId="325"/>
             <ac:spMk id="7" creationId="{16809599-772B-7CD9-EBEF-88FF41BF00F2}"/>
-          </ac:spMkLst>
-        </pc:spChg>
-        <pc:spChg chg="add del mod">
-          <ac:chgData name="Jacob Wyngaard" userId="6181fcd471e98458" providerId="LiveId" clId="{788BA123-62C9-4DDC-86E5-A6BCA4600216}" dt="2026-02-25T04:27:47.162" v="1016" actId="478"/>
-          <ac:spMkLst>
-            <pc:docMk/>
-            <pc:sldMk cId="3167256528" sldId="325"/>
-            <ac:spMk id="7" creationId="{95380266-A955-6737-EBD9-794CCDEBBE25}"/>
           </ac:spMkLst>
         </pc:spChg>
         <pc:spChg chg="mod">
@@ -509,148 +242,12 @@
             <ac:spMk id="9" creationId="{AE896D22-333A-A5D6-6D9F-2312237C45C5}"/>
           </ac:spMkLst>
         </pc:spChg>
-        <pc:spChg chg="del">
-          <ac:chgData name="Jacob Wyngaard" userId="6181fcd471e98458" providerId="LiveId" clId="{788BA123-62C9-4DDC-86E5-A6BCA4600216}" dt="2026-02-25T04:01:22.655" v="106" actId="478"/>
-          <ac:spMkLst>
-            <pc:docMk/>
-            <pc:sldMk cId="3167256528" sldId="325"/>
-            <ac:spMk id="10" creationId="{B0CD8E4F-DFC8-7CCE-FBD8-CDA99054E9E8}"/>
-          </ac:spMkLst>
-        </pc:spChg>
-        <pc:spChg chg="add del mod">
-          <ac:chgData name="Jacob Wyngaard" userId="6181fcd471e98458" providerId="LiveId" clId="{788BA123-62C9-4DDC-86E5-A6BCA4600216}" dt="2026-02-25T04:20:40.053" v="801" actId="478"/>
-          <ac:spMkLst>
-            <pc:docMk/>
-            <pc:sldMk cId="3167256528" sldId="325"/>
-            <ac:spMk id="11" creationId="{3B548B2B-DC75-13CC-27A0-9CC959815D54}"/>
-          </ac:spMkLst>
-        </pc:spChg>
         <pc:spChg chg="add mod">
           <ac:chgData name="Jacob Wyngaard" userId="6181fcd471e98458" providerId="LiveId" clId="{788BA123-62C9-4DDC-86E5-A6BCA4600216}" dt="2026-02-25T04:38:08.446" v="1287" actId="20577"/>
           <ac:spMkLst>
             <pc:docMk/>
             <pc:sldMk cId="3167256528" sldId="325"/>
             <ac:spMk id="11" creationId="{8DB0E1B1-0BE2-A2CF-A2B0-C6EAC650537F}"/>
-          </ac:spMkLst>
-        </pc:spChg>
-        <pc:spChg chg="del">
-          <ac:chgData name="Jacob Wyngaard" userId="6181fcd471e98458" providerId="LiveId" clId="{788BA123-62C9-4DDC-86E5-A6BCA4600216}" dt="2026-02-25T04:00:50.818" v="26" actId="478"/>
-          <ac:spMkLst>
-            <pc:docMk/>
-            <pc:sldMk cId="3167256528" sldId="325"/>
-            <ac:spMk id="12" creationId="{42FEBAF6-EDB7-EA4B-E369-1E3F8EFF44D6}"/>
-          </ac:spMkLst>
-        </pc:spChg>
-        <pc:spChg chg="add del mod">
-          <ac:chgData name="Jacob Wyngaard" userId="6181fcd471e98458" providerId="LiveId" clId="{788BA123-62C9-4DDC-86E5-A6BCA4600216}" dt="2026-02-25T04:20:42.975" v="802" actId="478"/>
-          <ac:spMkLst>
-            <pc:docMk/>
-            <pc:sldMk cId="3167256528" sldId="325"/>
-            <ac:spMk id="13" creationId="{ABF51497-9BB0-0C0D-7EA5-B9252762B40D}"/>
-          </ac:spMkLst>
-        </pc:spChg>
-        <pc:spChg chg="add del mod">
-          <ac:chgData name="Jacob Wyngaard" userId="6181fcd471e98458" providerId="LiveId" clId="{788BA123-62C9-4DDC-86E5-A6BCA4600216}" dt="2026-02-25T04:29:22.023" v="1038" actId="478"/>
-          <ac:spMkLst>
-            <pc:docMk/>
-            <pc:sldMk cId="3167256528" sldId="325"/>
-            <ac:spMk id="14" creationId="{2D016ED0-7766-592E-F4C6-BA7F0B16EDBF}"/>
-          </ac:spMkLst>
-        </pc:spChg>
-        <pc:spChg chg="add del mod">
-          <ac:chgData name="Jacob Wyngaard" userId="6181fcd471e98458" providerId="LiveId" clId="{788BA123-62C9-4DDC-86E5-A6BCA4600216}" dt="2026-02-25T04:20:47.180" v="803" actId="478"/>
-          <ac:spMkLst>
-            <pc:docMk/>
-            <pc:sldMk cId="3167256528" sldId="325"/>
-            <ac:spMk id="16" creationId="{5F972120-977A-F112-335D-0A28AB647F5A}"/>
-          </ac:spMkLst>
-        </pc:spChg>
-        <pc:spChg chg="del">
-          <ac:chgData name="Jacob Wyngaard" userId="6181fcd471e98458" providerId="LiveId" clId="{788BA123-62C9-4DDC-86E5-A6BCA4600216}" dt="2026-02-25T04:01:21.959" v="105" actId="478"/>
-          <ac:spMkLst>
-            <pc:docMk/>
-            <pc:sldMk cId="3167256528" sldId="325"/>
-            <ac:spMk id="17" creationId="{0CF498D4-2F4E-1621-DBFD-0B1E4BC085DB}"/>
-          </ac:spMkLst>
-        </pc:spChg>
-        <pc:spChg chg="del">
-          <ac:chgData name="Jacob Wyngaard" userId="6181fcd471e98458" providerId="LiveId" clId="{788BA123-62C9-4DDC-86E5-A6BCA4600216}" dt="2026-02-25T04:01:23.303" v="107" actId="478"/>
-          <ac:spMkLst>
-            <pc:docMk/>
-            <pc:sldMk cId="3167256528" sldId="325"/>
-            <ac:spMk id="18" creationId="{41AC073E-E765-4EB5-73A2-29A07A8038DB}"/>
-          </ac:spMkLst>
-        </pc:spChg>
-        <pc:spChg chg="add del mod">
-          <ac:chgData name="Jacob Wyngaard" userId="6181fcd471e98458" providerId="LiveId" clId="{788BA123-62C9-4DDC-86E5-A6BCA4600216}" dt="2026-02-25T04:20:47.180" v="803" actId="478"/>
-          <ac:spMkLst>
-            <pc:docMk/>
-            <pc:sldMk cId="3167256528" sldId="325"/>
-            <ac:spMk id="19" creationId="{9D11F360-76F2-22FD-C05D-F0EA9F416EE2}"/>
-          </ac:spMkLst>
-        </pc:spChg>
-        <pc:spChg chg="add del mod">
-          <ac:chgData name="Jacob Wyngaard" userId="6181fcd471e98458" providerId="LiveId" clId="{788BA123-62C9-4DDC-86E5-A6BCA4600216}" dt="2026-02-25T04:20:47.180" v="803" actId="478"/>
-          <ac:spMkLst>
-            <pc:docMk/>
-            <pc:sldMk cId="3167256528" sldId="325"/>
-            <ac:spMk id="20" creationId="{EEFD2F39-30D6-AC5D-616B-0CF76A892AB5}"/>
-          </ac:spMkLst>
-        </pc:spChg>
-        <pc:spChg chg="del mod">
-          <ac:chgData name="Jacob Wyngaard" userId="6181fcd471e98458" providerId="LiveId" clId="{788BA123-62C9-4DDC-86E5-A6BCA4600216}" dt="2026-02-25T04:01:21.291" v="104" actId="478"/>
-          <ac:spMkLst>
-            <pc:docMk/>
-            <pc:sldMk cId="3167256528" sldId="325"/>
-            <ac:spMk id="21" creationId="{8DC8A0E6-2EB8-CE13-468C-AD828285FBD1}"/>
-          </ac:spMkLst>
-        </pc:spChg>
-        <pc:spChg chg="del">
-          <ac:chgData name="Jacob Wyngaard" userId="6181fcd471e98458" providerId="LiveId" clId="{788BA123-62C9-4DDC-86E5-A6BCA4600216}" dt="2026-02-25T04:00:54.660" v="29" actId="478"/>
-          <ac:spMkLst>
-            <pc:docMk/>
-            <pc:sldMk cId="3167256528" sldId="325"/>
-            <ac:spMk id="22" creationId="{D28B59F9-122B-5EBA-1388-CAA4BA7D1B96}"/>
-          </ac:spMkLst>
-        </pc:spChg>
-        <pc:spChg chg="add del mod">
-          <ac:chgData name="Jacob Wyngaard" userId="6181fcd471e98458" providerId="LiveId" clId="{788BA123-62C9-4DDC-86E5-A6BCA4600216}" dt="2026-02-25T04:20:47.180" v="803" actId="478"/>
-          <ac:spMkLst>
-            <pc:docMk/>
-            <pc:sldMk cId="3167256528" sldId="325"/>
-            <ac:spMk id="23" creationId="{EBFA049B-0F9E-09B3-A026-1775C4233C23}"/>
-          </ac:spMkLst>
-        </pc:spChg>
-        <pc:spChg chg="add del mod">
-          <ac:chgData name="Jacob Wyngaard" userId="6181fcd471e98458" providerId="LiveId" clId="{788BA123-62C9-4DDC-86E5-A6BCA4600216}" dt="2026-02-25T04:29:25.309" v="1040" actId="478"/>
-          <ac:spMkLst>
-            <pc:docMk/>
-            <pc:sldMk cId="3167256528" sldId="325"/>
-            <ac:spMk id="24" creationId="{884273BD-133C-07A0-B357-F1326C17695D}"/>
-          </ac:spMkLst>
-        </pc:spChg>
-        <pc:spChg chg="del">
-          <ac:chgData name="Jacob Wyngaard" userId="6181fcd471e98458" providerId="LiveId" clId="{788BA123-62C9-4DDC-86E5-A6BCA4600216}" dt="2026-02-25T04:00:55.500" v="30" actId="478"/>
-          <ac:spMkLst>
-            <pc:docMk/>
-            <pc:sldMk cId="3167256528" sldId="325"/>
-            <ac:spMk id="25" creationId="{FFE94170-44CF-7241-8F2D-105D4C19411C}"/>
-          </ac:spMkLst>
-        </pc:spChg>
-        <pc:spChg chg="add del mod">
-          <ac:chgData name="Jacob Wyngaard" userId="6181fcd471e98458" providerId="LiveId" clId="{788BA123-62C9-4DDC-86E5-A6BCA4600216}" dt="2026-02-25T04:29:25.309" v="1040" actId="478"/>
-          <ac:spMkLst>
-            <pc:docMk/>
-            <pc:sldMk cId="3167256528" sldId="325"/>
-            <ac:spMk id="26" creationId="{9EF53F6A-0239-67E5-44C2-C720D700EC86}"/>
-          </ac:spMkLst>
-        </pc:spChg>
-        <pc:spChg chg="add del mod">
-          <ac:chgData name="Jacob Wyngaard" userId="6181fcd471e98458" providerId="LiveId" clId="{788BA123-62C9-4DDC-86E5-A6BCA4600216}" dt="2026-02-25T04:29:23.132" v="1039" actId="478"/>
-          <ac:spMkLst>
-            <pc:docMk/>
-            <pc:sldMk cId="3167256528" sldId="325"/>
-            <ac:spMk id="27" creationId="{8D44E026-099E-B3C4-7CFA-69C9DA3DAC7D}"/>
           </ac:spMkLst>
         </pc:spChg>
         <pc:spChg chg="add mod">
@@ -661,29 +258,6 @@
             <ac:spMk id="29" creationId="{13C9BA7E-E634-6540-A8DC-41CD9793C726}"/>
           </ac:spMkLst>
         </pc:spChg>
-        <pc:spChg chg="add del mod">
-          <ac:chgData name="Jacob Wyngaard" userId="6181fcd471e98458" providerId="LiveId" clId="{788BA123-62C9-4DDC-86E5-A6BCA4600216}" dt="2026-02-25T04:32:17.104" v="1088" actId="478"/>
-          <ac:spMkLst>
-            <pc:docMk/>
-            <pc:sldMk cId="3167256528" sldId="325"/>
-            <ac:spMk id="30" creationId="{B8D286F9-300C-A60C-7FE1-D8DA68BEE863}"/>
-          </ac:spMkLst>
-        </pc:spChg>
-        <pc:spChg chg="add del mod">
-          <ac:chgData name="Jacob Wyngaard" userId="6181fcd471e98458" providerId="LiveId" clId="{788BA123-62C9-4DDC-86E5-A6BCA4600216}" dt="2026-02-25T04:33:25.230" v="1103" actId="478"/>
-          <ac:spMkLst>
-            <pc:docMk/>
-            <pc:sldMk cId="3167256528" sldId="325"/>
-            <ac:spMk id="31" creationId="{8A4D3D95-F166-EAF9-1DE6-E63F8444891D}"/>
-          </ac:spMkLst>
-        </pc:spChg>
-      </pc:sldChg>
-      <pc:sldChg chg="add del">
-        <pc:chgData name="Jacob Wyngaard" userId="6181fcd471e98458" providerId="LiveId" clId="{788BA123-62C9-4DDC-86E5-A6BCA4600216}" dt="2026-02-25T04:35:27.242" v="1262" actId="47"/>
-        <pc:sldMkLst>
-          <pc:docMk/>
-          <pc:sldMk cId="2811799499" sldId="326"/>
-        </pc:sldMkLst>
       </pc:sldChg>
       <pc:sldChg chg="modSp add mod ord">
         <pc:chgData name="Jacob Wyngaard" userId="6181fcd471e98458" providerId="LiveId" clId="{788BA123-62C9-4DDC-86E5-A6BCA4600216}" dt="2026-02-25T04:27:40.959" v="1015" actId="1036"/>
@@ -739,6 +313,132 @@
             <ac:spMk id="29" creationId="{FBFB7AF7-6A0E-9123-9005-FC3D4696549D}"/>
           </ac:spMkLst>
         </pc:spChg>
+      </pc:sldChg>
+      <pc:sldChg chg="addSp delSp modSp add mod">
+        <pc:chgData name="Jacob Wyngaard" userId="6181fcd471e98458" providerId="LiveId" clId="{788BA123-62C9-4DDC-86E5-A6BCA4600216}" dt="2026-03-02T15:41:08.506" v="1601" actId="20577"/>
+        <pc:sldMkLst>
+          <pc:docMk/>
+          <pc:sldMk cId="3160870811" sldId="328"/>
+        </pc:sldMkLst>
+        <pc:spChg chg="add mod">
+          <ac:chgData name="Jacob Wyngaard" userId="6181fcd471e98458" providerId="LiveId" clId="{788BA123-62C9-4DDC-86E5-A6BCA4600216}" dt="2026-03-02T15:38:15.523" v="1511" actId="1076"/>
+          <ac:spMkLst>
+            <pc:docMk/>
+            <pc:sldMk cId="3160870811" sldId="328"/>
+            <ac:spMk id="2" creationId="{D8B59260-86F9-C45F-867A-89CF26E5AE99}"/>
+          </ac:spMkLst>
+        </pc:spChg>
+        <pc:spChg chg="add mod">
+          <ac:chgData name="Jacob Wyngaard" userId="6181fcd471e98458" providerId="LiveId" clId="{788BA123-62C9-4DDC-86E5-A6BCA4600216}" dt="2026-03-02T15:38:29.775" v="1514" actId="1076"/>
+          <ac:spMkLst>
+            <pc:docMk/>
+            <pc:sldMk cId="3160870811" sldId="328"/>
+            <ac:spMk id="3" creationId="{CA350D37-D931-F7E5-7E89-BB75BF7049DD}"/>
+          </ac:spMkLst>
+        </pc:spChg>
+        <pc:spChg chg="add mod">
+          <ac:chgData name="Jacob Wyngaard" userId="6181fcd471e98458" providerId="LiveId" clId="{788BA123-62C9-4DDC-86E5-A6BCA4600216}" dt="2026-03-02T15:38:50.222" v="1524" actId="1076"/>
+          <ac:spMkLst>
+            <pc:docMk/>
+            <pc:sldMk cId="3160870811" sldId="328"/>
+            <ac:spMk id="4" creationId="{C1A28DFB-63D9-201D-EF8D-5360625D1CE5}"/>
+          </ac:spMkLst>
+        </pc:spChg>
+        <pc:spChg chg="del">
+          <ac:chgData name="Jacob Wyngaard" userId="6181fcd471e98458" providerId="LiveId" clId="{788BA123-62C9-4DDC-86E5-A6BCA4600216}" dt="2026-03-02T15:23:38.840" v="1353" actId="478"/>
+          <ac:spMkLst>
+            <pc:docMk/>
+            <pc:sldMk cId="3160870811" sldId="328"/>
+            <ac:spMk id="7" creationId="{9C14DAA1-E853-DB83-EA91-0C6F243CE718}"/>
+          </ac:spMkLst>
+        </pc:spChg>
+        <pc:spChg chg="mod">
+          <ac:chgData name="Jacob Wyngaard" userId="6181fcd471e98458" providerId="LiveId" clId="{788BA123-62C9-4DDC-86E5-A6BCA4600216}" dt="2026-03-02T15:25:04.151" v="1389" actId="1076"/>
+          <ac:spMkLst>
+            <pc:docMk/>
+            <pc:sldMk cId="3160870811" sldId="328"/>
+            <ac:spMk id="9" creationId="{63422E65-D36F-4F23-6735-2EF06556A13A}"/>
+          </ac:spMkLst>
+        </pc:spChg>
+        <pc:spChg chg="add mod">
+          <ac:chgData name="Jacob Wyngaard" userId="6181fcd471e98458" providerId="LiveId" clId="{788BA123-62C9-4DDC-86E5-A6BCA4600216}" dt="2026-03-02T15:38:19.560" v="1513" actId="403"/>
+          <ac:spMkLst>
+            <pc:docMk/>
+            <pc:sldMk cId="3160870811" sldId="328"/>
+            <ac:spMk id="10" creationId="{9C62B76C-3B33-FE38-4F6D-E0255CF9E017}"/>
+          </ac:spMkLst>
+        </pc:spChg>
+        <pc:spChg chg="del">
+          <ac:chgData name="Jacob Wyngaard" userId="6181fcd471e98458" providerId="LiveId" clId="{788BA123-62C9-4DDC-86E5-A6BCA4600216}" dt="2026-03-02T15:23:40.004" v="1354" actId="478"/>
+          <ac:spMkLst>
+            <pc:docMk/>
+            <pc:sldMk cId="3160870811" sldId="328"/>
+            <ac:spMk id="11" creationId="{C9404A8D-8A0A-5A9B-2A4C-E3EA79D6759A}"/>
+          </ac:spMkLst>
+        </pc:spChg>
+        <pc:spChg chg="add mod">
+          <ac:chgData name="Jacob Wyngaard" userId="6181fcd471e98458" providerId="LiveId" clId="{788BA123-62C9-4DDC-86E5-A6BCA4600216}" dt="2026-03-02T15:38:10.247" v="1510" actId="1076"/>
+          <ac:spMkLst>
+            <pc:docMk/>
+            <pc:sldMk cId="3160870811" sldId="328"/>
+            <ac:spMk id="12" creationId="{49068EE0-5EC4-60E1-A425-C1E8D05C878D}"/>
+          </ac:spMkLst>
+        </pc:spChg>
+        <pc:spChg chg="add mod">
+          <ac:chgData name="Jacob Wyngaard" userId="6181fcd471e98458" providerId="LiveId" clId="{788BA123-62C9-4DDC-86E5-A6BCA4600216}" dt="2026-03-02T15:38:52.957" v="1528" actId="1035"/>
+          <ac:spMkLst>
+            <pc:docMk/>
+            <pc:sldMk cId="3160870811" sldId="328"/>
+            <ac:spMk id="13" creationId="{A5653989-540B-604C-1EB3-60AC1B228650}"/>
+          </ac:spMkLst>
+        </pc:spChg>
+        <pc:spChg chg="add mod">
+          <ac:chgData name="Jacob Wyngaard" userId="6181fcd471e98458" providerId="LiveId" clId="{788BA123-62C9-4DDC-86E5-A6BCA4600216}" dt="2026-03-02T15:40:34.709" v="1580" actId="403"/>
+          <ac:spMkLst>
+            <pc:docMk/>
+            <pc:sldMk cId="3160870811" sldId="328"/>
+            <ac:spMk id="17" creationId="{A7DE2D7A-6674-D01F-6109-DFBEA797AE19}"/>
+          </ac:spMkLst>
+        </pc:spChg>
+        <pc:spChg chg="del">
+          <ac:chgData name="Jacob Wyngaard" userId="6181fcd471e98458" providerId="LiveId" clId="{788BA123-62C9-4DDC-86E5-A6BCA4600216}" dt="2026-03-02T15:23:40.751" v="1355" actId="478"/>
+          <ac:spMkLst>
+            <pc:docMk/>
+            <pc:sldMk cId="3160870811" sldId="328"/>
+            <ac:spMk id="29" creationId="{6310C9DA-55CB-A130-1077-769CF9BCCC13}"/>
+          </ac:spMkLst>
+        </pc:spChg>
+        <pc:graphicFrameChg chg="add mod modGraphic">
+          <ac:chgData name="Jacob Wyngaard" userId="6181fcd471e98458" providerId="LiveId" clId="{788BA123-62C9-4DDC-86E5-A6BCA4600216}" dt="2026-03-02T15:40:02.905" v="1564" actId="1076"/>
+          <ac:graphicFrameMkLst>
+            <pc:docMk/>
+            <pc:sldMk cId="3160870811" sldId="328"/>
+            <ac:graphicFrameMk id="5" creationId="{E54ACC54-DA31-B62F-5B88-64E59299211C}"/>
+          </ac:graphicFrameMkLst>
+        </pc:graphicFrameChg>
+        <pc:graphicFrameChg chg="add mod modGraphic">
+          <ac:chgData name="Jacob Wyngaard" userId="6181fcd471e98458" providerId="LiveId" clId="{788BA123-62C9-4DDC-86E5-A6BCA4600216}" dt="2026-03-02T15:40:55.593" v="1592" actId="20577"/>
+          <ac:graphicFrameMkLst>
+            <pc:docMk/>
+            <pc:sldMk cId="3160870811" sldId="328"/>
+            <ac:graphicFrameMk id="14" creationId="{862149C5-A7CE-5D95-2698-C92B9E387C65}"/>
+          </ac:graphicFrameMkLst>
+        </pc:graphicFrameChg>
+        <pc:graphicFrameChg chg="add mod">
+          <ac:chgData name="Jacob Wyngaard" userId="6181fcd471e98458" providerId="LiveId" clId="{788BA123-62C9-4DDC-86E5-A6BCA4600216}" dt="2026-03-02T15:41:08.506" v="1601" actId="20577"/>
+          <ac:graphicFrameMkLst>
+            <pc:docMk/>
+            <pc:sldMk cId="3160870811" sldId="328"/>
+            <ac:graphicFrameMk id="15" creationId="{81EA60BA-2479-BF02-3BCC-68C8AC03DC07}"/>
+          </ac:graphicFrameMkLst>
+        </pc:graphicFrameChg>
+      </pc:sldChg>
+      <pc:sldChg chg="add del">
+        <pc:chgData name="Jacob Wyngaard" userId="6181fcd471e98458" providerId="LiveId" clId="{788BA123-62C9-4DDC-86E5-A6BCA4600216}" dt="2026-03-02T15:41:31.387" v="1603" actId="47"/>
+        <pc:sldMkLst>
+          <pc:docMk/>
+          <pc:sldMk cId="2621891374" sldId="329"/>
+        </pc:sldMkLst>
       </pc:sldChg>
     </pc:docChg>
   </pc:docChgLst>
@@ -827,7 +527,7 @@
           <a:p>
             <a:fld id="{351EB116-73EE-4936-876D-CA6054346043}" type="datetimeFigureOut">
               <a:rPr lang="en-US" smtClean="0"/>
-              <a:t>2/24/2026</a:t>
+              <a:t>3/2/2026</a:t>
             </a:fld>
             <a:endParaRPr lang="en-US"/>
           </a:p>
@@ -1439,6 +1139,121 @@
 </p:notes>
 </file>
 
+<file path=ppt/notesSlides/notesSlide4.xml><?xml version="1.0" encoding="utf-8"?>
+<p:notes xmlns:a="http://schemas.openxmlformats.org/drawingml/2006/main" xmlns:r="http://schemas.openxmlformats.org/officeDocument/2006/relationships" xmlns:p="http://schemas.openxmlformats.org/presentationml/2006/main">
+  <p:cSld>
+    <p:spTree>
+      <p:nvGrpSpPr>
+        <p:cNvPr id="1" name="">
+          <a:extLst>
+            <a:ext uri="{FF2B5EF4-FFF2-40B4-BE49-F238E27FC236}">
+              <a16:creationId xmlns:a16="http://schemas.microsoft.com/office/drawing/2014/main" id="{B73112DF-8033-DE7C-D0B3-E0844275A4B5}"/>
+            </a:ext>
+          </a:extLst>
+        </p:cNvPr>
+        <p:cNvGrpSpPr/>
+        <p:nvPr/>
+      </p:nvGrpSpPr>
+      <p:grpSpPr>
+        <a:xfrm>
+          <a:off x="0" y="0"/>
+          <a:ext cx="0" cy="0"/>
+          <a:chOff x="0" y="0"/>
+          <a:chExt cx="0" cy="0"/>
+        </a:xfrm>
+      </p:grpSpPr>
+      <p:sp>
+        <p:nvSpPr>
+          <p:cNvPr id="2" name="Slide Image Placeholder 1">
+            <a:extLst>
+              <a:ext uri="{FF2B5EF4-FFF2-40B4-BE49-F238E27FC236}">
+                <a16:creationId xmlns:a16="http://schemas.microsoft.com/office/drawing/2014/main" id="{86FE97B5-8437-A143-AAB4-D10154F48E1F}"/>
+              </a:ext>
+            </a:extLst>
+          </p:cNvPr>
+          <p:cNvSpPr>
+            <a:spLocks noGrp="1" noRot="1" noChangeAspect="1"/>
+          </p:cNvSpPr>
+          <p:nvPr>
+            <p:ph type="sldImg"/>
+          </p:nvPr>
+        </p:nvSpPr>
+        <p:spPr/>
+        <p:txBody>
+          <a:bodyPr/>
+          <a:lstStyle/>
+          <a:p>
+            <a:endParaRPr lang="en-US"/>
+          </a:p>
+        </p:txBody>
+      </p:sp>
+      <p:sp>
+        <p:nvSpPr>
+          <p:cNvPr id="3" name="Notes Placeholder 2">
+            <a:extLst>
+              <a:ext uri="{FF2B5EF4-FFF2-40B4-BE49-F238E27FC236}">
+                <a16:creationId xmlns:a16="http://schemas.microsoft.com/office/drawing/2014/main" id="{908800DB-5187-FD74-CEE3-F8CC640634A2}"/>
+              </a:ext>
+            </a:extLst>
+          </p:cNvPr>
+          <p:cNvSpPr>
+            <a:spLocks noGrp="1"/>
+          </p:cNvSpPr>
+          <p:nvPr>
+            <p:ph type="body" idx="1"/>
+          </p:nvPr>
+        </p:nvSpPr>
+        <p:spPr/>
+        <p:txBody>
+          <a:bodyPr/>
+          <a:lstStyle/>
+          <a:p>
+            <a:endParaRPr lang="en-US" dirty="0"/>
+          </a:p>
+        </p:txBody>
+      </p:sp>
+      <p:sp>
+        <p:nvSpPr>
+          <p:cNvPr id="4" name="Slide Number Placeholder 3">
+            <a:extLst>
+              <a:ext uri="{FF2B5EF4-FFF2-40B4-BE49-F238E27FC236}">
+                <a16:creationId xmlns:a16="http://schemas.microsoft.com/office/drawing/2014/main" id="{A09134CB-01D2-3A36-F764-38F2EB62E005}"/>
+              </a:ext>
+            </a:extLst>
+          </p:cNvPr>
+          <p:cNvSpPr>
+            <a:spLocks noGrp="1"/>
+          </p:cNvSpPr>
+          <p:nvPr>
+            <p:ph type="sldNum" sz="quarter" idx="5"/>
+          </p:nvPr>
+        </p:nvSpPr>
+        <p:spPr/>
+        <p:txBody>
+          <a:bodyPr/>
+          <a:lstStyle/>
+          <a:p>
+            <a:fld id="{994C46F5-682E-4C43-810E-48CF7D15B873}" type="slidenum">
+              <a:rPr lang="en-US" smtClean="0"/>
+              <a:t>5</a:t>
+            </a:fld>
+            <a:endParaRPr lang="en-US"/>
+          </a:p>
+        </p:txBody>
+      </p:sp>
+    </p:spTree>
+    <p:extLst>
+      <p:ext uri="{BB962C8B-B14F-4D97-AF65-F5344CB8AC3E}">
+        <p14:creationId xmlns:p14="http://schemas.microsoft.com/office/powerpoint/2010/main" val="2265471584"/>
+      </p:ext>
+    </p:extLst>
+  </p:cSld>
+  <p:clrMapOvr>
+    <a:masterClrMapping/>
+  </p:clrMapOvr>
+</p:notes>
+</file>
+
 <file path=ppt/slideLayouts/slideLayout1.xml><?xml version="1.0" encoding="utf-8"?>
 <p:sldLayout xmlns:a="http://schemas.openxmlformats.org/drawingml/2006/main" xmlns:r="http://schemas.openxmlformats.org/officeDocument/2006/relationships" xmlns:p="http://schemas.openxmlformats.org/presentationml/2006/main" type="title" preserve="1">
   <p:cSld name="Title Slide">
@@ -1586,7 +1401,7 @@
           <a:p>
             <a:fld id="{4E9DFCA7-2E84-49E5-A4F2-77D92A699F3D}" type="datetimeFigureOut">
               <a:rPr lang="en-US" smtClean="0"/>
-              <a:t>2/24/2026</a:t>
+              <a:t>3/2/2026</a:t>
             </a:fld>
             <a:endParaRPr lang="en-US"/>
           </a:p>
@@ -1784,7 +1599,7 @@
           <a:p>
             <a:fld id="{4E9DFCA7-2E84-49E5-A4F2-77D92A699F3D}" type="datetimeFigureOut">
               <a:rPr lang="en-US" smtClean="0"/>
-              <a:t>2/24/2026</a:t>
+              <a:t>3/2/2026</a:t>
             </a:fld>
             <a:endParaRPr lang="en-US"/>
           </a:p>
@@ -1992,7 +1807,7 @@
           <a:p>
             <a:fld id="{4E9DFCA7-2E84-49E5-A4F2-77D92A699F3D}" type="datetimeFigureOut">
               <a:rPr lang="en-US" smtClean="0"/>
-              <a:t>2/24/2026</a:t>
+              <a:t>3/2/2026</a:t>
             </a:fld>
             <a:endParaRPr lang="en-US"/>
           </a:p>
@@ -2190,7 +2005,7 @@
           <a:p>
             <a:fld id="{4E9DFCA7-2E84-49E5-A4F2-77D92A699F3D}" type="datetimeFigureOut">
               <a:rPr lang="en-US" smtClean="0"/>
-              <a:t>2/24/2026</a:t>
+              <a:t>3/2/2026</a:t>
             </a:fld>
             <a:endParaRPr lang="en-US"/>
           </a:p>
@@ -2465,7 +2280,7 @@
           <a:p>
             <a:fld id="{4E9DFCA7-2E84-49E5-A4F2-77D92A699F3D}" type="datetimeFigureOut">
               <a:rPr lang="en-US" smtClean="0"/>
-              <a:t>2/24/2026</a:t>
+              <a:t>3/2/2026</a:t>
             </a:fld>
             <a:endParaRPr lang="en-US"/>
           </a:p>
@@ -2730,7 +2545,7 @@
           <a:p>
             <a:fld id="{4E9DFCA7-2E84-49E5-A4F2-77D92A699F3D}" type="datetimeFigureOut">
               <a:rPr lang="en-US" smtClean="0"/>
-              <a:t>2/24/2026</a:t>
+              <a:t>3/2/2026</a:t>
             </a:fld>
             <a:endParaRPr lang="en-US"/>
           </a:p>
@@ -3142,7 +2957,7 @@
           <a:p>
             <a:fld id="{4E9DFCA7-2E84-49E5-A4F2-77D92A699F3D}" type="datetimeFigureOut">
               <a:rPr lang="en-US" smtClean="0"/>
-              <a:t>2/24/2026</a:t>
+              <a:t>3/2/2026</a:t>
             </a:fld>
             <a:endParaRPr lang="en-US"/>
           </a:p>
@@ -3283,7 +3098,7 @@
           <a:p>
             <a:fld id="{4E9DFCA7-2E84-49E5-A4F2-77D92A699F3D}" type="datetimeFigureOut">
               <a:rPr lang="en-US" smtClean="0"/>
-              <a:t>2/24/2026</a:t>
+              <a:t>3/2/2026</a:t>
             </a:fld>
             <a:endParaRPr lang="en-US"/>
           </a:p>
@@ -3396,7 +3211,7 @@
           <a:p>
             <a:fld id="{4E9DFCA7-2E84-49E5-A4F2-77D92A699F3D}" type="datetimeFigureOut">
               <a:rPr lang="en-US" smtClean="0"/>
-              <a:t>2/24/2026</a:t>
+              <a:t>3/2/2026</a:t>
             </a:fld>
             <a:endParaRPr lang="en-US"/>
           </a:p>
@@ -3707,7 +3522,7 @@
           <a:p>
             <a:fld id="{4E9DFCA7-2E84-49E5-A4F2-77D92A699F3D}" type="datetimeFigureOut">
               <a:rPr lang="en-US" smtClean="0"/>
-              <a:t>2/24/2026</a:t>
+              <a:t>3/2/2026</a:t>
             </a:fld>
             <a:endParaRPr lang="en-US"/>
           </a:p>
@@ -3995,7 +3810,7 @@
           <a:p>
             <a:fld id="{4E9DFCA7-2E84-49E5-A4F2-77D92A699F3D}" type="datetimeFigureOut">
               <a:rPr lang="en-US" smtClean="0"/>
-              <a:t>2/24/2026</a:t>
+              <a:t>3/2/2026</a:t>
             </a:fld>
             <a:endParaRPr lang="en-US"/>
           </a:p>
@@ -4236,7 +4051,7 @@
           <a:p>
             <a:fld id="{4E9DFCA7-2E84-49E5-A4F2-77D92A699F3D}" type="datetimeFigureOut">
               <a:rPr lang="en-US" smtClean="0"/>
-              <a:t>2/24/2026</a:t>
+              <a:t>3/2/2026</a:t>
             </a:fld>
             <a:endParaRPr lang="en-US"/>
           </a:p>
@@ -8614,8 +8429,8 @@
           </p:sp>
         </mc:Fallback>
       </mc:AlternateContent>
-      <mc:AlternateContent xmlns:mc="http://schemas.openxmlformats.org/markup-compatibility/2006">
-        <mc:Choice xmlns:a14="http://schemas.microsoft.com/office/drawing/2010/main" Requires="a14">
+      <mc:AlternateContent xmlns:mc="http://schemas.openxmlformats.org/markup-compatibility/2006" xmlns:a14="http://schemas.microsoft.com/office/drawing/2010/main">
+        <mc:Choice Requires="a14">
           <p:sp>
             <p:nvSpPr>
               <p:cNvPr id="7" name="TextBox 6">
@@ -8644,7 +8459,6 @@
               </a:bodyPr>
               <a:lstStyle/>
               <a:p>
-                <a:pPr/>
                 <a:r>
                   <a:rPr lang="en-US" sz="2400" dirty="0">
                     <a:ea typeface="Cambria Math" panose="02040503050406030204" pitchFamily="18" charset="0"/>
@@ -8967,7 +8781,7 @@
             </p:txBody>
           </p:sp>
         </mc:Choice>
-        <mc:Fallback>
+        <mc:Fallback xmlns="">
           <p:sp>
             <p:nvSpPr>
               <p:cNvPr id="7" name="TextBox 6">
@@ -9012,8 +8826,8 @@
           </p:sp>
         </mc:Fallback>
       </mc:AlternateContent>
-      <mc:AlternateContent xmlns:mc="http://schemas.openxmlformats.org/markup-compatibility/2006">
-        <mc:Choice xmlns:a14="http://schemas.microsoft.com/office/drawing/2010/main" Requires="a14">
+      <mc:AlternateContent xmlns:mc="http://schemas.openxmlformats.org/markup-compatibility/2006" xmlns:a14="http://schemas.microsoft.com/office/drawing/2010/main">
+        <mc:Choice Requires="a14">
           <p:sp>
             <p:nvSpPr>
               <p:cNvPr id="11" name="TextBox 10">
@@ -9042,7 +8856,6 @@
               </a:bodyPr>
               <a:lstStyle/>
               <a:p>
-                <a:pPr/>
                 <a:r>
                   <a:rPr lang="en-US" sz="2400" dirty="0"/>
                   <a:t>Claim: </a:t>
@@ -9351,7 +9164,7 @@
             </p:txBody>
           </p:sp>
         </mc:Choice>
-        <mc:Fallback>
+        <mc:Fallback xmlns="">
           <p:sp>
             <p:nvSpPr>
               <p:cNvPr id="11" name="TextBox 10">
@@ -9400,6 +9213,5283 @@
     <p:extLst>
       <p:ext uri="{BB962C8B-B14F-4D97-AF65-F5344CB8AC3E}">
         <p14:creationId xmlns:p14="http://schemas.microsoft.com/office/powerpoint/2010/main" val="3167256528"/>
+      </p:ext>
+    </p:extLst>
+  </p:cSld>
+  <p:clrMapOvr>
+    <a:masterClrMapping/>
+  </p:clrMapOvr>
+</p:sld>
+</file>
+
+<file path=ppt/slides/slide5.xml><?xml version="1.0" encoding="utf-8"?>
+<p:sld xmlns:a="http://schemas.openxmlformats.org/drawingml/2006/main" xmlns:r="http://schemas.openxmlformats.org/officeDocument/2006/relationships" xmlns:p="http://schemas.openxmlformats.org/presentationml/2006/main">
+  <p:cSld>
+    <p:spTree>
+      <p:nvGrpSpPr>
+        <p:cNvPr id="1" name="">
+          <a:extLst>
+            <a:ext uri="{FF2B5EF4-FFF2-40B4-BE49-F238E27FC236}">
+              <a16:creationId xmlns:a16="http://schemas.microsoft.com/office/drawing/2014/main" id="{6BBA87E0-846C-79F4-3427-1AA30D713FE6}"/>
+            </a:ext>
+          </a:extLst>
+        </p:cNvPr>
+        <p:cNvGrpSpPr/>
+        <p:nvPr/>
+      </p:nvGrpSpPr>
+      <p:grpSpPr>
+        <a:xfrm>
+          <a:off x="0" y="0"/>
+          <a:ext cx="0" cy="0"/>
+          <a:chOff x="0" y="0"/>
+          <a:chExt cx="0" cy="0"/>
+        </a:xfrm>
+      </p:grpSpPr>
+      <p:sp>
+        <p:nvSpPr>
+          <p:cNvPr id="6" name="Rectangle 5">
+            <a:extLst>
+              <a:ext uri="{FF2B5EF4-FFF2-40B4-BE49-F238E27FC236}">
+                <a16:creationId xmlns:a16="http://schemas.microsoft.com/office/drawing/2014/main" id="{6CB10ACD-57DB-5A14-80D1-D8B0B27B0E56}"/>
+              </a:ext>
+            </a:extLst>
+          </p:cNvPr>
+          <p:cNvSpPr/>
+          <p:nvPr/>
+        </p:nvSpPr>
+        <p:spPr>
+          <a:xfrm>
+            <a:off x="4916" y="0"/>
+            <a:ext cx="12192000" cy="1465006"/>
+          </a:xfrm>
+          <a:prstGeom prst="rect">
+            <a:avLst/>
+          </a:prstGeom>
+          <a:solidFill>
+            <a:srgbClr val="064EA1"/>
+          </a:solidFill>
+        </p:spPr>
+        <p:style>
+          <a:lnRef idx="2">
+            <a:schemeClr val="accent1">
+              <a:shade val="15000"/>
+            </a:schemeClr>
+          </a:lnRef>
+          <a:fillRef idx="1">
+            <a:schemeClr val="accent1"/>
+          </a:fillRef>
+          <a:effectRef idx="0">
+            <a:schemeClr val="accent1"/>
+          </a:effectRef>
+          <a:fontRef idx="minor">
+            <a:schemeClr val="lt1"/>
+          </a:fontRef>
+        </p:style>
+        <p:txBody>
+          <a:bodyPr rtlCol="0" anchor="ctr"/>
+          <a:lstStyle/>
+          <a:p>
+            <a:pPr algn="ctr"/>
+            <a:endParaRPr lang="en-US"/>
+          </a:p>
+        </p:txBody>
+      </p:sp>
+      <p:sp>
+        <p:nvSpPr>
+          <p:cNvPr id="8" name="Rectangle 7">
+            <a:extLst>
+              <a:ext uri="{FF2B5EF4-FFF2-40B4-BE49-F238E27FC236}">
+                <a16:creationId xmlns:a16="http://schemas.microsoft.com/office/drawing/2014/main" id="{D6BAC2D6-894D-F586-D9BA-CB33C0BD9FCC}"/>
+              </a:ext>
+            </a:extLst>
+          </p:cNvPr>
+          <p:cNvSpPr/>
+          <p:nvPr/>
+        </p:nvSpPr>
+        <p:spPr>
+          <a:xfrm>
+            <a:off x="0" y="1465007"/>
+            <a:ext cx="12192000" cy="245806"/>
+          </a:xfrm>
+          <a:prstGeom prst="rect">
+            <a:avLst/>
+          </a:prstGeom>
+          <a:solidFill>
+            <a:srgbClr val="FBDB0E"/>
+          </a:solidFill>
+          <a:ln>
+            <a:solidFill>
+              <a:srgbClr val="FBDB0E"/>
+            </a:solidFill>
+          </a:ln>
+        </p:spPr>
+        <p:style>
+          <a:lnRef idx="2">
+            <a:schemeClr val="accent1">
+              <a:shade val="15000"/>
+            </a:schemeClr>
+          </a:lnRef>
+          <a:fillRef idx="1">
+            <a:schemeClr val="accent1"/>
+          </a:fillRef>
+          <a:effectRef idx="0">
+            <a:schemeClr val="accent1"/>
+          </a:effectRef>
+          <a:fontRef idx="minor">
+            <a:schemeClr val="lt1"/>
+          </a:fontRef>
+        </p:style>
+        <p:txBody>
+          <a:bodyPr rtlCol="0" anchor="ctr"/>
+          <a:lstStyle/>
+          <a:p>
+            <a:pPr algn="ctr"/>
+            <a:endParaRPr lang="en-US"/>
+          </a:p>
+        </p:txBody>
+      </p:sp>
+      <p:sp>
+        <p:nvSpPr>
+          <p:cNvPr id="9" name="TextBox 8">
+            <a:extLst>
+              <a:ext uri="{FF2B5EF4-FFF2-40B4-BE49-F238E27FC236}">
+                <a16:creationId xmlns:a16="http://schemas.microsoft.com/office/drawing/2014/main" id="{63422E65-D36F-4F23-6735-2EF06556A13A}"/>
+              </a:ext>
+            </a:extLst>
+          </p:cNvPr>
+          <p:cNvSpPr txBox="1"/>
+          <p:nvPr/>
+        </p:nvSpPr>
+        <p:spPr>
+          <a:xfrm>
+            <a:off x="2713703" y="403178"/>
+            <a:ext cx="8819535" cy="707886"/>
+          </a:xfrm>
+          <a:prstGeom prst="rect">
+            <a:avLst/>
+          </a:prstGeom>
+          <a:noFill/>
+        </p:spPr>
+        <p:txBody>
+          <a:bodyPr wrap="square" rtlCol="0">
+            <a:spAutoFit/>
+          </a:bodyPr>
+          <a:lstStyle/>
+          <a:p>
+            <a:r>
+              <a:rPr lang="en-US" sz="4000" b="1" dirty="0">
+                <a:solidFill>
+                  <a:schemeClr val="bg1"/>
+                </a:solidFill>
+              </a:rPr>
+              <a:t>Duality in Linear Programming</a:t>
+            </a:r>
+          </a:p>
+        </p:txBody>
+      </p:sp>
+      <mc:AlternateContent xmlns:mc="http://schemas.openxmlformats.org/markup-compatibility/2006">
+        <mc:Choice xmlns:a14="http://schemas.microsoft.com/office/drawing/2010/main" Requires="a14">
+          <p:sp>
+            <p:nvSpPr>
+              <p:cNvPr id="2" name="TextBox 1">
+                <a:extLst>
+                  <a:ext uri="{FF2B5EF4-FFF2-40B4-BE49-F238E27FC236}">
+                    <a16:creationId xmlns:a16="http://schemas.microsoft.com/office/drawing/2014/main" id="{D8B59260-86F9-C45F-867A-89CF26E5AE99}"/>
+                  </a:ext>
+                </a:extLst>
+              </p:cNvPr>
+              <p:cNvSpPr txBox="1"/>
+              <p:nvPr/>
+            </p:nvSpPr>
+            <p:spPr>
+              <a:xfrm>
+                <a:off x="3559795" y="1848787"/>
+                <a:ext cx="1246047" cy="563424"/>
+              </a:xfrm>
+              <a:prstGeom prst="rect">
+                <a:avLst/>
+              </a:prstGeom>
+              <a:noFill/>
+            </p:spPr>
+            <p:txBody>
+              <a:bodyPr wrap="none" lIns="0" tIns="0" rIns="0" bIns="0" rtlCol="0">
+                <a:spAutoFit/>
+              </a:bodyPr>
+              <a:lstStyle/>
+              <a:p>
+                <a14:m>
+                  <m:oMathPara xmlns:m="http://schemas.openxmlformats.org/officeDocument/2006/math">
+                    <m:oMathParaPr>
+                      <m:jc m:val="centerGroup"/>
+                    </m:oMathParaPr>
+                    <m:oMath xmlns:m="http://schemas.openxmlformats.org/officeDocument/2006/math">
+                      <m:func>
+                        <m:funcPr>
+                          <m:ctrlPr>
+                            <a:rPr lang="en-US" sz="2800" i="1" smtClean="0">
+                              <a:latin typeface="Cambria Math" panose="02040503050406030204" pitchFamily="18" charset="0"/>
+                            </a:rPr>
+                          </m:ctrlPr>
+                        </m:funcPr>
+                        <m:fName>
+                          <m:limLow>
+                            <m:limLowPr>
+                              <m:ctrlPr>
+                                <a:rPr lang="en-US" sz="2800" i="1" smtClean="0">
+                                  <a:latin typeface="Cambria Math" panose="02040503050406030204" pitchFamily="18" charset="0"/>
+                                </a:rPr>
+                              </m:ctrlPr>
+                            </m:limLowPr>
+                            <m:e>
+                              <m:r>
+                                <m:rPr>
+                                  <m:sty m:val="p"/>
+                                </m:rPr>
+                                <a:rPr lang="en-US" sz="2800" i="0" smtClean="0">
+                                  <a:latin typeface="Cambria Math" panose="02040503050406030204" pitchFamily="18" charset="0"/>
+                                </a:rPr>
+                                <m:t>max</m:t>
+                              </m:r>
+                            </m:e>
+                            <m:lim>
+                              <m:r>
+                                <a:rPr lang="en-US" sz="2800" b="1" i="1" smtClean="0">
+                                  <a:latin typeface="Cambria Math" panose="02040503050406030204" pitchFamily="18" charset="0"/>
+                                </a:rPr>
+                                <m:t>𝒙</m:t>
+                              </m:r>
+                            </m:lim>
+                          </m:limLow>
+                        </m:fName>
+                        <m:e>
+                          <m:r>
+                            <a:rPr lang="en-US" sz="2800" b="1" i="1" smtClean="0">
+                              <a:latin typeface="Cambria Math" panose="02040503050406030204" pitchFamily="18" charset="0"/>
+                            </a:rPr>
+                            <m:t>𝒄</m:t>
+                          </m:r>
+                          <m:r>
+                            <a:rPr lang="en-US" sz="2800" b="0" i="1" smtClean="0">
+                              <a:latin typeface="Cambria Math" panose="02040503050406030204" pitchFamily="18" charset="0"/>
+                            </a:rPr>
+                            <m:t> </m:t>
+                          </m:r>
+                          <m:r>
+                            <a:rPr lang="en-US" sz="2800" b="1" i="1" smtClean="0">
+                              <a:latin typeface="Cambria Math" panose="02040503050406030204" pitchFamily="18" charset="0"/>
+                            </a:rPr>
+                            <m:t>𝒙</m:t>
+                          </m:r>
+                        </m:e>
+                      </m:func>
+                    </m:oMath>
+                  </m:oMathPara>
+                </a14:m>
+                <a:endParaRPr lang="en-US" sz="2800" dirty="0"/>
+              </a:p>
+            </p:txBody>
+          </p:sp>
+        </mc:Choice>
+        <mc:Fallback>
+          <p:sp>
+            <p:nvSpPr>
+              <p:cNvPr id="2" name="TextBox 1">
+                <a:extLst>
+                  <a:ext uri="{FF2B5EF4-FFF2-40B4-BE49-F238E27FC236}">
+                    <a16:creationId xmlns:a16="http://schemas.microsoft.com/office/drawing/2014/main" id="{D8B59260-86F9-C45F-867A-89CF26E5AE99}"/>
+                  </a:ext>
+                </a:extLst>
+              </p:cNvPr>
+              <p:cNvSpPr txBox="1">
+                <a:spLocks noRot="1" noChangeAspect="1" noMove="1" noResize="1" noEditPoints="1" noAdjustHandles="1" noChangeArrowheads="1" noChangeShapeType="1" noTextEdit="1"/>
+              </p:cNvSpPr>
+              <p:nvPr/>
+            </p:nvSpPr>
+            <p:spPr>
+              <a:xfrm>
+                <a:off x="3559795" y="1848787"/>
+                <a:ext cx="1246047" cy="563424"/>
+              </a:xfrm>
+              <a:prstGeom prst="rect">
+                <a:avLst/>
+              </a:prstGeom>
+              <a:blipFill>
+                <a:blip r:embed="rId3"/>
+                <a:stretch>
+                  <a:fillRect/>
+                </a:stretch>
+              </a:blipFill>
+            </p:spPr>
+            <p:txBody>
+              <a:bodyPr/>
+              <a:lstStyle/>
+              <a:p>
+                <a:r>
+                  <a:rPr lang="en-US">
+                    <a:noFill/>
+                  </a:rPr>
+                  <a:t> </a:t>
+                </a:r>
+              </a:p>
+            </p:txBody>
+          </p:sp>
+        </mc:Fallback>
+      </mc:AlternateContent>
+      <mc:AlternateContent xmlns:mc="http://schemas.openxmlformats.org/markup-compatibility/2006">
+        <mc:Choice xmlns:a14="http://schemas.microsoft.com/office/drawing/2010/main" Requires="a14">
+          <p:sp>
+            <p:nvSpPr>
+              <p:cNvPr id="3" name="TextBox 2">
+                <a:extLst>
+                  <a:ext uri="{FF2B5EF4-FFF2-40B4-BE49-F238E27FC236}">
+                    <a16:creationId xmlns:a16="http://schemas.microsoft.com/office/drawing/2014/main" id="{CA350D37-D931-F7E5-7E89-BB75BF7049DD}"/>
+                  </a:ext>
+                </a:extLst>
+              </p:cNvPr>
+              <p:cNvSpPr txBox="1"/>
+              <p:nvPr/>
+            </p:nvSpPr>
+            <p:spPr>
+              <a:xfrm>
+                <a:off x="6823587" y="1888399"/>
+                <a:ext cx="1204625" cy="430887"/>
+              </a:xfrm>
+              <a:prstGeom prst="rect">
+                <a:avLst/>
+              </a:prstGeom>
+              <a:noFill/>
+            </p:spPr>
+            <p:txBody>
+              <a:bodyPr wrap="none" lIns="0" tIns="0" rIns="0" bIns="0" rtlCol="0">
+                <a:spAutoFit/>
+              </a:bodyPr>
+              <a:lstStyle/>
+              <a:p>
+                <a14:m>
+                  <m:oMathPara xmlns:m="http://schemas.openxmlformats.org/officeDocument/2006/math">
+                    <m:oMathParaPr>
+                      <m:jc m:val="centerGroup"/>
+                    </m:oMathParaPr>
+                    <m:oMath xmlns:m="http://schemas.openxmlformats.org/officeDocument/2006/math">
+                      <m:r>
+                        <a:rPr lang="en-US" sz="2800" b="1" i="1" smtClean="0">
+                          <a:latin typeface="Cambria Math" panose="02040503050406030204" pitchFamily="18" charset="0"/>
+                        </a:rPr>
+                        <m:t>𝑨𝒙</m:t>
+                      </m:r>
+                      <m:r>
+                        <a:rPr lang="en-US" sz="2800" b="0" i="1" smtClean="0">
+                          <a:latin typeface="Cambria Math" panose="02040503050406030204" pitchFamily="18" charset="0"/>
+                          <a:ea typeface="Cambria Math" panose="02040503050406030204" pitchFamily="18" charset="0"/>
+                        </a:rPr>
+                        <m:t>≤</m:t>
+                      </m:r>
+                      <m:r>
+                        <a:rPr lang="en-US" sz="2800" b="1" i="1" smtClean="0">
+                          <a:latin typeface="Cambria Math" panose="02040503050406030204" pitchFamily="18" charset="0"/>
+                          <a:ea typeface="Cambria Math" panose="02040503050406030204" pitchFamily="18" charset="0"/>
+                        </a:rPr>
+                        <m:t>𝒃</m:t>
+                      </m:r>
+                    </m:oMath>
+                  </m:oMathPara>
+                </a14:m>
+                <a:endParaRPr lang="en-US" sz="2800" b="1" dirty="0"/>
+              </a:p>
+            </p:txBody>
+          </p:sp>
+        </mc:Choice>
+        <mc:Fallback>
+          <p:sp>
+            <p:nvSpPr>
+              <p:cNvPr id="3" name="TextBox 2">
+                <a:extLst>
+                  <a:ext uri="{FF2B5EF4-FFF2-40B4-BE49-F238E27FC236}">
+                    <a16:creationId xmlns:a16="http://schemas.microsoft.com/office/drawing/2014/main" id="{CA350D37-D931-F7E5-7E89-BB75BF7049DD}"/>
+                  </a:ext>
+                </a:extLst>
+              </p:cNvPr>
+              <p:cNvSpPr txBox="1">
+                <a:spLocks noRot="1" noChangeAspect="1" noMove="1" noResize="1" noEditPoints="1" noAdjustHandles="1" noChangeArrowheads="1" noChangeShapeType="1" noTextEdit="1"/>
+              </p:cNvSpPr>
+              <p:nvPr/>
+            </p:nvSpPr>
+            <p:spPr>
+              <a:xfrm>
+                <a:off x="6823587" y="1888399"/>
+                <a:ext cx="1204625" cy="430887"/>
+              </a:xfrm>
+              <a:prstGeom prst="rect">
+                <a:avLst/>
+              </a:prstGeom>
+              <a:blipFill>
+                <a:blip r:embed="rId4"/>
+                <a:stretch>
+                  <a:fillRect/>
+                </a:stretch>
+              </a:blipFill>
+            </p:spPr>
+            <p:txBody>
+              <a:bodyPr/>
+              <a:lstStyle/>
+              <a:p>
+                <a:r>
+                  <a:rPr lang="en-US">
+                    <a:noFill/>
+                  </a:rPr>
+                  <a:t> </a:t>
+                </a:r>
+              </a:p>
+            </p:txBody>
+          </p:sp>
+        </mc:Fallback>
+      </mc:AlternateContent>
+      <mc:AlternateContent xmlns:mc="http://schemas.openxmlformats.org/markup-compatibility/2006">
+        <mc:Choice xmlns:a14="http://schemas.microsoft.com/office/drawing/2010/main" Requires="a14">
+          <p:sp>
+            <p:nvSpPr>
+              <p:cNvPr id="4" name="TextBox 3">
+                <a:extLst>
+                  <a:ext uri="{FF2B5EF4-FFF2-40B4-BE49-F238E27FC236}">
+                    <a16:creationId xmlns:a16="http://schemas.microsoft.com/office/drawing/2014/main" id="{C1A28DFB-63D9-201D-EF8D-5360625D1CE5}"/>
+                  </a:ext>
+                </a:extLst>
+              </p:cNvPr>
+              <p:cNvSpPr txBox="1"/>
+              <p:nvPr/>
+            </p:nvSpPr>
+            <p:spPr>
+              <a:xfrm>
+                <a:off x="9187168" y="1882687"/>
+                <a:ext cx="1042721" cy="430887"/>
+              </a:xfrm>
+              <a:prstGeom prst="rect">
+                <a:avLst/>
+              </a:prstGeom>
+              <a:noFill/>
+            </p:spPr>
+            <p:txBody>
+              <a:bodyPr wrap="none" lIns="0" tIns="0" rIns="0" bIns="0" rtlCol="0">
+                <a:spAutoFit/>
+              </a:bodyPr>
+              <a:lstStyle/>
+              <a:p>
+                <a14:m>
+                  <m:oMathPara xmlns:m="http://schemas.openxmlformats.org/officeDocument/2006/math">
+                    <m:oMathParaPr>
+                      <m:jc m:val="centerGroup"/>
+                    </m:oMathParaPr>
+                    <m:oMath xmlns:m="http://schemas.openxmlformats.org/officeDocument/2006/math">
+                      <m:r>
+                        <a:rPr lang="en-US" sz="2800" b="1" i="1" smtClean="0">
+                          <a:latin typeface="Cambria Math" panose="02040503050406030204" pitchFamily="18" charset="0"/>
+                        </a:rPr>
+                        <m:t>𝒙</m:t>
+                      </m:r>
+                      <m:r>
+                        <a:rPr lang="en-US" sz="2800" b="0" i="1" smtClean="0">
+                          <a:latin typeface="Cambria Math" panose="02040503050406030204" pitchFamily="18" charset="0"/>
+                        </a:rPr>
+                        <m:t> </m:t>
+                      </m:r>
+                      <m:r>
+                        <a:rPr lang="en-US" sz="2800" b="0" i="1" smtClean="0">
+                          <a:latin typeface="Cambria Math" panose="02040503050406030204" pitchFamily="18" charset="0"/>
+                          <a:ea typeface="Cambria Math" panose="02040503050406030204" pitchFamily="18" charset="0"/>
+                        </a:rPr>
+                        <m:t>≥</m:t>
+                      </m:r>
+                      <m:r>
+                        <a:rPr lang="en-US" sz="2800" b="1" i="1" smtClean="0">
+                          <a:latin typeface="Cambria Math" panose="02040503050406030204" pitchFamily="18" charset="0"/>
+                          <a:ea typeface="Cambria Math" panose="02040503050406030204" pitchFamily="18" charset="0"/>
+                        </a:rPr>
+                        <m:t>𝟎</m:t>
+                      </m:r>
+                    </m:oMath>
+                  </m:oMathPara>
+                </a14:m>
+                <a:endParaRPr lang="en-US" sz="2800" b="1" dirty="0"/>
+              </a:p>
+            </p:txBody>
+          </p:sp>
+        </mc:Choice>
+        <mc:Fallback>
+          <p:sp>
+            <p:nvSpPr>
+              <p:cNvPr id="4" name="TextBox 3">
+                <a:extLst>
+                  <a:ext uri="{FF2B5EF4-FFF2-40B4-BE49-F238E27FC236}">
+                    <a16:creationId xmlns:a16="http://schemas.microsoft.com/office/drawing/2014/main" id="{C1A28DFB-63D9-201D-EF8D-5360625D1CE5}"/>
+                  </a:ext>
+                </a:extLst>
+              </p:cNvPr>
+              <p:cNvSpPr txBox="1">
+                <a:spLocks noRot="1" noChangeAspect="1" noMove="1" noResize="1" noEditPoints="1" noAdjustHandles="1" noChangeArrowheads="1" noChangeShapeType="1" noTextEdit="1"/>
+              </p:cNvSpPr>
+              <p:nvPr/>
+            </p:nvSpPr>
+            <p:spPr>
+              <a:xfrm>
+                <a:off x="9187168" y="1882687"/>
+                <a:ext cx="1042721" cy="430887"/>
+              </a:xfrm>
+              <a:prstGeom prst="rect">
+                <a:avLst/>
+              </a:prstGeom>
+              <a:blipFill>
+                <a:blip r:embed="rId5"/>
+                <a:stretch>
+                  <a:fillRect/>
+                </a:stretch>
+              </a:blipFill>
+            </p:spPr>
+            <p:txBody>
+              <a:bodyPr/>
+              <a:lstStyle/>
+              <a:p>
+                <a:r>
+                  <a:rPr lang="en-US">
+                    <a:noFill/>
+                  </a:rPr>
+                  <a:t> </a:t>
+                </a:r>
+              </a:p>
+            </p:txBody>
+          </p:sp>
+        </mc:Fallback>
+      </mc:AlternateContent>
+      <mc:AlternateContent xmlns:mc="http://schemas.openxmlformats.org/markup-compatibility/2006">
+        <mc:Choice xmlns:a14="http://schemas.microsoft.com/office/drawing/2010/main" Requires="a14">
+          <p:graphicFrame>
+            <p:nvGraphicFramePr>
+              <p:cNvPr id="5" name="Table 4">
+                <a:extLst>
+                  <a:ext uri="{FF2B5EF4-FFF2-40B4-BE49-F238E27FC236}">
+                    <a16:creationId xmlns:a16="http://schemas.microsoft.com/office/drawing/2014/main" id="{E54ACC54-DA31-B62F-5B88-64E59299211C}"/>
+                  </a:ext>
+                </a:extLst>
+              </p:cNvPr>
+              <p:cNvGraphicFramePr>
+                <a:graphicFrameLocks noGrp="1"/>
+              </p:cNvGraphicFramePr>
+              <p:nvPr>
+                <p:extLst>
+                  <p:ext uri="{D42A27DB-BD31-4B8C-83A1-F6EECF244321}">
+                    <p14:modId xmlns:p14="http://schemas.microsoft.com/office/powerpoint/2010/main" val="954209091"/>
+                  </p:ext>
+                </p:extLst>
+              </p:nvPr>
+            </p:nvGraphicFramePr>
+            <p:xfrm>
+              <a:off x="190607" y="3089239"/>
+              <a:ext cx="6738376" cy="1984208"/>
+            </p:xfrm>
+            <a:graphic>
+              <a:graphicData uri="http://schemas.openxmlformats.org/drawingml/2006/table">
+                <a:tbl>
+                  <a:tblPr firstRow="1" bandRow="1">
+                    <a:tableStyleId>{5C22544A-7EE6-4342-B048-85BDC9FD1C3A}</a:tableStyleId>
+                  </a:tblPr>
+                  <a:tblGrid>
+                    <a:gridCol w="1684594">
+                      <a:extLst>
+                        <a:ext uri="{9D8B030D-6E8A-4147-A177-3AD203B41FA5}">
+                          <a16:colId xmlns:a16="http://schemas.microsoft.com/office/drawing/2014/main" val="2079826288"/>
+                        </a:ext>
+                      </a:extLst>
+                    </a:gridCol>
+                    <a:gridCol w="1684594">
+                      <a:extLst>
+                        <a:ext uri="{9D8B030D-6E8A-4147-A177-3AD203B41FA5}">
+                          <a16:colId xmlns:a16="http://schemas.microsoft.com/office/drawing/2014/main" val="739261778"/>
+                        </a:ext>
+                      </a:extLst>
+                    </a:gridCol>
+                    <a:gridCol w="1684594">
+                      <a:extLst>
+                        <a:ext uri="{9D8B030D-6E8A-4147-A177-3AD203B41FA5}">
+                          <a16:colId xmlns:a16="http://schemas.microsoft.com/office/drawing/2014/main" val="434403916"/>
+                        </a:ext>
+                      </a:extLst>
+                    </a:gridCol>
+                    <a:gridCol w="1684594">
+                      <a:extLst>
+                        <a:ext uri="{9D8B030D-6E8A-4147-A177-3AD203B41FA5}">
+                          <a16:colId xmlns:a16="http://schemas.microsoft.com/office/drawing/2014/main" val="1265239256"/>
+                        </a:ext>
+                      </a:extLst>
+                    </a:gridCol>
+                  </a:tblGrid>
+                  <a:tr h="496052">
+                    <a:tc>
+                      <a:txBody>
+                        <a:bodyPr/>
+                        <a:lstStyle/>
+                        <a:p>
+                          <a14:m>
+                            <m:oMathPara xmlns:m="http://schemas.openxmlformats.org/officeDocument/2006/math">
+                              <m:oMathParaPr>
+                                <m:jc m:val="centerGroup"/>
+                              </m:oMathParaPr>
+                              <m:oMath xmlns:m="http://schemas.openxmlformats.org/officeDocument/2006/math">
+                                <m:sSub>
+                                  <m:sSubPr>
+                                    <m:ctrlPr>
+                                      <a:rPr lang="en-US" i="1" smtClean="0">
+                                        <a:solidFill>
+                                          <a:schemeClr val="tx1"/>
+                                        </a:solidFill>
+                                        <a:latin typeface="Cambria Math" panose="02040503050406030204" pitchFamily="18" charset="0"/>
+                                      </a:rPr>
+                                    </m:ctrlPr>
+                                  </m:sSubPr>
+                                  <m:e>
+                                    <m:r>
+                                      <a:rPr lang="en-US" b="1" i="1" smtClean="0">
+                                        <a:solidFill>
+                                          <a:schemeClr val="tx1"/>
+                                        </a:solidFill>
+                                        <a:latin typeface="Cambria Math" panose="02040503050406030204" pitchFamily="18" charset="0"/>
+                                      </a:rPr>
+                                      <m:t>𝑨</m:t>
+                                    </m:r>
+                                  </m:e>
+                                  <m:sub>
+                                    <m:r>
+                                      <a:rPr lang="en-US" b="1" i="1" smtClean="0">
+                                        <a:solidFill>
+                                          <a:schemeClr val="tx1"/>
+                                        </a:solidFill>
+                                        <a:latin typeface="Cambria Math" panose="02040503050406030204" pitchFamily="18" charset="0"/>
+                                      </a:rPr>
+                                      <m:t>𝟏𝟏</m:t>
+                                    </m:r>
+                                  </m:sub>
+                                </m:sSub>
+                              </m:oMath>
+                            </m:oMathPara>
+                          </a14:m>
+                          <a:endParaRPr lang="en-US" dirty="0"/>
+                        </a:p>
+                      </a:txBody>
+                      <a:tcPr>
+                        <a:lnL w="12700" cap="flat" cmpd="sng" algn="ctr">
+                          <a:solidFill>
+                            <a:schemeClr val="tx1"/>
+                          </a:solidFill>
+                          <a:prstDash val="solid"/>
+                          <a:round/>
+                          <a:headEnd type="none" w="med" len="med"/>
+                          <a:tailEnd type="none" w="med" len="med"/>
+                        </a:lnL>
+                        <a:lnR w="12700" cap="flat" cmpd="sng" algn="ctr">
+                          <a:solidFill>
+                            <a:schemeClr val="tx1"/>
+                          </a:solidFill>
+                          <a:prstDash val="solid"/>
+                          <a:round/>
+                          <a:headEnd type="none" w="med" len="med"/>
+                          <a:tailEnd type="none" w="med" len="med"/>
+                        </a:lnR>
+                        <a:lnT w="12700" cap="flat" cmpd="sng" algn="ctr">
+                          <a:solidFill>
+                            <a:schemeClr val="tx1"/>
+                          </a:solidFill>
+                          <a:prstDash val="solid"/>
+                          <a:round/>
+                          <a:headEnd type="none" w="med" len="med"/>
+                          <a:tailEnd type="none" w="med" len="med"/>
+                        </a:lnT>
+                        <a:lnB w="12700" cap="flat" cmpd="sng" algn="ctr">
+                          <a:solidFill>
+                            <a:schemeClr val="tx1"/>
+                          </a:solidFill>
+                          <a:prstDash val="solid"/>
+                          <a:round/>
+                          <a:headEnd type="none" w="med" len="med"/>
+                          <a:tailEnd type="none" w="med" len="med"/>
+                        </a:lnB>
+                        <a:lnTlToBr w="12700" cmpd="sng">
+                          <a:noFill/>
+                          <a:prstDash val="solid"/>
+                        </a:lnTlToBr>
+                        <a:lnBlToTr w="12700" cmpd="sng">
+                          <a:noFill/>
+                          <a:prstDash val="solid"/>
+                        </a:lnBlToTr>
+                        <a:solidFill>
+                          <a:schemeClr val="bg1"/>
+                        </a:solidFill>
+                      </a:tcPr>
+                    </a:tc>
+                    <a:tc>
+                      <a:txBody>
+                        <a:bodyPr/>
+                        <a:lstStyle/>
+                        <a:p>
+                          <a:pPr/>
+                          <a14:m>
+                            <m:oMathPara xmlns:m="http://schemas.openxmlformats.org/officeDocument/2006/math">
+                              <m:oMathParaPr>
+                                <m:jc m:val="centerGroup"/>
+                              </m:oMathParaPr>
+                              <m:oMath xmlns:m="http://schemas.openxmlformats.org/officeDocument/2006/math">
+                                <m:sSub>
+                                  <m:sSubPr>
+                                    <m:ctrlPr>
+                                      <a:rPr lang="en-US" i="1" smtClean="0">
+                                        <a:solidFill>
+                                          <a:schemeClr val="tx1"/>
+                                        </a:solidFill>
+                                        <a:latin typeface="Cambria Math" panose="02040503050406030204" pitchFamily="18" charset="0"/>
+                                      </a:rPr>
+                                    </m:ctrlPr>
+                                  </m:sSubPr>
+                                  <m:e>
+                                    <m:r>
+                                      <a:rPr lang="en-US" b="1" i="1" smtClean="0">
+                                        <a:solidFill>
+                                          <a:schemeClr val="tx1"/>
+                                        </a:solidFill>
+                                        <a:latin typeface="Cambria Math" panose="02040503050406030204" pitchFamily="18" charset="0"/>
+                                      </a:rPr>
+                                      <m:t>𝑨</m:t>
+                                    </m:r>
+                                  </m:e>
+                                  <m:sub>
+                                    <m:r>
+                                      <a:rPr lang="en-US" b="1" i="1" smtClean="0">
+                                        <a:solidFill>
+                                          <a:schemeClr val="tx1"/>
+                                        </a:solidFill>
+                                        <a:latin typeface="Cambria Math" panose="02040503050406030204" pitchFamily="18" charset="0"/>
+                                      </a:rPr>
+                                      <m:t>𝟏</m:t>
+                                    </m:r>
+                                    <m:r>
+                                      <a:rPr lang="en-US" b="1" i="1" smtClean="0">
+                                        <a:solidFill>
+                                          <a:schemeClr val="tx1"/>
+                                        </a:solidFill>
+                                        <a:latin typeface="Cambria Math" panose="02040503050406030204" pitchFamily="18" charset="0"/>
+                                      </a:rPr>
+                                      <m:t>𝟐</m:t>
+                                    </m:r>
+                                  </m:sub>
+                                </m:sSub>
+                              </m:oMath>
+                            </m:oMathPara>
+                          </a14:m>
+                          <a:endParaRPr lang="en-US" dirty="0"/>
+                        </a:p>
+                      </a:txBody>
+                      <a:tcPr>
+                        <a:lnL w="12700" cap="flat" cmpd="sng" algn="ctr">
+                          <a:solidFill>
+                            <a:schemeClr val="tx1"/>
+                          </a:solidFill>
+                          <a:prstDash val="solid"/>
+                          <a:round/>
+                          <a:headEnd type="none" w="med" len="med"/>
+                          <a:tailEnd type="none" w="med" len="med"/>
+                        </a:lnL>
+                        <a:lnR w="12700" cap="flat" cmpd="sng" algn="ctr">
+                          <a:solidFill>
+                            <a:schemeClr val="tx1"/>
+                          </a:solidFill>
+                          <a:prstDash val="solid"/>
+                          <a:round/>
+                          <a:headEnd type="none" w="med" len="med"/>
+                          <a:tailEnd type="none" w="med" len="med"/>
+                        </a:lnR>
+                        <a:lnT w="12700" cap="flat" cmpd="sng" algn="ctr">
+                          <a:solidFill>
+                            <a:schemeClr val="tx1"/>
+                          </a:solidFill>
+                          <a:prstDash val="solid"/>
+                          <a:round/>
+                          <a:headEnd type="none" w="med" len="med"/>
+                          <a:tailEnd type="none" w="med" len="med"/>
+                        </a:lnT>
+                        <a:lnB w="12700" cap="flat" cmpd="sng" algn="ctr">
+                          <a:solidFill>
+                            <a:schemeClr val="tx1"/>
+                          </a:solidFill>
+                          <a:prstDash val="solid"/>
+                          <a:round/>
+                          <a:headEnd type="none" w="med" len="med"/>
+                          <a:tailEnd type="none" w="med" len="med"/>
+                        </a:lnB>
+                        <a:lnTlToBr w="12700" cmpd="sng">
+                          <a:noFill/>
+                          <a:prstDash val="solid"/>
+                        </a:lnTlToBr>
+                        <a:lnBlToTr w="12700" cmpd="sng">
+                          <a:noFill/>
+                          <a:prstDash val="solid"/>
+                        </a:lnBlToTr>
+                        <a:solidFill>
+                          <a:schemeClr val="bg1"/>
+                        </a:solidFill>
+                      </a:tcPr>
+                    </a:tc>
+                    <a:tc>
+                      <a:txBody>
+                        <a:bodyPr/>
+                        <a:lstStyle/>
+                        <a:p>
+                          <a:pPr/>
+                          <a14:m>
+                            <m:oMathPara xmlns:m="http://schemas.openxmlformats.org/officeDocument/2006/math">
+                              <m:oMathParaPr>
+                                <m:jc m:val="centerGroup"/>
+                              </m:oMathParaPr>
+                              <m:oMath xmlns:m="http://schemas.openxmlformats.org/officeDocument/2006/math">
+                                <m:sSub>
+                                  <m:sSubPr>
+                                    <m:ctrlPr>
+                                      <a:rPr lang="en-US" i="1" smtClean="0">
+                                        <a:solidFill>
+                                          <a:schemeClr val="tx1"/>
+                                        </a:solidFill>
+                                        <a:latin typeface="Cambria Math" panose="02040503050406030204" pitchFamily="18" charset="0"/>
+                                      </a:rPr>
+                                    </m:ctrlPr>
+                                  </m:sSubPr>
+                                  <m:e>
+                                    <m:r>
+                                      <a:rPr lang="en-US" b="1" i="1" smtClean="0">
+                                        <a:solidFill>
+                                          <a:schemeClr val="tx1"/>
+                                        </a:solidFill>
+                                        <a:latin typeface="Cambria Math" panose="02040503050406030204" pitchFamily="18" charset="0"/>
+                                      </a:rPr>
+                                      <m:t>𝑨</m:t>
+                                    </m:r>
+                                  </m:e>
+                                  <m:sub>
+                                    <m:r>
+                                      <a:rPr lang="en-US" b="1" i="1" smtClean="0">
+                                        <a:solidFill>
+                                          <a:schemeClr val="tx1"/>
+                                        </a:solidFill>
+                                        <a:latin typeface="Cambria Math" panose="02040503050406030204" pitchFamily="18" charset="0"/>
+                                      </a:rPr>
+                                      <m:t>𝟏</m:t>
+                                    </m:r>
+                                    <m:r>
+                                      <a:rPr lang="en-US" b="1" i="1" smtClean="0">
+                                        <a:solidFill>
+                                          <a:schemeClr val="tx1"/>
+                                        </a:solidFill>
+                                        <a:latin typeface="Cambria Math" panose="02040503050406030204" pitchFamily="18" charset="0"/>
+                                      </a:rPr>
+                                      <m:t>𝟑</m:t>
+                                    </m:r>
+                                  </m:sub>
+                                </m:sSub>
+                              </m:oMath>
+                            </m:oMathPara>
+                          </a14:m>
+                          <a:endParaRPr lang="en-US" dirty="0"/>
+                        </a:p>
+                      </a:txBody>
+                      <a:tcPr>
+                        <a:lnL w="12700" cap="flat" cmpd="sng" algn="ctr">
+                          <a:solidFill>
+                            <a:schemeClr val="tx1"/>
+                          </a:solidFill>
+                          <a:prstDash val="solid"/>
+                          <a:round/>
+                          <a:headEnd type="none" w="med" len="med"/>
+                          <a:tailEnd type="none" w="med" len="med"/>
+                        </a:lnL>
+                        <a:lnR w="12700" cap="flat" cmpd="sng" algn="ctr">
+                          <a:solidFill>
+                            <a:schemeClr val="tx1"/>
+                          </a:solidFill>
+                          <a:prstDash val="solid"/>
+                          <a:round/>
+                          <a:headEnd type="none" w="med" len="med"/>
+                          <a:tailEnd type="none" w="med" len="med"/>
+                        </a:lnR>
+                        <a:lnT w="12700" cap="flat" cmpd="sng" algn="ctr">
+                          <a:solidFill>
+                            <a:schemeClr val="tx1"/>
+                          </a:solidFill>
+                          <a:prstDash val="solid"/>
+                          <a:round/>
+                          <a:headEnd type="none" w="med" len="med"/>
+                          <a:tailEnd type="none" w="med" len="med"/>
+                        </a:lnT>
+                        <a:lnB w="12700" cap="flat" cmpd="sng" algn="ctr">
+                          <a:solidFill>
+                            <a:schemeClr val="tx1"/>
+                          </a:solidFill>
+                          <a:prstDash val="solid"/>
+                          <a:round/>
+                          <a:headEnd type="none" w="med" len="med"/>
+                          <a:tailEnd type="none" w="med" len="med"/>
+                        </a:lnB>
+                        <a:lnTlToBr w="12700" cmpd="sng">
+                          <a:noFill/>
+                          <a:prstDash val="solid"/>
+                        </a:lnTlToBr>
+                        <a:lnBlToTr w="12700" cmpd="sng">
+                          <a:noFill/>
+                          <a:prstDash val="solid"/>
+                        </a:lnBlToTr>
+                        <a:solidFill>
+                          <a:schemeClr val="bg1"/>
+                        </a:solidFill>
+                      </a:tcPr>
+                    </a:tc>
+                    <a:tc>
+                      <a:txBody>
+                        <a:bodyPr/>
+                        <a:lstStyle/>
+                        <a:p>
+                          <a:pPr/>
+                          <a14:m>
+                            <m:oMathPara xmlns:m="http://schemas.openxmlformats.org/officeDocument/2006/math">
+                              <m:oMathParaPr>
+                                <m:jc m:val="centerGroup"/>
+                              </m:oMathParaPr>
+                              <m:oMath xmlns:m="http://schemas.openxmlformats.org/officeDocument/2006/math">
+                                <m:sSub>
+                                  <m:sSubPr>
+                                    <m:ctrlPr>
+                                      <a:rPr lang="en-US" i="1" smtClean="0">
+                                        <a:solidFill>
+                                          <a:schemeClr val="tx1"/>
+                                        </a:solidFill>
+                                        <a:latin typeface="Cambria Math" panose="02040503050406030204" pitchFamily="18" charset="0"/>
+                                      </a:rPr>
+                                    </m:ctrlPr>
+                                  </m:sSubPr>
+                                  <m:e>
+                                    <m:r>
+                                      <a:rPr lang="en-US" b="1" i="1" smtClean="0">
+                                        <a:solidFill>
+                                          <a:schemeClr val="tx1"/>
+                                        </a:solidFill>
+                                        <a:latin typeface="Cambria Math" panose="02040503050406030204" pitchFamily="18" charset="0"/>
+                                      </a:rPr>
+                                      <m:t>𝑨</m:t>
+                                    </m:r>
+                                  </m:e>
+                                  <m:sub>
+                                    <m:r>
+                                      <a:rPr lang="en-US" b="1" i="1" smtClean="0">
+                                        <a:solidFill>
+                                          <a:schemeClr val="tx1"/>
+                                        </a:solidFill>
+                                        <a:latin typeface="Cambria Math" panose="02040503050406030204" pitchFamily="18" charset="0"/>
+                                      </a:rPr>
+                                      <m:t>𝟏</m:t>
+                                    </m:r>
+                                    <m:r>
+                                      <a:rPr lang="en-US" b="1" i="1" smtClean="0">
+                                        <a:solidFill>
+                                          <a:schemeClr val="tx1"/>
+                                        </a:solidFill>
+                                        <a:latin typeface="Cambria Math" panose="02040503050406030204" pitchFamily="18" charset="0"/>
+                                      </a:rPr>
+                                      <m:t>𝟑</m:t>
+                                    </m:r>
+                                  </m:sub>
+                                </m:sSub>
+                              </m:oMath>
+                            </m:oMathPara>
+                          </a14:m>
+                          <a:endParaRPr lang="en-US" dirty="0"/>
+                        </a:p>
+                      </a:txBody>
+                      <a:tcPr>
+                        <a:lnL w="12700" cap="flat" cmpd="sng" algn="ctr">
+                          <a:solidFill>
+                            <a:schemeClr val="tx1"/>
+                          </a:solidFill>
+                          <a:prstDash val="solid"/>
+                          <a:round/>
+                          <a:headEnd type="none" w="med" len="med"/>
+                          <a:tailEnd type="none" w="med" len="med"/>
+                        </a:lnL>
+                        <a:lnR w="12700" cap="flat" cmpd="sng" algn="ctr">
+                          <a:solidFill>
+                            <a:schemeClr val="tx1"/>
+                          </a:solidFill>
+                          <a:prstDash val="solid"/>
+                          <a:round/>
+                          <a:headEnd type="none" w="med" len="med"/>
+                          <a:tailEnd type="none" w="med" len="med"/>
+                        </a:lnR>
+                        <a:lnT w="12700" cap="flat" cmpd="sng" algn="ctr">
+                          <a:solidFill>
+                            <a:schemeClr val="tx1"/>
+                          </a:solidFill>
+                          <a:prstDash val="solid"/>
+                          <a:round/>
+                          <a:headEnd type="none" w="med" len="med"/>
+                          <a:tailEnd type="none" w="med" len="med"/>
+                        </a:lnT>
+                        <a:lnB w="12700" cap="flat" cmpd="sng" algn="ctr">
+                          <a:solidFill>
+                            <a:schemeClr val="tx1"/>
+                          </a:solidFill>
+                          <a:prstDash val="solid"/>
+                          <a:round/>
+                          <a:headEnd type="none" w="med" len="med"/>
+                          <a:tailEnd type="none" w="med" len="med"/>
+                        </a:lnB>
+                        <a:lnTlToBr w="12700" cmpd="sng">
+                          <a:noFill/>
+                          <a:prstDash val="solid"/>
+                        </a:lnTlToBr>
+                        <a:lnBlToTr w="12700" cmpd="sng">
+                          <a:noFill/>
+                          <a:prstDash val="solid"/>
+                        </a:lnBlToTr>
+                        <a:solidFill>
+                          <a:schemeClr val="bg1"/>
+                        </a:solidFill>
+                      </a:tcPr>
+                    </a:tc>
+                    <a:extLst>
+                      <a:ext uri="{0D108BD9-81ED-4DB2-BD59-A6C34878D82A}">
+                        <a16:rowId xmlns:a16="http://schemas.microsoft.com/office/drawing/2014/main" val="3349285775"/>
+                      </a:ext>
+                    </a:extLst>
+                  </a:tr>
+                  <a:tr h="496052">
+                    <a:tc>
+                      <a:txBody>
+                        <a:bodyPr/>
+                        <a:lstStyle/>
+                        <a:p>
+                          <a14:m>
+                            <m:oMathPara xmlns:m="http://schemas.openxmlformats.org/officeDocument/2006/math">
+                              <m:oMathParaPr>
+                                <m:jc m:val="centerGroup"/>
+                              </m:oMathParaPr>
+                              <m:oMath xmlns:m="http://schemas.openxmlformats.org/officeDocument/2006/math">
+                                <m:sSub>
+                                  <m:sSubPr>
+                                    <m:ctrlPr>
+                                      <a:rPr lang="en-US" i="1" smtClean="0">
+                                        <a:solidFill>
+                                          <a:schemeClr val="tx1"/>
+                                        </a:solidFill>
+                                        <a:latin typeface="Cambria Math" panose="02040503050406030204" pitchFamily="18" charset="0"/>
+                                      </a:rPr>
+                                    </m:ctrlPr>
+                                  </m:sSubPr>
+                                  <m:e>
+                                    <m:r>
+                                      <a:rPr lang="en-US" b="1" i="1" smtClean="0">
+                                        <a:solidFill>
+                                          <a:schemeClr val="tx1"/>
+                                        </a:solidFill>
+                                        <a:latin typeface="Cambria Math" panose="02040503050406030204" pitchFamily="18" charset="0"/>
+                                      </a:rPr>
+                                      <m:t>𝑨</m:t>
+                                    </m:r>
+                                  </m:e>
+                                  <m:sub>
+                                    <m:r>
+                                      <a:rPr lang="en-US" b="1" i="1" smtClean="0">
+                                        <a:solidFill>
+                                          <a:schemeClr val="tx1"/>
+                                        </a:solidFill>
+                                        <a:latin typeface="Cambria Math" panose="02040503050406030204" pitchFamily="18" charset="0"/>
+                                      </a:rPr>
+                                      <m:t>𝟐</m:t>
+                                    </m:r>
+                                    <m:r>
+                                      <a:rPr lang="en-US" b="1" i="1" smtClean="0">
+                                        <a:solidFill>
+                                          <a:schemeClr val="tx1"/>
+                                        </a:solidFill>
+                                        <a:latin typeface="Cambria Math" panose="02040503050406030204" pitchFamily="18" charset="0"/>
+                                      </a:rPr>
+                                      <m:t>𝟏</m:t>
+                                    </m:r>
+                                  </m:sub>
+                                </m:sSub>
+                              </m:oMath>
+                            </m:oMathPara>
+                          </a14:m>
+                          <a:endParaRPr lang="en-US" dirty="0"/>
+                        </a:p>
+                      </a:txBody>
+                      <a:tcPr>
+                        <a:lnL w="12700" cap="flat" cmpd="sng" algn="ctr">
+                          <a:solidFill>
+                            <a:schemeClr val="tx1"/>
+                          </a:solidFill>
+                          <a:prstDash val="solid"/>
+                          <a:round/>
+                          <a:headEnd type="none" w="med" len="med"/>
+                          <a:tailEnd type="none" w="med" len="med"/>
+                        </a:lnL>
+                        <a:lnR w="12700" cap="flat" cmpd="sng" algn="ctr">
+                          <a:solidFill>
+                            <a:schemeClr val="tx1"/>
+                          </a:solidFill>
+                          <a:prstDash val="solid"/>
+                          <a:round/>
+                          <a:headEnd type="none" w="med" len="med"/>
+                          <a:tailEnd type="none" w="med" len="med"/>
+                        </a:lnR>
+                        <a:lnT w="12700" cap="flat" cmpd="sng" algn="ctr">
+                          <a:solidFill>
+                            <a:schemeClr val="tx1"/>
+                          </a:solidFill>
+                          <a:prstDash val="solid"/>
+                          <a:round/>
+                          <a:headEnd type="none" w="med" len="med"/>
+                          <a:tailEnd type="none" w="med" len="med"/>
+                        </a:lnT>
+                        <a:lnB w="12700" cap="flat" cmpd="sng" algn="ctr">
+                          <a:solidFill>
+                            <a:schemeClr val="tx1"/>
+                          </a:solidFill>
+                          <a:prstDash val="solid"/>
+                          <a:round/>
+                          <a:headEnd type="none" w="med" len="med"/>
+                          <a:tailEnd type="none" w="med" len="med"/>
+                        </a:lnB>
+                        <a:lnTlToBr w="12700" cmpd="sng">
+                          <a:noFill/>
+                          <a:prstDash val="solid"/>
+                        </a:lnTlToBr>
+                        <a:lnBlToTr w="12700" cmpd="sng">
+                          <a:noFill/>
+                          <a:prstDash val="solid"/>
+                        </a:lnBlToTr>
+                        <a:solidFill>
+                          <a:schemeClr val="bg1"/>
+                        </a:solidFill>
+                      </a:tcPr>
+                    </a:tc>
+                    <a:tc>
+                      <a:txBody>
+                        <a:bodyPr/>
+                        <a:lstStyle/>
+                        <a:p>
+                          <a:pPr/>
+                          <a14:m>
+                            <m:oMathPara xmlns:m="http://schemas.openxmlformats.org/officeDocument/2006/math">
+                              <m:oMathParaPr>
+                                <m:jc m:val="centerGroup"/>
+                              </m:oMathParaPr>
+                              <m:oMath xmlns:m="http://schemas.openxmlformats.org/officeDocument/2006/math">
+                                <m:sSub>
+                                  <m:sSubPr>
+                                    <m:ctrlPr>
+                                      <a:rPr lang="en-US" i="1" smtClean="0">
+                                        <a:solidFill>
+                                          <a:schemeClr val="tx1"/>
+                                        </a:solidFill>
+                                        <a:latin typeface="Cambria Math" panose="02040503050406030204" pitchFamily="18" charset="0"/>
+                                      </a:rPr>
+                                    </m:ctrlPr>
+                                  </m:sSubPr>
+                                  <m:e>
+                                    <m:r>
+                                      <a:rPr lang="en-US" b="1" i="1" smtClean="0">
+                                        <a:solidFill>
+                                          <a:schemeClr val="tx1"/>
+                                        </a:solidFill>
+                                        <a:latin typeface="Cambria Math" panose="02040503050406030204" pitchFamily="18" charset="0"/>
+                                      </a:rPr>
+                                      <m:t>𝑨</m:t>
+                                    </m:r>
+                                  </m:e>
+                                  <m:sub>
+                                    <m:r>
+                                      <a:rPr lang="en-US" b="1" i="1" smtClean="0">
+                                        <a:solidFill>
+                                          <a:schemeClr val="tx1"/>
+                                        </a:solidFill>
+                                        <a:latin typeface="Cambria Math" panose="02040503050406030204" pitchFamily="18" charset="0"/>
+                                      </a:rPr>
+                                      <m:t>𝟐</m:t>
+                                    </m:r>
+                                    <m:r>
+                                      <a:rPr lang="en-US" b="1" i="1" smtClean="0">
+                                        <a:solidFill>
+                                          <a:schemeClr val="tx1"/>
+                                        </a:solidFill>
+                                        <a:latin typeface="Cambria Math" panose="02040503050406030204" pitchFamily="18" charset="0"/>
+                                      </a:rPr>
+                                      <m:t>𝟐</m:t>
+                                    </m:r>
+                                  </m:sub>
+                                </m:sSub>
+                              </m:oMath>
+                            </m:oMathPara>
+                          </a14:m>
+                          <a:endParaRPr lang="en-US" dirty="0"/>
+                        </a:p>
+                      </a:txBody>
+                      <a:tcPr>
+                        <a:lnL w="12700" cap="flat" cmpd="sng" algn="ctr">
+                          <a:solidFill>
+                            <a:schemeClr val="tx1"/>
+                          </a:solidFill>
+                          <a:prstDash val="solid"/>
+                          <a:round/>
+                          <a:headEnd type="none" w="med" len="med"/>
+                          <a:tailEnd type="none" w="med" len="med"/>
+                        </a:lnL>
+                        <a:lnR w="12700" cap="flat" cmpd="sng" algn="ctr">
+                          <a:solidFill>
+                            <a:schemeClr val="tx1"/>
+                          </a:solidFill>
+                          <a:prstDash val="solid"/>
+                          <a:round/>
+                          <a:headEnd type="none" w="med" len="med"/>
+                          <a:tailEnd type="none" w="med" len="med"/>
+                        </a:lnR>
+                        <a:lnT w="12700" cap="flat" cmpd="sng" algn="ctr">
+                          <a:solidFill>
+                            <a:schemeClr val="tx1"/>
+                          </a:solidFill>
+                          <a:prstDash val="solid"/>
+                          <a:round/>
+                          <a:headEnd type="none" w="med" len="med"/>
+                          <a:tailEnd type="none" w="med" len="med"/>
+                        </a:lnT>
+                        <a:lnB w="12700" cap="flat" cmpd="sng" algn="ctr">
+                          <a:solidFill>
+                            <a:schemeClr val="tx1"/>
+                          </a:solidFill>
+                          <a:prstDash val="solid"/>
+                          <a:round/>
+                          <a:headEnd type="none" w="med" len="med"/>
+                          <a:tailEnd type="none" w="med" len="med"/>
+                        </a:lnB>
+                        <a:lnTlToBr w="12700" cmpd="sng">
+                          <a:noFill/>
+                          <a:prstDash val="solid"/>
+                        </a:lnTlToBr>
+                        <a:lnBlToTr w="12700" cmpd="sng">
+                          <a:noFill/>
+                          <a:prstDash val="solid"/>
+                        </a:lnBlToTr>
+                        <a:solidFill>
+                          <a:schemeClr val="bg1"/>
+                        </a:solidFill>
+                      </a:tcPr>
+                    </a:tc>
+                    <a:tc>
+                      <a:txBody>
+                        <a:bodyPr/>
+                        <a:lstStyle/>
+                        <a:p>
+                          <a:pPr/>
+                          <a14:m>
+                            <m:oMathPara xmlns:m="http://schemas.openxmlformats.org/officeDocument/2006/math">
+                              <m:oMathParaPr>
+                                <m:jc m:val="centerGroup"/>
+                              </m:oMathParaPr>
+                              <m:oMath xmlns:m="http://schemas.openxmlformats.org/officeDocument/2006/math">
+                                <m:sSub>
+                                  <m:sSubPr>
+                                    <m:ctrlPr>
+                                      <a:rPr lang="en-US" i="1" smtClean="0">
+                                        <a:solidFill>
+                                          <a:schemeClr val="tx1"/>
+                                        </a:solidFill>
+                                        <a:latin typeface="Cambria Math" panose="02040503050406030204" pitchFamily="18" charset="0"/>
+                                      </a:rPr>
+                                    </m:ctrlPr>
+                                  </m:sSubPr>
+                                  <m:e>
+                                    <m:r>
+                                      <a:rPr lang="en-US" b="1" i="1" smtClean="0">
+                                        <a:solidFill>
+                                          <a:schemeClr val="tx1"/>
+                                        </a:solidFill>
+                                        <a:latin typeface="Cambria Math" panose="02040503050406030204" pitchFamily="18" charset="0"/>
+                                      </a:rPr>
+                                      <m:t>𝑨</m:t>
+                                    </m:r>
+                                  </m:e>
+                                  <m:sub>
+                                    <m:r>
+                                      <a:rPr lang="en-US" b="1" i="1" smtClean="0">
+                                        <a:solidFill>
+                                          <a:schemeClr val="tx1"/>
+                                        </a:solidFill>
+                                        <a:latin typeface="Cambria Math" panose="02040503050406030204" pitchFamily="18" charset="0"/>
+                                      </a:rPr>
+                                      <m:t>𝟐</m:t>
+                                    </m:r>
+                                    <m:r>
+                                      <a:rPr lang="en-US" b="1" i="1" smtClean="0">
+                                        <a:solidFill>
+                                          <a:schemeClr val="tx1"/>
+                                        </a:solidFill>
+                                        <a:latin typeface="Cambria Math" panose="02040503050406030204" pitchFamily="18" charset="0"/>
+                                      </a:rPr>
+                                      <m:t>𝟑</m:t>
+                                    </m:r>
+                                  </m:sub>
+                                </m:sSub>
+                              </m:oMath>
+                            </m:oMathPara>
+                          </a14:m>
+                          <a:endParaRPr lang="en-US" dirty="0"/>
+                        </a:p>
+                      </a:txBody>
+                      <a:tcPr>
+                        <a:lnL w="12700" cap="flat" cmpd="sng" algn="ctr">
+                          <a:solidFill>
+                            <a:schemeClr val="tx1"/>
+                          </a:solidFill>
+                          <a:prstDash val="solid"/>
+                          <a:round/>
+                          <a:headEnd type="none" w="med" len="med"/>
+                          <a:tailEnd type="none" w="med" len="med"/>
+                        </a:lnL>
+                        <a:lnR w="12700" cap="flat" cmpd="sng" algn="ctr">
+                          <a:solidFill>
+                            <a:schemeClr val="tx1"/>
+                          </a:solidFill>
+                          <a:prstDash val="solid"/>
+                          <a:round/>
+                          <a:headEnd type="none" w="med" len="med"/>
+                          <a:tailEnd type="none" w="med" len="med"/>
+                        </a:lnR>
+                        <a:lnT w="12700" cap="flat" cmpd="sng" algn="ctr">
+                          <a:solidFill>
+                            <a:schemeClr val="tx1"/>
+                          </a:solidFill>
+                          <a:prstDash val="solid"/>
+                          <a:round/>
+                          <a:headEnd type="none" w="med" len="med"/>
+                          <a:tailEnd type="none" w="med" len="med"/>
+                        </a:lnT>
+                        <a:lnB w="12700" cap="flat" cmpd="sng" algn="ctr">
+                          <a:solidFill>
+                            <a:schemeClr val="tx1"/>
+                          </a:solidFill>
+                          <a:prstDash val="solid"/>
+                          <a:round/>
+                          <a:headEnd type="none" w="med" len="med"/>
+                          <a:tailEnd type="none" w="med" len="med"/>
+                        </a:lnB>
+                        <a:lnTlToBr w="12700" cmpd="sng">
+                          <a:noFill/>
+                          <a:prstDash val="solid"/>
+                        </a:lnTlToBr>
+                        <a:lnBlToTr w="12700" cmpd="sng">
+                          <a:noFill/>
+                          <a:prstDash val="solid"/>
+                        </a:lnBlToTr>
+                        <a:solidFill>
+                          <a:schemeClr val="bg1"/>
+                        </a:solidFill>
+                      </a:tcPr>
+                    </a:tc>
+                    <a:tc>
+                      <a:txBody>
+                        <a:bodyPr/>
+                        <a:lstStyle/>
+                        <a:p>
+                          <a:pPr/>
+                          <a14:m>
+                            <m:oMathPara xmlns:m="http://schemas.openxmlformats.org/officeDocument/2006/math">
+                              <m:oMathParaPr>
+                                <m:jc m:val="centerGroup"/>
+                              </m:oMathParaPr>
+                              <m:oMath xmlns:m="http://schemas.openxmlformats.org/officeDocument/2006/math">
+                                <m:sSub>
+                                  <m:sSubPr>
+                                    <m:ctrlPr>
+                                      <a:rPr lang="en-US" i="1" smtClean="0">
+                                        <a:solidFill>
+                                          <a:schemeClr val="tx1"/>
+                                        </a:solidFill>
+                                        <a:latin typeface="Cambria Math" panose="02040503050406030204" pitchFamily="18" charset="0"/>
+                                      </a:rPr>
+                                    </m:ctrlPr>
+                                  </m:sSubPr>
+                                  <m:e>
+                                    <m:r>
+                                      <a:rPr lang="en-US" b="1" i="1" smtClean="0">
+                                        <a:solidFill>
+                                          <a:schemeClr val="tx1"/>
+                                        </a:solidFill>
+                                        <a:latin typeface="Cambria Math" panose="02040503050406030204" pitchFamily="18" charset="0"/>
+                                      </a:rPr>
+                                      <m:t>𝑨</m:t>
+                                    </m:r>
+                                  </m:e>
+                                  <m:sub>
+                                    <m:r>
+                                      <a:rPr lang="en-US" b="1" i="1" smtClean="0">
+                                        <a:solidFill>
+                                          <a:schemeClr val="tx1"/>
+                                        </a:solidFill>
+                                        <a:latin typeface="Cambria Math" panose="02040503050406030204" pitchFamily="18" charset="0"/>
+                                      </a:rPr>
+                                      <m:t>𝟐</m:t>
+                                    </m:r>
+                                    <m:r>
+                                      <a:rPr lang="en-US" b="1" i="1" smtClean="0">
+                                        <a:solidFill>
+                                          <a:schemeClr val="tx1"/>
+                                        </a:solidFill>
+                                        <a:latin typeface="Cambria Math" panose="02040503050406030204" pitchFamily="18" charset="0"/>
+                                      </a:rPr>
+                                      <m:t>𝟑</m:t>
+                                    </m:r>
+                                  </m:sub>
+                                </m:sSub>
+                              </m:oMath>
+                            </m:oMathPara>
+                          </a14:m>
+                          <a:endParaRPr lang="en-US" dirty="0"/>
+                        </a:p>
+                      </a:txBody>
+                      <a:tcPr>
+                        <a:lnL w="12700" cap="flat" cmpd="sng" algn="ctr">
+                          <a:solidFill>
+                            <a:schemeClr val="tx1"/>
+                          </a:solidFill>
+                          <a:prstDash val="solid"/>
+                          <a:round/>
+                          <a:headEnd type="none" w="med" len="med"/>
+                          <a:tailEnd type="none" w="med" len="med"/>
+                        </a:lnL>
+                        <a:lnR w="12700" cap="flat" cmpd="sng" algn="ctr">
+                          <a:solidFill>
+                            <a:schemeClr val="tx1"/>
+                          </a:solidFill>
+                          <a:prstDash val="solid"/>
+                          <a:round/>
+                          <a:headEnd type="none" w="med" len="med"/>
+                          <a:tailEnd type="none" w="med" len="med"/>
+                        </a:lnR>
+                        <a:lnT w="12700" cap="flat" cmpd="sng" algn="ctr">
+                          <a:solidFill>
+                            <a:schemeClr val="tx1"/>
+                          </a:solidFill>
+                          <a:prstDash val="solid"/>
+                          <a:round/>
+                          <a:headEnd type="none" w="med" len="med"/>
+                          <a:tailEnd type="none" w="med" len="med"/>
+                        </a:lnT>
+                        <a:lnB w="12700" cap="flat" cmpd="sng" algn="ctr">
+                          <a:solidFill>
+                            <a:schemeClr val="tx1"/>
+                          </a:solidFill>
+                          <a:prstDash val="solid"/>
+                          <a:round/>
+                          <a:headEnd type="none" w="med" len="med"/>
+                          <a:tailEnd type="none" w="med" len="med"/>
+                        </a:lnB>
+                        <a:lnTlToBr w="12700" cmpd="sng">
+                          <a:noFill/>
+                          <a:prstDash val="solid"/>
+                        </a:lnTlToBr>
+                        <a:lnBlToTr w="12700" cmpd="sng">
+                          <a:noFill/>
+                          <a:prstDash val="solid"/>
+                        </a:lnBlToTr>
+                        <a:solidFill>
+                          <a:schemeClr val="bg1"/>
+                        </a:solidFill>
+                      </a:tcPr>
+                    </a:tc>
+                    <a:extLst>
+                      <a:ext uri="{0D108BD9-81ED-4DB2-BD59-A6C34878D82A}">
+                        <a16:rowId xmlns:a16="http://schemas.microsoft.com/office/drawing/2014/main" val="4231577802"/>
+                      </a:ext>
+                    </a:extLst>
+                  </a:tr>
+                  <a:tr h="496052">
+                    <a:tc>
+                      <a:txBody>
+                        <a:bodyPr/>
+                        <a:lstStyle/>
+                        <a:p>
+                          <a14:m>
+                            <m:oMathPara xmlns:m="http://schemas.openxmlformats.org/officeDocument/2006/math">
+                              <m:oMathParaPr>
+                                <m:jc m:val="centerGroup"/>
+                              </m:oMathParaPr>
+                              <m:oMath xmlns:m="http://schemas.openxmlformats.org/officeDocument/2006/math">
+                                <m:sSub>
+                                  <m:sSubPr>
+                                    <m:ctrlPr>
+                                      <a:rPr lang="en-US" i="1" smtClean="0">
+                                        <a:solidFill>
+                                          <a:schemeClr val="tx1"/>
+                                        </a:solidFill>
+                                        <a:latin typeface="Cambria Math" panose="02040503050406030204" pitchFamily="18" charset="0"/>
+                                      </a:rPr>
+                                    </m:ctrlPr>
+                                  </m:sSubPr>
+                                  <m:e>
+                                    <m:r>
+                                      <a:rPr lang="en-US" b="1" i="1" smtClean="0">
+                                        <a:solidFill>
+                                          <a:schemeClr val="tx1"/>
+                                        </a:solidFill>
+                                        <a:latin typeface="Cambria Math" panose="02040503050406030204" pitchFamily="18" charset="0"/>
+                                      </a:rPr>
+                                      <m:t>𝑨</m:t>
+                                    </m:r>
+                                  </m:e>
+                                  <m:sub>
+                                    <m:r>
+                                      <a:rPr lang="en-US" b="1" i="1" smtClean="0">
+                                        <a:solidFill>
+                                          <a:schemeClr val="tx1"/>
+                                        </a:solidFill>
+                                        <a:latin typeface="Cambria Math" panose="02040503050406030204" pitchFamily="18" charset="0"/>
+                                      </a:rPr>
+                                      <m:t>𝟑</m:t>
+                                    </m:r>
+                                    <m:r>
+                                      <a:rPr lang="en-US" b="1" i="1" smtClean="0">
+                                        <a:solidFill>
+                                          <a:schemeClr val="tx1"/>
+                                        </a:solidFill>
+                                        <a:latin typeface="Cambria Math" panose="02040503050406030204" pitchFamily="18" charset="0"/>
+                                      </a:rPr>
+                                      <m:t>𝟏</m:t>
+                                    </m:r>
+                                  </m:sub>
+                                </m:sSub>
+                              </m:oMath>
+                            </m:oMathPara>
+                          </a14:m>
+                          <a:endParaRPr lang="en-US" dirty="0"/>
+                        </a:p>
+                      </a:txBody>
+                      <a:tcPr>
+                        <a:lnL w="12700" cap="flat" cmpd="sng" algn="ctr">
+                          <a:solidFill>
+                            <a:schemeClr val="tx1"/>
+                          </a:solidFill>
+                          <a:prstDash val="solid"/>
+                          <a:round/>
+                          <a:headEnd type="none" w="med" len="med"/>
+                          <a:tailEnd type="none" w="med" len="med"/>
+                        </a:lnL>
+                        <a:lnR w="12700" cap="flat" cmpd="sng" algn="ctr">
+                          <a:solidFill>
+                            <a:schemeClr val="tx1"/>
+                          </a:solidFill>
+                          <a:prstDash val="solid"/>
+                          <a:round/>
+                          <a:headEnd type="none" w="med" len="med"/>
+                          <a:tailEnd type="none" w="med" len="med"/>
+                        </a:lnR>
+                        <a:lnT w="12700" cap="flat" cmpd="sng" algn="ctr">
+                          <a:solidFill>
+                            <a:schemeClr val="tx1"/>
+                          </a:solidFill>
+                          <a:prstDash val="solid"/>
+                          <a:round/>
+                          <a:headEnd type="none" w="med" len="med"/>
+                          <a:tailEnd type="none" w="med" len="med"/>
+                        </a:lnT>
+                        <a:lnB w="12700" cap="flat" cmpd="sng" algn="ctr">
+                          <a:solidFill>
+                            <a:schemeClr val="tx1"/>
+                          </a:solidFill>
+                          <a:prstDash val="solid"/>
+                          <a:round/>
+                          <a:headEnd type="none" w="med" len="med"/>
+                          <a:tailEnd type="none" w="med" len="med"/>
+                        </a:lnB>
+                        <a:lnTlToBr w="12700" cmpd="sng">
+                          <a:noFill/>
+                          <a:prstDash val="solid"/>
+                        </a:lnTlToBr>
+                        <a:lnBlToTr w="12700" cmpd="sng">
+                          <a:noFill/>
+                          <a:prstDash val="solid"/>
+                        </a:lnBlToTr>
+                        <a:solidFill>
+                          <a:schemeClr val="bg1"/>
+                        </a:solidFill>
+                      </a:tcPr>
+                    </a:tc>
+                    <a:tc>
+                      <a:txBody>
+                        <a:bodyPr/>
+                        <a:lstStyle/>
+                        <a:p>
+                          <a:pPr/>
+                          <a14:m>
+                            <m:oMathPara xmlns:m="http://schemas.openxmlformats.org/officeDocument/2006/math">
+                              <m:oMathParaPr>
+                                <m:jc m:val="centerGroup"/>
+                              </m:oMathParaPr>
+                              <m:oMath xmlns:m="http://schemas.openxmlformats.org/officeDocument/2006/math">
+                                <m:sSub>
+                                  <m:sSubPr>
+                                    <m:ctrlPr>
+                                      <a:rPr lang="en-US" i="1" smtClean="0">
+                                        <a:solidFill>
+                                          <a:schemeClr val="tx1"/>
+                                        </a:solidFill>
+                                        <a:latin typeface="Cambria Math" panose="02040503050406030204" pitchFamily="18" charset="0"/>
+                                      </a:rPr>
+                                    </m:ctrlPr>
+                                  </m:sSubPr>
+                                  <m:e>
+                                    <m:r>
+                                      <a:rPr lang="en-US" b="1" i="1" smtClean="0">
+                                        <a:solidFill>
+                                          <a:schemeClr val="tx1"/>
+                                        </a:solidFill>
+                                        <a:latin typeface="Cambria Math" panose="02040503050406030204" pitchFamily="18" charset="0"/>
+                                      </a:rPr>
+                                      <m:t>𝑨</m:t>
+                                    </m:r>
+                                  </m:e>
+                                  <m:sub>
+                                    <m:r>
+                                      <a:rPr lang="en-US" b="1" i="1" smtClean="0">
+                                        <a:solidFill>
+                                          <a:schemeClr val="tx1"/>
+                                        </a:solidFill>
+                                        <a:latin typeface="Cambria Math" panose="02040503050406030204" pitchFamily="18" charset="0"/>
+                                      </a:rPr>
+                                      <m:t>𝟑</m:t>
+                                    </m:r>
+                                    <m:r>
+                                      <a:rPr lang="en-US" b="1" i="1" smtClean="0">
+                                        <a:solidFill>
+                                          <a:schemeClr val="tx1"/>
+                                        </a:solidFill>
+                                        <a:latin typeface="Cambria Math" panose="02040503050406030204" pitchFamily="18" charset="0"/>
+                                      </a:rPr>
+                                      <m:t>𝟐</m:t>
+                                    </m:r>
+                                  </m:sub>
+                                </m:sSub>
+                              </m:oMath>
+                            </m:oMathPara>
+                          </a14:m>
+                          <a:endParaRPr lang="en-US" dirty="0"/>
+                        </a:p>
+                      </a:txBody>
+                      <a:tcPr>
+                        <a:lnL w="12700" cap="flat" cmpd="sng" algn="ctr">
+                          <a:solidFill>
+                            <a:schemeClr val="tx1"/>
+                          </a:solidFill>
+                          <a:prstDash val="solid"/>
+                          <a:round/>
+                          <a:headEnd type="none" w="med" len="med"/>
+                          <a:tailEnd type="none" w="med" len="med"/>
+                        </a:lnL>
+                        <a:lnR w="12700" cap="flat" cmpd="sng" algn="ctr">
+                          <a:solidFill>
+                            <a:schemeClr val="tx1"/>
+                          </a:solidFill>
+                          <a:prstDash val="solid"/>
+                          <a:round/>
+                          <a:headEnd type="none" w="med" len="med"/>
+                          <a:tailEnd type="none" w="med" len="med"/>
+                        </a:lnR>
+                        <a:lnT w="12700" cap="flat" cmpd="sng" algn="ctr">
+                          <a:solidFill>
+                            <a:schemeClr val="tx1"/>
+                          </a:solidFill>
+                          <a:prstDash val="solid"/>
+                          <a:round/>
+                          <a:headEnd type="none" w="med" len="med"/>
+                          <a:tailEnd type="none" w="med" len="med"/>
+                        </a:lnT>
+                        <a:lnB w="12700" cap="flat" cmpd="sng" algn="ctr">
+                          <a:solidFill>
+                            <a:schemeClr val="tx1"/>
+                          </a:solidFill>
+                          <a:prstDash val="solid"/>
+                          <a:round/>
+                          <a:headEnd type="none" w="med" len="med"/>
+                          <a:tailEnd type="none" w="med" len="med"/>
+                        </a:lnB>
+                        <a:lnTlToBr w="12700" cmpd="sng">
+                          <a:noFill/>
+                          <a:prstDash val="solid"/>
+                        </a:lnTlToBr>
+                        <a:lnBlToTr w="12700" cmpd="sng">
+                          <a:noFill/>
+                          <a:prstDash val="solid"/>
+                        </a:lnBlToTr>
+                        <a:solidFill>
+                          <a:schemeClr val="bg1"/>
+                        </a:solidFill>
+                      </a:tcPr>
+                    </a:tc>
+                    <a:tc>
+                      <a:txBody>
+                        <a:bodyPr/>
+                        <a:lstStyle/>
+                        <a:p>
+                          <a:pPr/>
+                          <a14:m>
+                            <m:oMathPara xmlns:m="http://schemas.openxmlformats.org/officeDocument/2006/math">
+                              <m:oMathParaPr>
+                                <m:jc m:val="centerGroup"/>
+                              </m:oMathParaPr>
+                              <m:oMath xmlns:m="http://schemas.openxmlformats.org/officeDocument/2006/math">
+                                <m:sSub>
+                                  <m:sSubPr>
+                                    <m:ctrlPr>
+                                      <a:rPr lang="en-US" i="1" smtClean="0">
+                                        <a:solidFill>
+                                          <a:schemeClr val="tx1"/>
+                                        </a:solidFill>
+                                        <a:latin typeface="Cambria Math" panose="02040503050406030204" pitchFamily="18" charset="0"/>
+                                      </a:rPr>
+                                    </m:ctrlPr>
+                                  </m:sSubPr>
+                                  <m:e>
+                                    <m:r>
+                                      <a:rPr lang="en-US" b="1" i="1" smtClean="0">
+                                        <a:solidFill>
+                                          <a:schemeClr val="tx1"/>
+                                        </a:solidFill>
+                                        <a:latin typeface="Cambria Math" panose="02040503050406030204" pitchFamily="18" charset="0"/>
+                                      </a:rPr>
+                                      <m:t>𝑨</m:t>
+                                    </m:r>
+                                  </m:e>
+                                  <m:sub>
+                                    <m:r>
+                                      <a:rPr lang="en-US" b="1" i="1" smtClean="0">
+                                        <a:solidFill>
+                                          <a:schemeClr val="tx1"/>
+                                        </a:solidFill>
+                                        <a:latin typeface="Cambria Math" panose="02040503050406030204" pitchFamily="18" charset="0"/>
+                                      </a:rPr>
+                                      <m:t>𝟑</m:t>
+                                    </m:r>
+                                    <m:r>
+                                      <a:rPr lang="en-US" b="1" i="1" smtClean="0">
+                                        <a:solidFill>
+                                          <a:schemeClr val="tx1"/>
+                                        </a:solidFill>
+                                        <a:latin typeface="Cambria Math" panose="02040503050406030204" pitchFamily="18" charset="0"/>
+                                      </a:rPr>
+                                      <m:t>𝟑</m:t>
+                                    </m:r>
+                                  </m:sub>
+                                </m:sSub>
+                              </m:oMath>
+                            </m:oMathPara>
+                          </a14:m>
+                          <a:endParaRPr lang="en-US" dirty="0"/>
+                        </a:p>
+                      </a:txBody>
+                      <a:tcPr>
+                        <a:lnL w="12700" cap="flat" cmpd="sng" algn="ctr">
+                          <a:solidFill>
+                            <a:schemeClr val="tx1"/>
+                          </a:solidFill>
+                          <a:prstDash val="solid"/>
+                          <a:round/>
+                          <a:headEnd type="none" w="med" len="med"/>
+                          <a:tailEnd type="none" w="med" len="med"/>
+                        </a:lnL>
+                        <a:lnR w="12700" cap="flat" cmpd="sng" algn="ctr">
+                          <a:solidFill>
+                            <a:schemeClr val="tx1"/>
+                          </a:solidFill>
+                          <a:prstDash val="solid"/>
+                          <a:round/>
+                          <a:headEnd type="none" w="med" len="med"/>
+                          <a:tailEnd type="none" w="med" len="med"/>
+                        </a:lnR>
+                        <a:lnT w="12700" cap="flat" cmpd="sng" algn="ctr">
+                          <a:solidFill>
+                            <a:schemeClr val="tx1"/>
+                          </a:solidFill>
+                          <a:prstDash val="solid"/>
+                          <a:round/>
+                          <a:headEnd type="none" w="med" len="med"/>
+                          <a:tailEnd type="none" w="med" len="med"/>
+                        </a:lnT>
+                        <a:lnB w="12700" cap="flat" cmpd="sng" algn="ctr">
+                          <a:solidFill>
+                            <a:schemeClr val="tx1"/>
+                          </a:solidFill>
+                          <a:prstDash val="solid"/>
+                          <a:round/>
+                          <a:headEnd type="none" w="med" len="med"/>
+                          <a:tailEnd type="none" w="med" len="med"/>
+                        </a:lnB>
+                        <a:lnTlToBr w="12700" cmpd="sng">
+                          <a:noFill/>
+                          <a:prstDash val="solid"/>
+                        </a:lnTlToBr>
+                        <a:lnBlToTr w="12700" cmpd="sng">
+                          <a:noFill/>
+                          <a:prstDash val="solid"/>
+                        </a:lnBlToTr>
+                        <a:solidFill>
+                          <a:schemeClr val="bg1"/>
+                        </a:solidFill>
+                      </a:tcPr>
+                    </a:tc>
+                    <a:tc>
+                      <a:txBody>
+                        <a:bodyPr/>
+                        <a:lstStyle/>
+                        <a:p>
+                          <a:pPr/>
+                          <a14:m>
+                            <m:oMathPara xmlns:m="http://schemas.openxmlformats.org/officeDocument/2006/math">
+                              <m:oMathParaPr>
+                                <m:jc m:val="centerGroup"/>
+                              </m:oMathParaPr>
+                              <m:oMath xmlns:m="http://schemas.openxmlformats.org/officeDocument/2006/math">
+                                <m:sSub>
+                                  <m:sSubPr>
+                                    <m:ctrlPr>
+                                      <a:rPr lang="en-US" i="1" smtClean="0">
+                                        <a:solidFill>
+                                          <a:schemeClr val="tx1"/>
+                                        </a:solidFill>
+                                        <a:latin typeface="Cambria Math" panose="02040503050406030204" pitchFamily="18" charset="0"/>
+                                      </a:rPr>
+                                    </m:ctrlPr>
+                                  </m:sSubPr>
+                                  <m:e>
+                                    <m:r>
+                                      <a:rPr lang="en-US" b="1" i="1" smtClean="0">
+                                        <a:solidFill>
+                                          <a:schemeClr val="tx1"/>
+                                        </a:solidFill>
+                                        <a:latin typeface="Cambria Math" panose="02040503050406030204" pitchFamily="18" charset="0"/>
+                                      </a:rPr>
+                                      <m:t>𝑨</m:t>
+                                    </m:r>
+                                  </m:e>
+                                  <m:sub>
+                                    <m:r>
+                                      <a:rPr lang="en-US" b="1" i="1" smtClean="0">
+                                        <a:solidFill>
+                                          <a:schemeClr val="tx1"/>
+                                        </a:solidFill>
+                                        <a:latin typeface="Cambria Math" panose="02040503050406030204" pitchFamily="18" charset="0"/>
+                                      </a:rPr>
+                                      <m:t>𝟑</m:t>
+                                    </m:r>
+                                    <m:r>
+                                      <a:rPr lang="en-US" b="1" i="1" smtClean="0">
+                                        <a:solidFill>
+                                          <a:schemeClr val="tx1"/>
+                                        </a:solidFill>
+                                        <a:latin typeface="Cambria Math" panose="02040503050406030204" pitchFamily="18" charset="0"/>
+                                      </a:rPr>
+                                      <m:t>𝟑</m:t>
+                                    </m:r>
+                                  </m:sub>
+                                </m:sSub>
+                              </m:oMath>
+                            </m:oMathPara>
+                          </a14:m>
+                          <a:endParaRPr lang="en-US" dirty="0"/>
+                        </a:p>
+                      </a:txBody>
+                      <a:tcPr>
+                        <a:lnL w="12700" cap="flat" cmpd="sng" algn="ctr">
+                          <a:solidFill>
+                            <a:schemeClr val="tx1"/>
+                          </a:solidFill>
+                          <a:prstDash val="solid"/>
+                          <a:round/>
+                          <a:headEnd type="none" w="med" len="med"/>
+                          <a:tailEnd type="none" w="med" len="med"/>
+                        </a:lnL>
+                        <a:lnR w="12700" cap="flat" cmpd="sng" algn="ctr">
+                          <a:solidFill>
+                            <a:schemeClr val="tx1"/>
+                          </a:solidFill>
+                          <a:prstDash val="solid"/>
+                          <a:round/>
+                          <a:headEnd type="none" w="med" len="med"/>
+                          <a:tailEnd type="none" w="med" len="med"/>
+                        </a:lnR>
+                        <a:lnT w="12700" cap="flat" cmpd="sng" algn="ctr">
+                          <a:solidFill>
+                            <a:schemeClr val="tx1"/>
+                          </a:solidFill>
+                          <a:prstDash val="solid"/>
+                          <a:round/>
+                          <a:headEnd type="none" w="med" len="med"/>
+                          <a:tailEnd type="none" w="med" len="med"/>
+                        </a:lnT>
+                        <a:lnB w="12700" cap="flat" cmpd="sng" algn="ctr">
+                          <a:solidFill>
+                            <a:schemeClr val="tx1"/>
+                          </a:solidFill>
+                          <a:prstDash val="solid"/>
+                          <a:round/>
+                          <a:headEnd type="none" w="med" len="med"/>
+                          <a:tailEnd type="none" w="med" len="med"/>
+                        </a:lnB>
+                        <a:lnTlToBr w="12700" cmpd="sng">
+                          <a:noFill/>
+                          <a:prstDash val="solid"/>
+                        </a:lnTlToBr>
+                        <a:lnBlToTr w="12700" cmpd="sng">
+                          <a:noFill/>
+                          <a:prstDash val="solid"/>
+                        </a:lnBlToTr>
+                        <a:solidFill>
+                          <a:schemeClr val="bg1"/>
+                        </a:solidFill>
+                      </a:tcPr>
+                    </a:tc>
+                    <a:extLst>
+                      <a:ext uri="{0D108BD9-81ED-4DB2-BD59-A6C34878D82A}">
+                        <a16:rowId xmlns:a16="http://schemas.microsoft.com/office/drawing/2014/main" val="1450664255"/>
+                      </a:ext>
+                    </a:extLst>
+                  </a:tr>
+                  <a:tr h="496052">
+                    <a:tc>
+                      <a:txBody>
+                        <a:bodyPr/>
+                        <a:lstStyle/>
+                        <a:p>
+                          <a14:m>
+                            <m:oMathPara xmlns:m="http://schemas.openxmlformats.org/officeDocument/2006/math">
+                              <m:oMathParaPr>
+                                <m:jc m:val="centerGroup"/>
+                              </m:oMathParaPr>
+                              <m:oMath xmlns:m="http://schemas.openxmlformats.org/officeDocument/2006/math">
+                                <m:sSub>
+                                  <m:sSubPr>
+                                    <m:ctrlPr>
+                                      <a:rPr lang="en-US" i="1" smtClean="0">
+                                        <a:solidFill>
+                                          <a:schemeClr val="tx1"/>
+                                        </a:solidFill>
+                                        <a:latin typeface="Cambria Math" panose="02040503050406030204" pitchFamily="18" charset="0"/>
+                                      </a:rPr>
+                                    </m:ctrlPr>
+                                  </m:sSubPr>
+                                  <m:e>
+                                    <m:r>
+                                      <a:rPr lang="en-US" b="1" i="1" smtClean="0">
+                                        <a:solidFill>
+                                          <a:schemeClr val="tx1"/>
+                                        </a:solidFill>
+                                        <a:latin typeface="Cambria Math" panose="02040503050406030204" pitchFamily="18" charset="0"/>
+                                      </a:rPr>
+                                      <m:t>𝑨</m:t>
+                                    </m:r>
+                                  </m:e>
+                                  <m:sub>
+                                    <m:r>
+                                      <a:rPr lang="en-US" b="1" i="1" smtClean="0">
+                                        <a:solidFill>
+                                          <a:schemeClr val="tx1"/>
+                                        </a:solidFill>
+                                        <a:latin typeface="Cambria Math" panose="02040503050406030204" pitchFamily="18" charset="0"/>
+                                      </a:rPr>
+                                      <m:t>𝟒</m:t>
+                                    </m:r>
+                                    <m:r>
+                                      <a:rPr lang="en-US" b="1" i="1" smtClean="0">
+                                        <a:solidFill>
+                                          <a:schemeClr val="tx1"/>
+                                        </a:solidFill>
+                                        <a:latin typeface="Cambria Math" panose="02040503050406030204" pitchFamily="18" charset="0"/>
+                                      </a:rPr>
+                                      <m:t>𝟏</m:t>
+                                    </m:r>
+                                  </m:sub>
+                                </m:sSub>
+                              </m:oMath>
+                            </m:oMathPara>
+                          </a14:m>
+                          <a:endParaRPr lang="en-US" dirty="0"/>
+                        </a:p>
+                      </a:txBody>
+                      <a:tcPr>
+                        <a:lnL w="12700" cap="flat" cmpd="sng" algn="ctr">
+                          <a:solidFill>
+                            <a:schemeClr val="tx1"/>
+                          </a:solidFill>
+                          <a:prstDash val="solid"/>
+                          <a:round/>
+                          <a:headEnd type="none" w="med" len="med"/>
+                          <a:tailEnd type="none" w="med" len="med"/>
+                        </a:lnL>
+                        <a:lnR w="12700" cap="flat" cmpd="sng" algn="ctr">
+                          <a:solidFill>
+                            <a:schemeClr val="tx1"/>
+                          </a:solidFill>
+                          <a:prstDash val="solid"/>
+                          <a:round/>
+                          <a:headEnd type="none" w="med" len="med"/>
+                          <a:tailEnd type="none" w="med" len="med"/>
+                        </a:lnR>
+                        <a:lnT w="12700" cap="flat" cmpd="sng" algn="ctr">
+                          <a:solidFill>
+                            <a:schemeClr val="tx1"/>
+                          </a:solidFill>
+                          <a:prstDash val="solid"/>
+                          <a:round/>
+                          <a:headEnd type="none" w="med" len="med"/>
+                          <a:tailEnd type="none" w="med" len="med"/>
+                        </a:lnT>
+                        <a:lnB w="12700" cap="flat" cmpd="sng" algn="ctr">
+                          <a:solidFill>
+                            <a:schemeClr val="tx1"/>
+                          </a:solidFill>
+                          <a:prstDash val="solid"/>
+                          <a:round/>
+                          <a:headEnd type="none" w="med" len="med"/>
+                          <a:tailEnd type="none" w="med" len="med"/>
+                        </a:lnB>
+                        <a:lnTlToBr w="12700" cmpd="sng">
+                          <a:noFill/>
+                          <a:prstDash val="solid"/>
+                        </a:lnTlToBr>
+                        <a:lnBlToTr w="12700" cmpd="sng">
+                          <a:noFill/>
+                          <a:prstDash val="solid"/>
+                        </a:lnBlToTr>
+                        <a:solidFill>
+                          <a:schemeClr val="bg1"/>
+                        </a:solidFill>
+                      </a:tcPr>
+                    </a:tc>
+                    <a:tc>
+                      <a:txBody>
+                        <a:bodyPr/>
+                        <a:lstStyle/>
+                        <a:p>
+                          <a:pPr/>
+                          <a14:m>
+                            <m:oMathPara xmlns:m="http://schemas.openxmlformats.org/officeDocument/2006/math">
+                              <m:oMathParaPr>
+                                <m:jc m:val="centerGroup"/>
+                              </m:oMathParaPr>
+                              <m:oMath xmlns:m="http://schemas.openxmlformats.org/officeDocument/2006/math">
+                                <m:sSub>
+                                  <m:sSubPr>
+                                    <m:ctrlPr>
+                                      <a:rPr lang="en-US" i="1" smtClean="0">
+                                        <a:solidFill>
+                                          <a:schemeClr val="tx1"/>
+                                        </a:solidFill>
+                                        <a:latin typeface="Cambria Math" panose="02040503050406030204" pitchFamily="18" charset="0"/>
+                                      </a:rPr>
+                                    </m:ctrlPr>
+                                  </m:sSubPr>
+                                  <m:e>
+                                    <m:r>
+                                      <a:rPr lang="en-US" b="1" i="1" smtClean="0">
+                                        <a:solidFill>
+                                          <a:schemeClr val="tx1"/>
+                                        </a:solidFill>
+                                        <a:latin typeface="Cambria Math" panose="02040503050406030204" pitchFamily="18" charset="0"/>
+                                      </a:rPr>
+                                      <m:t>𝑨</m:t>
+                                    </m:r>
+                                  </m:e>
+                                  <m:sub>
+                                    <m:r>
+                                      <a:rPr lang="en-US" b="1" i="1" smtClean="0">
+                                        <a:solidFill>
+                                          <a:schemeClr val="tx1"/>
+                                        </a:solidFill>
+                                        <a:latin typeface="Cambria Math" panose="02040503050406030204" pitchFamily="18" charset="0"/>
+                                      </a:rPr>
+                                      <m:t>𝟒</m:t>
+                                    </m:r>
+                                    <m:r>
+                                      <a:rPr lang="en-US" b="1" i="1" smtClean="0">
+                                        <a:solidFill>
+                                          <a:schemeClr val="tx1"/>
+                                        </a:solidFill>
+                                        <a:latin typeface="Cambria Math" panose="02040503050406030204" pitchFamily="18" charset="0"/>
+                                      </a:rPr>
+                                      <m:t>𝟐</m:t>
+                                    </m:r>
+                                  </m:sub>
+                                </m:sSub>
+                              </m:oMath>
+                            </m:oMathPara>
+                          </a14:m>
+                          <a:endParaRPr lang="en-US" dirty="0"/>
+                        </a:p>
+                      </a:txBody>
+                      <a:tcPr>
+                        <a:lnL w="12700" cap="flat" cmpd="sng" algn="ctr">
+                          <a:solidFill>
+                            <a:schemeClr val="tx1"/>
+                          </a:solidFill>
+                          <a:prstDash val="solid"/>
+                          <a:round/>
+                          <a:headEnd type="none" w="med" len="med"/>
+                          <a:tailEnd type="none" w="med" len="med"/>
+                        </a:lnL>
+                        <a:lnR w="12700" cap="flat" cmpd="sng" algn="ctr">
+                          <a:solidFill>
+                            <a:schemeClr val="tx1"/>
+                          </a:solidFill>
+                          <a:prstDash val="solid"/>
+                          <a:round/>
+                          <a:headEnd type="none" w="med" len="med"/>
+                          <a:tailEnd type="none" w="med" len="med"/>
+                        </a:lnR>
+                        <a:lnT w="12700" cap="flat" cmpd="sng" algn="ctr">
+                          <a:solidFill>
+                            <a:schemeClr val="tx1"/>
+                          </a:solidFill>
+                          <a:prstDash val="solid"/>
+                          <a:round/>
+                          <a:headEnd type="none" w="med" len="med"/>
+                          <a:tailEnd type="none" w="med" len="med"/>
+                        </a:lnT>
+                        <a:lnB w="12700" cap="flat" cmpd="sng" algn="ctr">
+                          <a:solidFill>
+                            <a:schemeClr val="tx1"/>
+                          </a:solidFill>
+                          <a:prstDash val="solid"/>
+                          <a:round/>
+                          <a:headEnd type="none" w="med" len="med"/>
+                          <a:tailEnd type="none" w="med" len="med"/>
+                        </a:lnB>
+                        <a:lnTlToBr w="12700" cmpd="sng">
+                          <a:noFill/>
+                          <a:prstDash val="solid"/>
+                        </a:lnTlToBr>
+                        <a:lnBlToTr w="12700" cmpd="sng">
+                          <a:noFill/>
+                          <a:prstDash val="solid"/>
+                        </a:lnBlToTr>
+                        <a:solidFill>
+                          <a:schemeClr val="bg1"/>
+                        </a:solidFill>
+                      </a:tcPr>
+                    </a:tc>
+                    <a:tc>
+                      <a:txBody>
+                        <a:bodyPr/>
+                        <a:lstStyle/>
+                        <a:p>
+                          <a:pPr/>
+                          <a14:m>
+                            <m:oMathPara xmlns:m="http://schemas.openxmlformats.org/officeDocument/2006/math">
+                              <m:oMathParaPr>
+                                <m:jc m:val="centerGroup"/>
+                              </m:oMathParaPr>
+                              <m:oMath xmlns:m="http://schemas.openxmlformats.org/officeDocument/2006/math">
+                                <m:sSub>
+                                  <m:sSubPr>
+                                    <m:ctrlPr>
+                                      <a:rPr lang="en-US" i="1" smtClean="0">
+                                        <a:solidFill>
+                                          <a:schemeClr val="tx1"/>
+                                        </a:solidFill>
+                                        <a:latin typeface="Cambria Math" panose="02040503050406030204" pitchFamily="18" charset="0"/>
+                                      </a:rPr>
+                                    </m:ctrlPr>
+                                  </m:sSubPr>
+                                  <m:e>
+                                    <m:r>
+                                      <a:rPr lang="en-US" b="1" i="1" smtClean="0">
+                                        <a:solidFill>
+                                          <a:schemeClr val="tx1"/>
+                                        </a:solidFill>
+                                        <a:latin typeface="Cambria Math" panose="02040503050406030204" pitchFamily="18" charset="0"/>
+                                      </a:rPr>
+                                      <m:t>𝑨</m:t>
+                                    </m:r>
+                                  </m:e>
+                                  <m:sub>
+                                    <m:r>
+                                      <a:rPr lang="en-US" b="1" i="1" smtClean="0">
+                                        <a:solidFill>
+                                          <a:schemeClr val="tx1"/>
+                                        </a:solidFill>
+                                        <a:latin typeface="Cambria Math" panose="02040503050406030204" pitchFamily="18" charset="0"/>
+                                      </a:rPr>
+                                      <m:t>𝟒</m:t>
+                                    </m:r>
+                                    <m:r>
+                                      <a:rPr lang="en-US" b="1" i="1" smtClean="0">
+                                        <a:solidFill>
+                                          <a:schemeClr val="tx1"/>
+                                        </a:solidFill>
+                                        <a:latin typeface="Cambria Math" panose="02040503050406030204" pitchFamily="18" charset="0"/>
+                                      </a:rPr>
+                                      <m:t>𝟑</m:t>
+                                    </m:r>
+                                  </m:sub>
+                                </m:sSub>
+                              </m:oMath>
+                            </m:oMathPara>
+                          </a14:m>
+                          <a:endParaRPr lang="en-US" dirty="0"/>
+                        </a:p>
+                      </a:txBody>
+                      <a:tcPr>
+                        <a:lnL w="12700" cap="flat" cmpd="sng" algn="ctr">
+                          <a:solidFill>
+                            <a:schemeClr val="tx1"/>
+                          </a:solidFill>
+                          <a:prstDash val="solid"/>
+                          <a:round/>
+                          <a:headEnd type="none" w="med" len="med"/>
+                          <a:tailEnd type="none" w="med" len="med"/>
+                        </a:lnL>
+                        <a:lnR w="12700" cap="flat" cmpd="sng" algn="ctr">
+                          <a:solidFill>
+                            <a:schemeClr val="tx1"/>
+                          </a:solidFill>
+                          <a:prstDash val="solid"/>
+                          <a:round/>
+                          <a:headEnd type="none" w="med" len="med"/>
+                          <a:tailEnd type="none" w="med" len="med"/>
+                        </a:lnR>
+                        <a:lnT w="12700" cap="flat" cmpd="sng" algn="ctr">
+                          <a:solidFill>
+                            <a:schemeClr val="tx1"/>
+                          </a:solidFill>
+                          <a:prstDash val="solid"/>
+                          <a:round/>
+                          <a:headEnd type="none" w="med" len="med"/>
+                          <a:tailEnd type="none" w="med" len="med"/>
+                        </a:lnT>
+                        <a:lnB w="12700" cap="flat" cmpd="sng" algn="ctr">
+                          <a:solidFill>
+                            <a:schemeClr val="tx1"/>
+                          </a:solidFill>
+                          <a:prstDash val="solid"/>
+                          <a:round/>
+                          <a:headEnd type="none" w="med" len="med"/>
+                          <a:tailEnd type="none" w="med" len="med"/>
+                        </a:lnB>
+                        <a:lnTlToBr w="12700" cmpd="sng">
+                          <a:noFill/>
+                          <a:prstDash val="solid"/>
+                        </a:lnTlToBr>
+                        <a:lnBlToTr w="12700" cmpd="sng">
+                          <a:noFill/>
+                          <a:prstDash val="solid"/>
+                        </a:lnBlToTr>
+                        <a:solidFill>
+                          <a:schemeClr val="bg1"/>
+                        </a:solidFill>
+                      </a:tcPr>
+                    </a:tc>
+                    <a:tc>
+                      <a:txBody>
+                        <a:bodyPr/>
+                        <a:lstStyle/>
+                        <a:p>
+                          <a:pPr/>
+                          <a14:m>
+                            <m:oMathPara xmlns:m="http://schemas.openxmlformats.org/officeDocument/2006/math">
+                              <m:oMathParaPr>
+                                <m:jc m:val="centerGroup"/>
+                              </m:oMathParaPr>
+                              <m:oMath xmlns:m="http://schemas.openxmlformats.org/officeDocument/2006/math">
+                                <m:sSub>
+                                  <m:sSubPr>
+                                    <m:ctrlPr>
+                                      <a:rPr lang="en-US" i="1" smtClean="0">
+                                        <a:solidFill>
+                                          <a:schemeClr val="tx1"/>
+                                        </a:solidFill>
+                                        <a:latin typeface="Cambria Math" panose="02040503050406030204" pitchFamily="18" charset="0"/>
+                                      </a:rPr>
+                                    </m:ctrlPr>
+                                  </m:sSubPr>
+                                  <m:e>
+                                    <m:r>
+                                      <a:rPr lang="en-US" b="1" i="1" smtClean="0">
+                                        <a:solidFill>
+                                          <a:schemeClr val="tx1"/>
+                                        </a:solidFill>
+                                        <a:latin typeface="Cambria Math" panose="02040503050406030204" pitchFamily="18" charset="0"/>
+                                      </a:rPr>
+                                      <m:t>𝑨</m:t>
+                                    </m:r>
+                                  </m:e>
+                                  <m:sub>
+                                    <m:r>
+                                      <a:rPr lang="en-US" b="1" i="1" smtClean="0">
+                                        <a:solidFill>
+                                          <a:schemeClr val="tx1"/>
+                                        </a:solidFill>
+                                        <a:latin typeface="Cambria Math" panose="02040503050406030204" pitchFamily="18" charset="0"/>
+                                      </a:rPr>
+                                      <m:t>𝟒</m:t>
+                                    </m:r>
+                                    <m:r>
+                                      <a:rPr lang="en-US" b="1" i="1" smtClean="0">
+                                        <a:solidFill>
+                                          <a:schemeClr val="tx1"/>
+                                        </a:solidFill>
+                                        <a:latin typeface="Cambria Math" panose="02040503050406030204" pitchFamily="18" charset="0"/>
+                                      </a:rPr>
+                                      <m:t>𝟑</m:t>
+                                    </m:r>
+                                  </m:sub>
+                                </m:sSub>
+                              </m:oMath>
+                            </m:oMathPara>
+                          </a14:m>
+                          <a:endParaRPr lang="en-US" dirty="0"/>
+                        </a:p>
+                      </a:txBody>
+                      <a:tcPr>
+                        <a:lnL w="12700" cap="flat" cmpd="sng" algn="ctr">
+                          <a:solidFill>
+                            <a:schemeClr val="tx1"/>
+                          </a:solidFill>
+                          <a:prstDash val="solid"/>
+                          <a:round/>
+                          <a:headEnd type="none" w="med" len="med"/>
+                          <a:tailEnd type="none" w="med" len="med"/>
+                        </a:lnL>
+                        <a:lnR w="12700" cap="flat" cmpd="sng" algn="ctr">
+                          <a:solidFill>
+                            <a:schemeClr val="tx1"/>
+                          </a:solidFill>
+                          <a:prstDash val="solid"/>
+                          <a:round/>
+                          <a:headEnd type="none" w="med" len="med"/>
+                          <a:tailEnd type="none" w="med" len="med"/>
+                        </a:lnR>
+                        <a:lnT w="12700" cap="flat" cmpd="sng" algn="ctr">
+                          <a:solidFill>
+                            <a:schemeClr val="tx1"/>
+                          </a:solidFill>
+                          <a:prstDash val="solid"/>
+                          <a:round/>
+                          <a:headEnd type="none" w="med" len="med"/>
+                          <a:tailEnd type="none" w="med" len="med"/>
+                        </a:lnT>
+                        <a:lnB w="12700" cap="flat" cmpd="sng" algn="ctr">
+                          <a:solidFill>
+                            <a:schemeClr val="tx1"/>
+                          </a:solidFill>
+                          <a:prstDash val="solid"/>
+                          <a:round/>
+                          <a:headEnd type="none" w="med" len="med"/>
+                          <a:tailEnd type="none" w="med" len="med"/>
+                        </a:lnB>
+                        <a:lnTlToBr w="12700" cmpd="sng">
+                          <a:noFill/>
+                          <a:prstDash val="solid"/>
+                        </a:lnTlToBr>
+                        <a:lnBlToTr w="12700" cmpd="sng">
+                          <a:noFill/>
+                          <a:prstDash val="solid"/>
+                        </a:lnBlToTr>
+                        <a:solidFill>
+                          <a:schemeClr val="bg1"/>
+                        </a:solidFill>
+                      </a:tcPr>
+                    </a:tc>
+                    <a:extLst>
+                      <a:ext uri="{0D108BD9-81ED-4DB2-BD59-A6C34878D82A}">
+                        <a16:rowId xmlns:a16="http://schemas.microsoft.com/office/drawing/2014/main" val="1780212582"/>
+                      </a:ext>
+                    </a:extLst>
+                  </a:tr>
+                </a:tbl>
+              </a:graphicData>
+            </a:graphic>
+          </p:graphicFrame>
+        </mc:Choice>
+        <mc:Fallback>
+          <p:graphicFrame>
+            <p:nvGraphicFramePr>
+              <p:cNvPr id="5" name="Table 4">
+                <a:extLst>
+                  <a:ext uri="{FF2B5EF4-FFF2-40B4-BE49-F238E27FC236}">
+                    <a16:creationId xmlns:a16="http://schemas.microsoft.com/office/drawing/2014/main" id="{E54ACC54-DA31-B62F-5B88-64E59299211C}"/>
+                  </a:ext>
+                </a:extLst>
+              </p:cNvPr>
+              <p:cNvGraphicFramePr>
+                <a:graphicFrameLocks noGrp="1"/>
+              </p:cNvGraphicFramePr>
+              <p:nvPr>
+                <p:extLst>
+                  <p:ext uri="{D42A27DB-BD31-4B8C-83A1-F6EECF244321}">
+                    <p14:modId xmlns:p14="http://schemas.microsoft.com/office/powerpoint/2010/main" val="954209091"/>
+                  </p:ext>
+                </p:extLst>
+              </p:nvPr>
+            </p:nvGraphicFramePr>
+            <p:xfrm>
+              <a:off x="190607" y="3089239"/>
+              <a:ext cx="6738376" cy="1984208"/>
+            </p:xfrm>
+            <a:graphic>
+              <a:graphicData uri="http://schemas.openxmlformats.org/drawingml/2006/table">
+                <a:tbl>
+                  <a:tblPr firstRow="1" bandRow="1">
+                    <a:tableStyleId>{5C22544A-7EE6-4342-B048-85BDC9FD1C3A}</a:tableStyleId>
+                  </a:tblPr>
+                  <a:tblGrid>
+                    <a:gridCol w="1684594">
+                      <a:extLst>
+                        <a:ext uri="{9D8B030D-6E8A-4147-A177-3AD203B41FA5}">
+                          <a16:colId xmlns:a16="http://schemas.microsoft.com/office/drawing/2014/main" val="2079826288"/>
+                        </a:ext>
+                      </a:extLst>
+                    </a:gridCol>
+                    <a:gridCol w="1684594">
+                      <a:extLst>
+                        <a:ext uri="{9D8B030D-6E8A-4147-A177-3AD203B41FA5}">
+                          <a16:colId xmlns:a16="http://schemas.microsoft.com/office/drawing/2014/main" val="739261778"/>
+                        </a:ext>
+                      </a:extLst>
+                    </a:gridCol>
+                    <a:gridCol w="1684594">
+                      <a:extLst>
+                        <a:ext uri="{9D8B030D-6E8A-4147-A177-3AD203B41FA5}">
+                          <a16:colId xmlns:a16="http://schemas.microsoft.com/office/drawing/2014/main" val="434403916"/>
+                        </a:ext>
+                      </a:extLst>
+                    </a:gridCol>
+                    <a:gridCol w="1684594">
+                      <a:extLst>
+                        <a:ext uri="{9D8B030D-6E8A-4147-A177-3AD203B41FA5}">
+                          <a16:colId xmlns:a16="http://schemas.microsoft.com/office/drawing/2014/main" val="1265239256"/>
+                        </a:ext>
+                      </a:extLst>
+                    </a:gridCol>
+                  </a:tblGrid>
+                  <a:tr h="496052">
+                    <a:tc>
+                      <a:txBody>
+                        <a:bodyPr/>
+                        <a:lstStyle/>
+                        <a:p>
+                          <a:endParaRPr lang="en-US"/>
+                        </a:p>
+                      </a:txBody>
+                      <a:tcPr>
+                        <a:lnL w="12700" cap="flat" cmpd="sng" algn="ctr">
+                          <a:solidFill>
+                            <a:schemeClr val="tx1"/>
+                          </a:solidFill>
+                          <a:prstDash val="solid"/>
+                          <a:round/>
+                          <a:headEnd type="none" w="med" len="med"/>
+                          <a:tailEnd type="none" w="med" len="med"/>
+                        </a:lnL>
+                        <a:lnR w="12700" cap="flat" cmpd="sng" algn="ctr">
+                          <a:solidFill>
+                            <a:schemeClr val="tx1"/>
+                          </a:solidFill>
+                          <a:prstDash val="solid"/>
+                          <a:round/>
+                          <a:headEnd type="none" w="med" len="med"/>
+                          <a:tailEnd type="none" w="med" len="med"/>
+                        </a:lnR>
+                        <a:lnT w="12700" cap="flat" cmpd="sng" algn="ctr">
+                          <a:solidFill>
+                            <a:schemeClr val="tx1"/>
+                          </a:solidFill>
+                          <a:prstDash val="solid"/>
+                          <a:round/>
+                          <a:headEnd type="none" w="med" len="med"/>
+                          <a:tailEnd type="none" w="med" len="med"/>
+                        </a:lnT>
+                        <a:lnB w="12700" cap="flat" cmpd="sng" algn="ctr">
+                          <a:solidFill>
+                            <a:schemeClr val="tx1"/>
+                          </a:solidFill>
+                          <a:prstDash val="solid"/>
+                          <a:round/>
+                          <a:headEnd type="none" w="med" len="med"/>
+                          <a:tailEnd type="none" w="med" len="med"/>
+                        </a:lnB>
+                        <a:lnTlToBr w="12700" cmpd="sng">
+                          <a:noFill/>
+                          <a:prstDash val="solid"/>
+                        </a:lnTlToBr>
+                        <a:lnBlToTr w="12700" cmpd="sng">
+                          <a:noFill/>
+                          <a:prstDash val="solid"/>
+                        </a:lnBlToTr>
+                        <a:blipFill>
+                          <a:blip r:embed="rId6"/>
+                          <a:stretch>
+                            <a:fillRect l="-361" t="-1220" r="-300000" b="-301220"/>
+                          </a:stretch>
+                        </a:blipFill>
+                      </a:tcPr>
+                    </a:tc>
+                    <a:tc>
+                      <a:txBody>
+                        <a:bodyPr/>
+                        <a:lstStyle/>
+                        <a:p>
+                          <a:endParaRPr lang="en-US"/>
+                        </a:p>
+                      </a:txBody>
+                      <a:tcPr>
+                        <a:lnL w="12700" cap="flat" cmpd="sng" algn="ctr">
+                          <a:solidFill>
+                            <a:schemeClr val="tx1"/>
+                          </a:solidFill>
+                          <a:prstDash val="solid"/>
+                          <a:round/>
+                          <a:headEnd type="none" w="med" len="med"/>
+                          <a:tailEnd type="none" w="med" len="med"/>
+                        </a:lnL>
+                        <a:lnR w="12700" cap="flat" cmpd="sng" algn="ctr">
+                          <a:solidFill>
+                            <a:schemeClr val="tx1"/>
+                          </a:solidFill>
+                          <a:prstDash val="solid"/>
+                          <a:round/>
+                          <a:headEnd type="none" w="med" len="med"/>
+                          <a:tailEnd type="none" w="med" len="med"/>
+                        </a:lnR>
+                        <a:lnT w="12700" cap="flat" cmpd="sng" algn="ctr">
+                          <a:solidFill>
+                            <a:schemeClr val="tx1"/>
+                          </a:solidFill>
+                          <a:prstDash val="solid"/>
+                          <a:round/>
+                          <a:headEnd type="none" w="med" len="med"/>
+                          <a:tailEnd type="none" w="med" len="med"/>
+                        </a:lnT>
+                        <a:lnB w="12700" cap="flat" cmpd="sng" algn="ctr">
+                          <a:solidFill>
+                            <a:schemeClr val="tx1"/>
+                          </a:solidFill>
+                          <a:prstDash val="solid"/>
+                          <a:round/>
+                          <a:headEnd type="none" w="med" len="med"/>
+                          <a:tailEnd type="none" w="med" len="med"/>
+                        </a:lnB>
+                        <a:lnTlToBr w="12700" cmpd="sng">
+                          <a:noFill/>
+                          <a:prstDash val="solid"/>
+                        </a:lnTlToBr>
+                        <a:lnBlToTr w="12700" cmpd="sng">
+                          <a:noFill/>
+                          <a:prstDash val="solid"/>
+                        </a:lnBlToTr>
+                        <a:blipFill>
+                          <a:blip r:embed="rId6"/>
+                          <a:stretch>
+                            <a:fillRect l="-100725" t="-1220" r="-201087" b="-301220"/>
+                          </a:stretch>
+                        </a:blipFill>
+                      </a:tcPr>
+                    </a:tc>
+                    <a:tc>
+                      <a:txBody>
+                        <a:bodyPr/>
+                        <a:lstStyle/>
+                        <a:p>
+                          <a:endParaRPr lang="en-US"/>
+                        </a:p>
+                      </a:txBody>
+                      <a:tcPr>
+                        <a:lnL w="12700" cap="flat" cmpd="sng" algn="ctr">
+                          <a:solidFill>
+                            <a:schemeClr val="tx1"/>
+                          </a:solidFill>
+                          <a:prstDash val="solid"/>
+                          <a:round/>
+                          <a:headEnd type="none" w="med" len="med"/>
+                          <a:tailEnd type="none" w="med" len="med"/>
+                        </a:lnL>
+                        <a:lnR w="12700" cap="flat" cmpd="sng" algn="ctr">
+                          <a:solidFill>
+                            <a:schemeClr val="tx1"/>
+                          </a:solidFill>
+                          <a:prstDash val="solid"/>
+                          <a:round/>
+                          <a:headEnd type="none" w="med" len="med"/>
+                          <a:tailEnd type="none" w="med" len="med"/>
+                        </a:lnR>
+                        <a:lnT w="12700" cap="flat" cmpd="sng" algn="ctr">
+                          <a:solidFill>
+                            <a:schemeClr val="tx1"/>
+                          </a:solidFill>
+                          <a:prstDash val="solid"/>
+                          <a:round/>
+                          <a:headEnd type="none" w="med" len="med"/>
+                          <a:tailEnd type="none" w="med" len="med"/>
+                        </a:lnT>
+                        <a:lnB w="12700" cap="flat" cmpd="sng" algn="ctr">
+                          <a:solidFill>
+                            <a:schemeClr val="tx1"/>
+                          </a:solidFill>
+                          <a:prstDash val="solid"/>
+                          <a:round/>
+                          <a:headEnd type="none" w="med" len="med"/>
+                          <a:tailEnd type="none" w="med" len="med"/>
+                        </a:lnB>
+                        <a:lnTlToBr w="12700" cmpd="sng">
+                          <a:noFill/>
+                          <a:prstDash val="solid"/>
+                        </a:lnTlToBr>
+                        <a:lnBlToTr w="12700" cmpd="sng">
+                          <a:noFill/>
+                          <a:prstDash val="solid"/>
+                        </a:lnBlToTr>
+                        <a:blipFill>
+                          <a:blip r:embed="rId6"/>
+                          <a:stretch>
+                            <a:fillRect l="-200000" t="-1220" r="-100361" b="-301220"/>
+                          </a:stretch>
+                        </a:blipFill>
+                      </a:tcPr>
+                    </a:tc>
+                    <a:tc>
+                      <a:txBody>
+                        <a:bodyPr/>
+                        <a:lstStyle/>
+                        <a:p>
+                          <a:endParaRPr lang="en-US"/>
+                        </a:p>
+                      </a:txBody>
+                      <a:tcPr>
+                        <a:lnL w="12700" cap="flat" cmpd="sng" algn="ctr">
+                          <a:solidFill>
+                            <a:schemeClr val="tx1"/>
+                          </a:solidFill>
+                          <a:prstDash val="solid"/>
+                          <a:round/>
+                          <a:headEnd type="none" w="med" len="med"/>
+                          <a:tailEnd type="none" w="med" len="med"/>
+                        </a:lnL>
+                        <a:lnR w="12700" cap="flat" cmpd="sng" algn="ctr">
+                          <a:solidFill>
+                            <a:schemeClr val="tx1"/>
+                          </a:solidFill>
+                          <a:prstDash val="solid"/>
+                          <a:round/>
+                          <a:headEnd type="none" w="med" len="med"/>
+                          <a:tailEnd type="none" w="med" len="med"/>
+                        </a:lnR>
+                        <a:lnT w="12700" cap="flat" cmpd="sng" algn="ctr">
+                          <a:solidFill>
+                            <a:schemeClr val="tx1"/>
+                          </a:solidFill>
+                          <a:prstDash val="solid"/>
+                          <a:round/>
+                          <a:headEnd type="none" w="med" len="med"/>
+                          <a:tailEnd type="none" w="med" len="med"/>
+                        </a:lnT>
+                        <a:lnB w="12700" cap="flat" cmpd="sng" algn="ctr">
+                          <a:solidFill>
+                            <a:schemeClr val="tx1"/>
+                          </a:solidFill>
+                          <a:prstDash val="solid"/>
+                          <a:round/>
+                          <a:headEnd type="none" w="med" len="med"/>
+                          <a:tailEnd type="none" w="med" len="med"/>
+                        </a:lnB>
+                        <a:lnTlToBr w="12700" cmpd="sng">
+                          <a:noFill/>
+                          <a:prstDash val="solid"/>
+                        </a:lnTlToBr>
+                        <a:lnBlToTr w="12700" cmpd="sng">
+                          <a:noFill/>
+                          <a:prstDash val="solid"/>
+                        </a:lnBlToTr>
+                        <a:blipFill>
+                          <a:blip r:embed="rId6"/>
+                          <a:stretch>
+                            <a:fillRect l="-301087" t="-1220" r="-725" b="-301220"/>
+                          </a:stretch>
+                        </a:blipFill>
+                      </a:tcPr>
+                    </a:tc>
+                    <a:extLst>
+                      <a:ext uri="{0D108BD9-81ED-4DB2-BD59-A6C34878D82A}">
+                        <a16:rowId xmlns:a16="http://schemas.microsoft.com/office/drawing/2014/main" val="3349285775"/>
+                      </a:ext>
+                    </a:extLst>
+                  </a:tr>
+                  <a:tr h="496052">
+                    <a:tc>
+                      <a:txBody>
+                        <a:bodyPr/>
+                        <a:lstStyle/>
+                        <a:p>
+                          <a:endParaRPr lang="en-US"/>
+                        </a:p>
+                      </a:txBody>
+                      <a:tcPr>
+                        <a:lnL w="12700" cap="flat" cmpd="sng" algn="ctr">
+                          <a:solidFill>
+                            <a:schemeClr val="tx1"/>
+                          </a:solidFill>
+                          <a:prstDash val="solid"/>
+                          <a:round/>
+                          <a:headEnd type="none" w="med" len="med"/>
+                          <a:tailEnd type="none" w="med" len="med"/>
+                        </a:lnL>
+                        <a:lnR w="12700" cap="flat" cmpd="sng" algn="ctr">
+                          <a:solidFill>
+                            <a:schemeClr val="tx1"/>
+                          </a:solidFill>
+                          <a:prstDash val="solid"/>
+                          <a:round/>
+                          <a:headEnd type="none" w="med" len="med"/>
+                          <a:tailEnd type="none" w="med" len="med"/>
+                        </a:lnR>
+                        <a:lnT w="12700" cap="flat" cmpd="sng" algn="ctr">
+                          <a:solidFill>
+                            <a:schemeClr val="tx1"/>
+                          </a:solidFill>
+                          <a:prstDash val="solid"/>
+                          <a:round/>
+                          <a:headEnd type="none" w="med" len="med"/>
+                          <a:tailEnd type="none" w="med" len="med"/>
+                        </a:lnT>
+                        <a:lnB w="12700" cap="flat" cmpd="sng" algn="ctr">
+                          <a:solidFill>
+                            <a:schemeClr val="tx1"/>
+                          </a:solidFill>
+                          <a:prstDash val="solid"/>
+                          <a:round/>
+                          <a:headEnd type="none" w="med" len="med"/>
+                          <a:tailEnd type="none" w="med" len="med"/>
+                        </a:lnB>
+                        <a:lnTlToBr w="12700" cmpd="sng">
+                          <a:noFill/>
+                          <a:prstDash val="solid"/>
+                        </a:lnTlToBr>
+                        <a:lnBlToTr w="12700" cmpd="sng">
+                          <a:noFill/>
+                          <a:prstDash val="solid"/>
+                        </a:lnBlToTr>
+                        <a:blipFill>
+                          <a:blip r:embed="rId6"/>
+                          <a:stretch>
+                            <a:fillRect l="-361" t="-101220" r="-300000" b="-201220"/>
+                          </a:stretch>
+                        </a:blipFill>
+                      </a:tcPr>
+                    </a:tc>
+                    <a:tc>
+                      <a:txBody>
+                        <a:bodyPr/>
+                        <a:lstStyle/>
+                        <a:p>
+                          <a:endParaRPr lang="en-US"/>
+                        </a:p>
+                      </a:txBody>
+                      <a:tcPr>
+                        <a:lnL w="12700" cap="flat" cmpd="sng" algn="ctr">
+                          <a:solidFill>
+                            <a:schemeClr val="tx1"/>
+                          </a:solidFill>
+                          <a:prstDash val="solid"/>
+                          <a:round/>
+                          <a:headEnd type="none" w="med" len="med"/>
+                          <a:tailEnd type="none" w="med" len="med"/>
+                        </a:lnL>
+                        <a:lnR w="12700" cap="flat" cmpd="sng" algn="ctr">
+                          <a:solidFill>
+                            <a:schemeClr val="tx1"/>
+                          </a:solidFill>
+                          <a:prstDash val="solid"/>
+                          <a:round/>
+                          <a:headEnd type="none" w="med" len="med"/>
+                          <a:tailEnd type="none" w="med" len="med"/>
+                        </a:lnR>
+                        <a:lnT w="12700" cap="flat" cmpd="sng" algn="ctr">
+                          <a:solidFill>
+                            <a:schemeClr val="tx1"/>
+                          </a:solidFill>
+                          <a:prstDash val="solid"/>
+                          <a:round/>
+                          <a:headEnd type="none" w="med" len="med"/>
+                          <a:tailEnd type="none" w="med" len="med"/>
+                        </a:lnT>
+                        <a:lnB w="12700" cap="flat" cmpd="sng" algn="ctr">
+                          <a:solidFill>
+                            <a:schemeClr val="tx1"/>
+                          </a:solidFill>
+                          <a:prstDash val="solid"/>
+                          <a:round/>
+                          <a:headEnd type="none" w="med" len="med"/>
+                          <a:tailEnd type="none" w="med" len="med"/>
+                        </a:lnB>
+                        <a:lnTlToBr w="12700" cmpd="sng">
+                          <a:noFill/>
+                          <a:prstDash val="solid"/>
+                        </a:lnTlToBr>
+                        <a:lnBlToTr w="12700" cmpd="sng">
+                          <a:noFill/>
+                          <a:prstDash val="solid"/>
+                        </a:lnBlToTr>
+                        <a:blipFill>
+                          <a:blip r:embed="rId6"/>
+                          <a:stretch>
+                            <a:fillRect l="-100725" t="-101220" r="-201087" b="-201220"/>
+                          </a:stretch>
+                        </a:blipFill>
+                      </a:tcPr>
+                    </a:tc>
+                    <a:tc>
+                      <a:txBody>
+                        <a:bodyPr/>
+                        <a:lstStyle/>
+                        <a:p>
+                          <a:endParaRPr lang="en-US"/>
+                        </a:p>
+                      </a:txBody>
+                      <a:tcPr>
+                        <a:lnL w="12700" cap="flat" cmpd="sng" algn="ctr">
+                          <a:solidFill>
+                            <a:schemeClr val="tx1"/>
+                          </a:solidFill>
+                          <a:prstDash val="solid"/>
+                          <a:round/>
+                          <a:headEnd type="none" w="med" len="med"/>
+                          <a:tailEnd type="none" w="med" len="med"/>
+                        </a:lnL>
+                        <a:lnR w="12700" cap="flat" cmpd="sng" algn="ctr">
+                          <a:solidFill>
+                            <a:schemeClr val="tx1"/>
+                          </a:solidFill>
+                          <a:prstDash val="solid"/>
+                          <a:round/>
+                          <a:headEnd type="none" w="med" len="med"/>
+                          <a:tailEnd type="none" w="med" len="med"/>
+                        </a:lnR>
+                        <a:lnT w="12700" cap="flat" cmpd="sng" algn="ctr">
+                          <a:solidFill>
+                            <a:schemeClr val="tx1"/>
+                          </a:solidFill>
+                          <a:prstDash val="solid"/>
+                          <a:round/>
+                          <a:headEnd type="none" w="med" len="med"/>
+                          <a:tailEnd type="none" w="med" len="med"/>
+                        </a:lnT>
+                        <a:lnB w="12700" cap="flat" cmpd="sng" algn="ctr">
+                          <a:solidFill>
+                            <a:schemeClr val="tx1"/>
+                          </a:solidFill>
+                          <a:prstDash val="solid"/>
+                          <a:round/>
+                          <a:headEnd type="none" w="med" len="med"/>
+                          <a:tailEnd type="none" w="med" len="med"/>
+                        </a:lnB>
+                        <a:lnTlToBr w="12700" cmpd="sng">
+                          <a:noFill/>
+                          <a:prstDash val="solid"/>
+                        </a:lnTlToBr>
+                        <a:lnBlToTr w="12700" cmpd="sng">
+                          <a:noFill/>
+                          <a:prstDash val="solid"/>
+                        </a:lnBlToTr>
+                        <a:blipFill>
+                          <a:blip r:embed="rId6"/>
+                          <a:stretch>
+                            <a:fillRect l="-200000" t="-101220" r="-100361" b="-201220"/>
+                          </a:stretch>
+                        </a:blipFill>
+                      </a:tcPr>
+                    </a:tc>
+                    <a:tc>
+                      <a:txBody>
+                        <a:bodyPr/>
+                        <a:lstStyle/>
+                        <a:p>
+                          <a:endParaRPr lang="en-US"/>
+                        </a:p>
+                      </a:txBody>
+                      <a:tcPr>
+                        <a:lnL w="12700" cap="flat" cmpd="sng" algn="ctr">
+                          <a:solidFill>
+                            <a:schemeClr val="tx1"/>
+                          </a:solidFill>
+                          <a:prstDash val="solid"/>
+                          <a:round/>
+                          <a:headEnd type="none" w="med" len="med"/>
+                          <a:tailEnd type="none" w="med" len="med"/>
+                        </a:lnL>
+                        <a:lnR w="12700" cap="flat" cmpd="sng" algn="ctr">
+                          <a:solidFill>
+                            <a:schemeClr val="tx1"/>
+                          </a:solidFill>
+                          <a:prstDash val="solid"/>
+                          <a:round/>
+                          <a:headEnd type="none" w="med" len="med"/>
+                          <a:tailEnd type="none" w="med" len="med"/>
+                        </a:lnR>
+                        <a:lnT w="12700" cap="flat" cmpd="sng" algn="ctr">
+                          <a:solidFill>
+                            <a:schemeClr val="tx1"/>
+                          </a:solidFill>
+                          <a:prstDash val="solid"/>
+                          <a:round/>
+                          <a:headEnd type="none" w="med" len="med"/>
+                          <a:tailEnd type="none" w="med" len="med"/>
+                        </a:lnT>
+                        <a:lnB w="12700" cap="flat" cmpd="sng" algn="ctr">
+                          <a:solidFill>
+                            <a:schemeClr val="tx1"/>
+                          </a:solidFill>
+                          <a:prstDash val="solid"/>
+                          <a:round/>
+                          <a:headEnd type="none" w="med" len="med"/>
+                          <a:tailEnd type="none" w="med" len="med"/>
+                        </a:lnB>
+                        <a:lnTlToBr w="12700" cmpd="sng">
+                          <a:noFill/>
+                          <a:prstDash val="solid"/>
+                        </a:lnTlToBr>
+                        <a:lnBlToTr w="12700" cmpd="sng">
+                          <a:noFill/>
+                          <a:prstDash val="solid"/>
+                        </a:lnBlToTr>
+                        <a:blipFill>
+                          <a:blip r:embed="rId6"/>
+                          <a:stretch>
+                            <a:fillRect l="-301087" t="-101220" r="-725" b="-201220"/>
+                          </a:stretch>
+                        </a:blipFill>
+                      </a:tcPr>
+                    </a:tc>
+                    <a:extLst>
+                      <a:ext uri="{0D108BD9-81ED-4DB2-BD59-A6C34878D82A}">
+                        <a16:rowId xmlns:a16="http://schemas.microsoft.com/office/drawing/2014/main" val="4231577802"/>
+                      </a:ext>
+                    </a:extLst>
+                  </a:tr>
+                  <a:tr h="496052">
+                    <a:tc>
+                      <a:txBody>
+                        <a:bodyPr/>
+                        <a:lstStyle/>
+                        <a:p>
+                          <a:endParaRPr lang="en-US"/>
+                        </a:p>
+                      </a:txBody>
+                      <a:tcPr>
+                        <a:lnL w="12700" cap="flat" cmpd="sng" algn="ctr">
+                          <a:solidFill>
+                            <a:schemeClr val="tx1"/>
+                          </a:solidFill>
+                          <a:prstDash val="solid"/>
+                          <a:round/>
+                          <a:headEnd type="none" w="med" len="med"/>
+                          <a:tailEnd type="none" w="med" len="med"/>
+                        </a:lnL>
+                        <a:lnR w="12700" cap="flat" cmpd="sng" algn="ctr">
+                          <a:solidFill>
+                            <a:schemeClr val="tx1"/>
+                          </a:solidFill>
+                          <a:prstDash val="solid"/>
+                          <a:round/>
+                          <a:headEnd type="none" w="med" len="med"/>
+                          <a:tailEnd type="none" w="med" len="med"/>
+                        </a:lnR>
+                        <a:lnT w="12700" cap="flat" cmpd="sng" algn="ctr">
+                          <a:solidFill>
+                            <a:schemeClr val="tx1"/>
+                          </a:solidFill>
+                          <a:prstDash val="solid"/>
+                          <a:round/>
+                          <a:headEnd type="none" w="med" len="med"/>
+                          <a:tailEnd type="none" w="med" len="med"/>
+                        </a:lnT>
+                        <a:lnB w="12700" cap="flat" cmpd="sng" algn="ctr">
+                          <a:solidFill>
+                            <a:schemeClr val="tx1"/>
+                          </a:solidFill>
+                          <a:prstDash val="solid"/>
+                          <a:round/>
+                          <a:headEnd type="none" w="med" len="med"/>
+                          <a:tailEnd type="none" w="med" len="med"/>
+                        </a:lnB>
+                        <a:lnTlToBr w="12700" cmpd="sng">
+                          <a:noFill/>
+                          <a:prstDash val="solid"/>
+                        </a:lnTlToBr>
+                        <a:lnBlToTr w="12700" cmpd="sng">
+                          <a:noFill/>
+                          <a:prstDash val="solid"/>
+                        </a:lnBlToTr>
+                        <a:blipFill>
+                          <a:blip r:embed="rId6"/>
+                          <a:stretch>
+                            <a:fillRect l="-361" t="-203704" r="-300000" b="-103704"/>
+                          </a:stretch>
+                        </a:blipFill>
+                      </a:tcPr>
+                    </a:tc>
+                    <a:tc>
+                      <a:txBody>
+                        <a:bodyPr/>
+                        <a:lstStyle/>
+                        <a:p>
+                          <a:endParaRPr lang="en-US"/>
+                        </a:p>
+                      </a:txBody>
+                      <a:tcPr>
+                        <a:lnL w="12700" cap="flat" cmpd="sng" algn="ctr">
+                          <a:solidFill>
+                            <a:schemeClr val="tx1"/>
+                          </a:solidFill>
+                          <a:prstDash val="solid"/>
+                          <a:round/>
+                          <a:headEnd type="none" w="med" len="med"/>
+                          <a:tailEnd type="none" w="med" len="med"/>
+                        </a:lnL>
+                        <a:lnR w="12700" cap="flat" cmpd="sng" algn="ctr">
+                          <a:solidFill>
+                            <a:schemeClr val="tx1"/>
+                          </a:solidFill>
+                          <a:prstDash val="solid"/>
+                          <a:round/>
+                          <a:headEnd type="none" w="med" len="med"/>
+                          <a:tailEnd type="none" w="med" len="med"/>
+                        </a:lnR>
+                        <a:lnT w="12700" cap="flat" cmpd="sng" algn="ctr">
+                          <a:solidFill>
+                            <a:schemeClr val="tx1"/>
+                          </a:solidFill>
+                          <a:prstDash val="solid"/>
+                          <a:round/>
+                          <a:headEnd type="none" w="med" len="med"/>
+                          <a:tailEnd type="none" w="med" len="med"/>
+                        </a:lnT>
+                        <a:lnB w="12700" cap="flat" cmpd="sng" algn="ctr">
+                          <a:solidFill>
+                            <a:schemeClr val="tx1"/>
+                          </a:solidFill>
+                          <a:prstDash val="solid"/>
+                          <a:round/>
+                          <a:headEnd type="none" w="med" len="med"/>
+                          <a:tailEnd type="none" w="med" len="med"/>
+                        </a:lnB>
+                        <a:lnTlToBr w="12700" cmpd="sng">
+                          <a:noFill/>
+                          <a:prstDash val="solid"/>
+                        </a:lnTlToBr>
+                        <a:lnBlToTr w="12700" cmpd="sng">
+                          <a:noFill/>
+                          <a:prstDash val="solid"/>
+                        </a:lnBlToTr>
+                        <a:blipFill>
+                          <a:blip r:embed="rId6"/>
+                          <a:stretch>
+                            <a:fillRect l="-100725" t="-203704" r="-201087" b="-103704"/>
+                          </a:stretch>
+                        </a:blipFill>
+                      </a:tcPr>
+                    </a:tc>
+                    <a:tc>
+                      <a:txBody>
+                        <a:bodyPr/>
+                        <a:lstStyle/>
+                        <a:p>
+                          <a:endParaRPr lang="en-US"/>
+                        </a:p>
+                      </a:txBody>
+                      <a:tcPr>
+                        <a:lnL w="12700" cap="flat" cmpd="sng" algn="ctr">
+                          <a:solidFill>
+                            <a:schemeClr val="tx1"/>
+                          </a:solidFill>
+                          <a:prstDash val="solid"/>
+                          <a:round/>
+                          <a:headEnd type="none" w="med" len="med"/>
+                          <a:tailEnd type="none" w="med" len="med"/>
+                        </a:lnL>
+                        <a:lnR w="12700" cap="flat" cmpd="sng" algn="ctr">
+                          <a:solidFill>
+                            <a:schemeClr val="tx1"/>
+                          </a:solidFill>
+                          <a:prstDash val="solid"/>
+                          <a:round/>
+                          <a:headEnd type="none" w="med" len="med"/>
+                          <a:tailEnd type="none" w="med" len="med"/>
+                        </a:lnR>
+                        <a:lnT w="12700" cap="flat" cmpd="sng" algn="ctr">
+                          <a:solidFill>
+                            <a:schemeClr val="tx1"/>
+                          </a:solidFill>
+                          <a:prstDash val="solid"/>
+                          <a:round/>
+                          <a:headEnd type="none" w="med" len="med"/>
+                          <a:tailEnd type="none" w="med" len="med"/>
+                        </a:lnT>
+                        <a:lnB w="12700" cap="flat" cmpd="sng" algn="ctr">
+                          <a:solidFill>
+                            <a:schemeClr val="tx1"/>
+                          </a:solidFill>
+                          <a:prstDash val="solid"/>
+                          <a:round/>
+                          <a:headEnd type="none" w="med" len="med"/>
+                          <a:tailEnd type="none" w="med" len="med"/>
+                        </a:lnB>
+                        <a:lnTlToBr w="12700" cmpd="sng">
+                          <a:noFill/>
+                          <a:prstDash val="solid"/>
+                        </a:lnTlToBr>
+                        <a:lnBlToTr w="12700" cmpd="sng">
+                          <a:noFill/>
+                          <a:prstDash val="solid"/>
+                        </a:lnBlToTr>
+                        <a:blipFill>
+                          <a:blip r:embed="rId6"/>
+                          <a:stretch>
+                            <a:fillRect l="-200000" t="-203704" r="-100361" b="-103704"/>
+                          </a:stretch>
+                        </a:blipFill>
+                      </a:tcPr>
+                    </a:tc>
+                    <a:tc>
+                      <a:txBody>
+                        <a:bodyPr/>
+                        <a:lstStyle/>
+                        <a:p>
+                          <a:endParaRPr lang="en-US"/>
+                        </a:p>
+                      </a:txBody>
+                      <a:tcPr>
+                        <a:lnL w="12700" cap="flat" cmpd="sng" algn="ctr">
+                          <a:solidFill>
+                            <a:schemeClr val="tx1"/>
+                          </a:solidFill>
+                          <a:prstDash val="solid"/>
+                          <a:round/>
+                          <a:headEnd type="none" w="med" len="med"/>
+                          <a:tailEnd type="none" w="med" len="med"/>
+                        </a:lnL>
+                        <a:lnR w="12700" cap="flat" cmpd="sng" algn="ctr">
+                          <a:solidFill>
+                            <a:schemeClr val="tx1"/>
+                          </a:solidFill>
+                          <a:prstDash val="solid"/>
+                          <a:round/>
+                          <a:headEnd type="none" w="med" len="med"/>
+                          <a:tailEnd type="none" w="med" len="med"/>
+                        </a:lnR>
+                        <a:lnT w="12700" cap="flat" cmpd="sng" algn="ctr">
+                          <a:solidFill>
+                            <a:schemeClr val="tx1"/>
+                          </a:solidFill>
+                          <a:prstDash val="solid"/>
+                          <a:round/>
+                          <a:headEnd type="none" w="med" len="med"/>
+                          <a:tailEnd type="none" w="med" len="med"/>
+                        </a:lnT>
+                        <a:lnB w="12700" cap="flat" cmpd="sng" algn="ctr">
+                          <a:solidFill>
+                            <a:schemeClr val="tx1"/>
+                          </a:solidFill>
+                          <a:prstDash val="solid"/>
+                          <a:round/>
+                          <a:headEnd type="none" w="med" len="med"/>
+                          <a:tailEnd type="none" w="med" len="med"/>
+                        </a:lnB>
+                        <a:lnTlToBr w="12700" cmpd="sng">
+                          <a:noFill/>
+                          <a:prstDash val="solid"/>
+                        </a:lnTlToBr>
+                        <a:lnBlToTr w="12700" cmpd="sng">
+                          <a:noFill/>
+                          <a:prstDash val="solid"/>
+                        </a:lnBlToTr>
+                        <a:blipFill>
+                          <a:blip r:embed="rId6"/>
+                          <a:stretch>
+                            <a:fillRect l="-301087" t="-203704" r="-725" b="-103704"/>
+                          </a:stretch>
+                        </a:blipFill>
+                      </a:tcPr>
+                    </a:tc>
+                    <a:extLst>
+                      <a:ext uri="{0D108BD9-81ED-4DB2-BD59-A6C34878D82A}">
+                        <a16:rowId xmlns:a16="http://schemas.microsoft.com/office/drawing/2014/main" val="1450664255"/>
+                      </a:ext>
+                    </a:extLst>
+                  </a:tr>
+                  <a:tr h="496052">
+                    <a:tc>
+                      <a:txBody>
+                        <a:bodyPr/>
+                        <a:lstStyle/>
+                        <a:p>
+                          <a:endParaRPr lang="en-US"/>
+                        </a:p>
+                      </a:txBody>
+                      <a:tcPr>
+                        <a:lnL w="12700" cap="flat" cmpd="sng" algn="ctr">
+                          <a:solidFill>
+                            <a:schemeClr val="tx1"/>
+                          </a:solidFill>
+                          <a:prstDash val="solid"/>
+                          <a:round/>
+                          <a:headEnd type="none" w="med" len="med"/>
+                          <a:tailEnd type="none" w="med" len="med"/>
+                        </a:lnL>
+                        <a:lnR w="12700" cap="flat" cmpd="sng" algn="ctr">
+                          <a:solidFill>
+                            <a:schemeClr val="tx1"/>
+                          </a:solidFill>
+                          <a:prstDash val="solid"/>
+                          <a:round/>
+                          <a:headEnd type="none" w="med" len="med"/>
+                          <a:tailEnd type="none" w="med" len="med"/>
+                        </a:lnR>
+                        <a:lnT w="12700" cap="flat" cmpd="sng" algn="ctr">
+                          <a:solidFill>
+                            <a:schemeClr val="tx1"/>
+                          </a:solidFill>
+                          <a:prstDash val="solid"/>
+                          <a:round/>
+                          <a:headEnd type="none" w="med" len="med"/>
+                          <a:tailEnd type="none" w="med" len="med"/>
+                        </a:lnT>
+                        <a:lnB w="12700" cap="flat" cmpd="sng" algn="ctr">
+                          <a:solidFill>
+                            <a:schemeClr val="tx1"/>
+                          </a:solidFill>
+                          <a:prstDash val="solid"/>
+                          <a:round/>
+                          <a:headEnd type="none" w="med" len="med"/>
+                          <a:tailEnd type="none" w="med" len="med"/>
+                        </a:lnB>
+                        <a:lnTlToBr w="12700" cmpd="sng">
+                          <a:noFill/>
+                          <a:prstDash val="solid"/>
+                        </a:lnTlToBr>
+                        <a:lnBlToTr w="12700" cmpd="sng">
+                          <a:noFill/>
+                          <a:prstDash val="solid"/>
+                        </a:lnBlToTr>
+                        <a:blipFill>
+                          <a:blip r:embed="rId6"/>
+                          <a:stretch>
+                            <a:fillRect l="-361" t="-300000" r="-300000" b="-2439"/>
+                          </a:stretch>
+                        </a:blipFill>
+                      </a:tcPr>
+                    </a:tc>
+                    <a:tc>
+                      <a:txBody>
+                        <a:bodyPr/>
+                        <a:lstStyle/>
+                        <a:p>
+                          <a:endParaRPr lang="en-US"/>
+                        </a:p>
+                      </a:txBody>
+                      <a:tcPr>
+                        <a:lnL w="12700" cap="flat" cmpd="sng" algn="ctr">
+                          <a:solidFill>
+                            <a:schemeClr val="tx1"/>
+                          </a:solidFill>
+                          <a:prstDash val="solid"/>
+                          <a:round/>
+                          <a:headEnd type="none" w="med" len="med"/>
+                          <a:tailEnd type="none" w="med" len="med"/>
+                        </a:lnL>
+                        <a:lnR w="12700" cap="flat" cmpd="sng" algn="ctr">
+                          <a:solidFill>
+                            <a:schemeClr val="tx1"/>
+                          </a:solidFill>
+                          <a:prstDash val="solid"/>
+                          <a:round/>
+                          <a:headEnd type="none" w="med" len="med"/>
+                          <a:tailEnd type="none" w="med" len="med"/>
+                        </a:lnR>
+                        <a:lnT w="12700" cap="flat" cmpd="sng" algn="ctr">
+                          <a:solidFill>
+                            <a:schemeClr val="tx1"/>
+                          </a:solidFill>
+                          <a:prstDash val="solid"/>
+                          <a:round/>
+                          <a:headEnd type="none" w="med" len="med"/>
+                          <a:tailEnd type="none" w="med" len="med"/>
+                        </a:lnT>
+                        <a:lnB w="12700" cap="flat" cmpd="sng" algn="ctr">
+                          <a:solidFill>
+                            <a:schemeClr val="tx1"/>
+                          </a:solidFill>
+                          <a:prstDash val="solid"/>
+                          <a:round/>
+                          <a:headEnd type="none" w="med" len="med"/>
+                          <a:tailEnd type="none" w="med" len="med"/>
+                        </a:lnB>
+                        <a:lnTlToBr w="12700" cmpd="sng">
+                          <a:noFill/>
+                          <a:prstDash val="solid"/>
+                        </a:lnTlToBr>
+                        <a:lnBlToTr w="12700" cmpd="sng">
+                          <a:noFill/>
+                          <a:prstDash val="solid"/>
+                        </a:lnBlToTr>
+                        <a:blipFill>
+                          <a:blip r:embed="rId6"/>
+                          <a:stretch>
+                            <a:fillRect l="-100725" t="-300000" r="-201087" b="-2439"/>
+                          </a:stretch>
+                        </a:blipFill>
+                      </a:tcPr>
+                    </a:tc>
+                    <a:tc>
+                      <a:txBody>
+                        <a:bodyPr/>
+                        <a:lstStyle/>
+                        <a:p>
+                          <a:endParaRPr lang="en-US"/>
+                        </a:p>
+                      </a:txBody>
+                      <a:tcPr>
+                        <a:lnL w="12700" cap="flat" cmpd="sng" algn="ctr">
+                          <a:solidFill>
+                            <a:schemeClr val="tx1"/>
+                          </a:solidFill>
+                          <a:prstDash val="solid"/>
+                          <a:round/>
+                          <a:headEnd type="none" w="med" len="med"/>
+                          <a:tailEnd type="none" w="med" len="med"/>
+                        </a:lnL>
+                        <a:lnR w="12700" cap="flat" cmpd="sng" algn="ctr">
+                          <a:solidFill>
+                            <a:schemeClr val="tx1"/>
+                          </a:solidFill>
+                          <a:prstDash val="solid"/>
+                          <a:round/>
+                          <a:headEnd type="none" w="med" len="med"/>
+                          <a:tailEnd type="none" w="med" len="med"/>
+                        </a:lnR>
+                        <a:lnT w="12700" cap="flat" cmpd="sng" algn="ctr">
+                          <a:solidFill>
+                            <a:schemeClr val="tx1"/>
+                          </a:solidFill>
+                          <a:prstDash val="solid"/>
+                          <a:round/>
+                          <a:headEnd type="none" w="med" len="med"/>
+                          <a:tailEnd type="none" w="med" len="med"/>
+                        </a:lnT>
+                        <a:lnB w="12700" cap="flat" cmpd="sng" algn="ctr">
+                          <a:solidFill>
+                            <a:schemeClr val="tx1"/>
+                          </a:solidFill>
+                          <a:prstDash val="solid"/>
+                          <a:round/>
+                          <a:headEnd type="none" w="med" len="med"/>
+                          <a:tailEnd type="none" w="med" len="med"/>
+                        </a:lnB>
+                        <a:lnTlToBr w="12700" cmpd="sng">
+                          <a:noFill/>
+                          <a:prstDash val="solid"/>
+                        </a:lnTlToBr>
+                        <a:lnBlToTr w="12700" cmpd="sng">
+                          <a:noFill/>
+                          <a:prstDash val="solid"/>
+                        </a:lnBlToTr>
+                        <a:blipFill>
+                          <a:blip r:embed="rId6"/>
+                          <a:stretch>
+                            <a:fillRect l="-200000" t="-300000" r="-100361" b="-2439"/>
+                          </a:stretch>
+                        </a:blipFill>
+                      </a:tcPr>
+                    </a:tc>
+                    <a:tc>
+                      <a:txBody>
+                        <a:bodyPr/>
+                        <a:lstStyle/>
+                        <a:p>
+                          <a:endParaRPr lang="en-US"/>
+                        </a:p>
+                      </a:txBody>
+                      <a:tcPr>
+                        <a:lnL w="12700" cap="flat" cmpd="sng" algn="ctr">
+                          <a:solidFill>
+                            <a:schemeClr val="tx1"/>
+                          </a:solidFill>
+                          <a:prstDash val="solid"/>
+                          <a:round/>
+                          <a:headEnd type="none" w="med" len="med"/>
+                          <a:tailEnd type="none" w="med" len="med"/>
+                        </a:lnL>
+                        <a:lnR w="12700" cap="flat" cmpd="sng" algn="ctr">
+                          <a:solidFill>
+                            <a:schemeClr val="tx1"/>
+                          </a:solidFill>
+                          <a:prstDash val="solid"/>
+                          <a:round/>
+                          <a:headEnd type="none" w="med" len="med"/>
+                          <a:tailEnd type="none" w="med" len="med"/>
+                        </a:lnR>
+                        <a:lnT w="12700" cap="flat" cmpd="sng" algn="ctr">
+                          <a:solidFill>
+                            <a:schemeClr val="tx1"/>
+                          </a:solidFill>
+                          <a:prstDash val="solid"/>
+                          <a:round/>
+                          <a:headEnd type="none" w="med" len="med"/>
+                          <a:tailEnd type="none" w="med" len="med"/>
+                        </a:lnT>
+                        <a:lnB w="12700" cap="flat" cmpd="sng" algn="ctr">
+                          <a:solidFill>
+                            <a:schemeClr val="tx1"/>
+                          </a:solidFill>
+                          <a:prstDash val="solid"/>
+                          <a:round/>
+                          <a:headEnd type="none" w="med" len="med"/>
+                          <a:tailEnd type="none" w="med" len="med"/>
+                        </a:lnB>
+                        <a:lnTlToBr w="12700" cmpd="sng">
+                          <a:noFill/>
+                          <a:prstDash val="solid"/>
+                        </a:lnTlToBr>
+                        <a:lnBlToTr w="12700" cmpd="sng">
+                          <a:noFill/>
+                          <a:prstDash val="solid"/>
+                        </a:lnBlToTr>
+                        <a:blipFill>
+                          <a:blip r:embed="rId6"/>
+                          <a:stretch>
+                            <a:fillRect l="-301087" t="-300000" r="-725" b="-2439"/>
+                          </a:stretch>
+                        </a:blipFill>
+                      </a:tcPr>
+                    </a:tc>
+                    <a:extLst>
+                      <a:ext uri="{0D108BD9-81ED-4DB2-BD59-A6C34878D82A}">
+                        <a16:rowId xmlns:a16="http://schemas.microsoft.com/office/drawing/2014/main" val="1780212582"/>
+                      </a:ext>
+                    </a:extLst>
+                  </a:tr>
+                </a:tbl>
+              </a:graphicData>
+            </a:graphic>
+          </p:graphicFrame>
+        </mc:Fallback>
+      </mc:AlternateContent>
+      <p:sp>
+        <p:nvSpPr>
+          <p:cNvPr id="10" name="TextBox 9">
+            <a:extLst>
+              <a:ext uri="{FF2B5EF4-FFF2-40B4-BE49-F238E27FC236}">
+                <a16:creationId xmlns:a16="http://schemas.microsoft.com/office/drawing/2014/main" id="{9C62B76C-3B33-FE38-4F6D-E0255CF9E017}"/>
+              </a:ext>
+            </a:extLst>
+          </p:cNvPr>
+          <p:cNvSpPr txBox="1"/>
+          <p:nvPr/>
+        </p:nvSpPr>
+        <p:spPr>
+          <a:xfrm>
+            <a:off x="4994787" y="1848787"/>
+            <a:ext cx="1828800" cy="523220"/>
+          </a:xfrm>
+          <a:prstGeom prst="rect">
+            <a:avLst/>
+          </a:prstGeom>
+          <a:noFill/>
+        </p:spPr>
+        <p:txBody>
+          <a:bodyPr wrap="square" rtlCol="0">
+            <a:spAutoFit/>
+          </a:bodyPr>
+          <a:lstStyle/>
+          <a:p>
+            <a:r>
+              <a:rPr lang="en-US" sz="2800" dirty="0"/>
+              <a:t>subject to</a:t>
+            </a:r>
+          </a:p>
+        </p:txBody>
+      </p:sp>
+      <p:sp>
+        <p:nvSpPr>
+          <p:cNvPr id="12" name="TextBox 11">
+            <a:extLst>
+              <a:ext uri="{FF2B5EF4-FFF2-40B4-BE49-F238E27FC236}">
+                <a16:creationId xmlns:a16="http://schemas.microsoft.com/office/drawing/2014/main" id="{49068EE0-5EC4-60E1-A425-C1E8D05C878D}"/>
+              </a:ext>
+            </a:extLst>
+          </p:cNvPr>
+          <p:cNvSpPr txBox="1"/>
+          <p:nvPr/>
+        </p:nvSpPr>
+        <p:spPr>
+          <a:xfrm>
+            <a:off x="725745" y="1836521"/>
+            <a:ext cx="2976754" cy="523220"/>
+          </a:xfrm>
+          <a:prstGeom prst="rect">
+            <a:avLst/>
+          </a:prstGeom>
+          <a:noFill/>
+        </p:spPr>
+        <p:txBody>
+          <a:bodyPr wrap="square" rtlCol="0">
+            <a:spAutoFit/>
+          </a:bodyPr>
+          <a:lstStyle/>
+          <a:p>
+            <a:r>
+              <a:rPr lang="en-US" sz="2800" dirty="0"/>
+              <a:t>Primal Problem:</a:t>
+            </a:r>
+          </a:p>
+        </p:txBody>
+      </p:sp>
+      <p:sp>
+        <p:nvSpPr>
+          <p:cNvPr id="13" name="TextBox 12">
+            <a:extLst>
+              <a:ext uri="{FF2B5EF4-FFF2-40B4-BE49-F238E27FC236}">
+                <a16:creationId xmlns:a16="http://schemas.microsoft.com/office/drawing/2014/main" id="{A5653989-540B-604C-1EB3-60AC1B228650}"/>
+              </a:ext>
+            </a:extLst>
+          </p:cNvPr>
+          <p:cNvSpPr txBox="1"/>
+          <p:nvPr/>
+        </p:nvSpPr>
+        <p:spPr>
+          <a:xfrm>
+            <a:off x="8212144" y="1856185"/>
+            <a:ext cx="811161" cy="523220"/>
+          </a:xfrm>
+          <a:prstGeom prst="rect">
+            <a:avLst/>
+          </a:prstGeom>
+          <a:noFill/>
+        </p:spPr>
+        <p:txBody>
+          <a:bodyPr wrap="square" rtlCol="0">
+            <a:spAutoFit/>
+          </a:bodyPr>
+          <a:lstStyle/>
+          <a:p>
+            <a:r>
+              <a:rPr lang="en-US" sz="2800" dirty="0"/>
+              <a:t>and</a:t>
+            </a:r>
+          </a:p>
+        </p:txBody>
+      </p:sp>
+      <mc:AlternateContent xmlns:mc="http://schemas.openxmlformats.org/markup-compatibility/2006">
+        <mc:Choice xmlns:a14="http://schemas.microsoft.com/office/drawing/2010/main" Requires="a14">
+          <p:graphicFrame>
+            <p:nvGraphicFramePr>
+              <p:cNvPr id="14" name="Table 13">
+                <a:extLst>
+                  <a:ext uri="{FF2B5EF4-FFF2-40B4-BE49-F238E27FC236}">
+                    <a16:creationId xmlns:a16="http://schemas.microsoft.com/office/drawing/2014/main" id="{862149C5-A7CE-5D95-2698-C92B9E387C65}"/>
+                  </a:ext>
+                </a:extLst>
+              </p:cNvPr>
+              <p:cNvGraphicFramePr>
+                <a:graphicFrameLocks noGrp="1"/>
+              </p:cNvGraphicFramePr>
+              <p:nvPr>
+                <p:extLst>
+                  <p:ext uri="{D42A27DB-BD31-4B8C-83A1-F6EECF244321}">
+                    <p14:modId xmlns:p14="http://schemas.microsoft.com/office/powerpoint/2010/main" val="411337264"/>
+                  </p:ext>
+                </p:extLst>
+              </p:nvPr>
+            </p:nvGraphicFramePr>
+            <p:xfrm>
+              <a:off x="7185915" y="3089239"/>
+              <a:ext cx="1684594" cy="1984208"/>
+            </p:xfrm>
+            <a:graphic>
+              <a:graphicData uri="http://schemas.openxmlformats.org/drawingml/2006/table">
+                <a:tbl>
+                  <a:tblPr firstRow="1" bandRow="1">
+                    <a:tableStyleId>{5C22544A-7EE6-4342-B048-85BDC9FD1C3A}</a:tableStyleId>
+                  </a:tblPr>
+                  <a:tblGrid>
+                    <a:gridCol w="1684594">
+                      <a:extLst>
+                        <a:ext uri="{9D8B030D-6E8A-4147-A177-3AD203B41FA5}">
+                          <a16:colId xmlns:a16="http://schemas.microsoft.com/office/drawing/2014/main" val="2079826288"/>
+                        </a:ext>
+                      </a:extLst>
+                    </a:gridCol>
+                  </a:tblGrid>
+                  <a:tr h="496052">
+                    <a:tc>
+                      <a:txBody>
+                        <a:bodyPr/>
+                        <a:lstStyle/>
+                        <a:p>
+                          <a14:m>
+                            <m:oMathPara xmlns:m="http://schemas.openxmlformats.org/officeDocument/2006/math">
+                              <m:oMathParaPr>
+                                <m:jc m:val="centerGroup"/>
+                              </m:oMathParaPr>
+                              <m:oMath xmlns:m="http://schemas.openxmlformats.org/officeDocument/2006/math">
+                                <m:sSub>
+                                  <m:sSubPr>
+                                    <m:ctrlPr>
+                                      <a:rPr lang="en-US" i="1" smtClean="0">
+                                        <a:solidFill>
+                                          <a:schemeClr val="tx1"/>
+                                        </a:solidFill>
+                                        <a:latin typeface="Cambria Math" panose="02040503050406030204" pitchFamily="18" charset="0"/>
+                                      </a:rPr>
+                                    </m:ctrlPr>
+                                  </m:sSubPr>
+                                  <m:e>
+                                    <m:r>
+                                      <a:rPr lang="en-US" b="1" i="1" smtClean="0">
+                                        <a:solidFill>
+                                          <a:schemeClr val="tx1"/>
+                                        </a:solidFill>
+                                        <a:latin typeface="Cambria Math" panose="02040503050406030204" pitchFamily="18" charset="0"/>
+                                      </a:rPr>
+                                      <m:t>𝒙</m:t>
+                                    </m:r>
+                                  </m:e>
+                                  <m:sub>
+                                    <m:r>
+                                      <a:rPr lang="en-US" b="1" i="1" smtClean="0">
+                                        <a:solidFill>
+                                          <a:schemeClr val="tx1"/>
+                                        </a:solidFill>
+                                        <a:latin typeface="Cambria Math" panose="02040503050406030204" pitchFamily="18" charset="0"/>
+                                      </a:rPr>
+                                      <m:t>𝟏</m:t>
+                                    </m:r>
+                                  </m:sub>
+                                </m:sSub>
+                              </m:oMath>
+                            </m:oMathPara>
+                          </a14:m>
+                          <a:endParaRPr lang="en-US" dirty="0"/>
+                        </a:p>
+                      </a:txBody>
+                      <a:tcPr>
+                        <a:lnL w="12700" cap="flat" cmpd="sng" algn="ctr">
+                          <a:solidFill>
+                            <a:schemeClr val="tx1"/>
+                          </a:solidFill>
+                          <a:prstDash val="solid"/>
+                          <a:round/>
+                          <a:headEnd type="none" w="med" len="med"/>
+                          <a:tailEnd type="none" w="med" len="med"/>
+                        </a:lnL>
+                        <a:lnR w="12700" cap="flat" cmpd="sng" algn="ctr">
+                          <a:solidFill>
+                            <a:schemeClr val="tx1"/>
+                          </a:solidFill>
+                          <a:prstDash val="solid"/>
+                          <a:round/>
+                          <a:headEnd type="none" w="med" len="med"/>
+                          <a:tailEnd type="none" w="med" len="med"/>
+                        </a:lnR>
+                        <a:lnT w="12700" cap="flat" cmpd="sng" algn="ctr">
+                          <a:solidFill>
+                            <a:schemeClr val="tx1"/>
+                          </a:solidFill>
+                          <a:prstDash val="solid"/>
+                          <a:round/>
+                          <a:headEnd type="none" w="med" len="med"/>
+                          <a:tailEnd type="none" w="med" len="med"/>
+                        </a:lnT>
+                        <a:lnB w="12700" cap="flat" cmpd="sng" algn="ctr">
+                          <a:solidFill>
+                            <a:schemeClr val="tx1"/>
+                          </a:solidFill>
+                          <a:prstDash val="solid"/>
+                          <a:round/>
+                          <a:headEnd type="none" w="med" len="med"/>
+                          <a:tailEnd type="none" w="med" len="med"/>
+                        </a:lnB>
+                        <a:lnTlToBr w="12700" cmpd="sng">
+                          <a:noFill/>
+                          <a:prstDash val="solid"/>
+                        </a:lnTlToBr>
+                        <a:lnBlToTr w="12700" cmpd="sng">
+                          <a:noFill/>
+                          <a:prstDash val="solid"/>
+                        </a:lnBlToTr>
+                        <a:solidFill>
+                          <a:schemeClr val="bg1"/>
+                        </a:solidFill>
+                      </a:tcPr>
+                    </a:tc>
+                    <a:extLst>
+                      <a:ext uri="{0D108BD9-81ED-4DB2-BD59-A6C34878D82A}">
+                        <a16:rowId xmlns:a16="http://schemas.microsoft.com/office/drawing/2014/main" val="3349285775"/>
+                      </a:ext>
+                    </a:extLst>
+                  </a:tr>
+                  <a:tr h="496052">
+                    <a:tc>
+                      <a:txBody>
+                        <a:bodyPr/>
+                        <a:lstStyle/>
+                        <a:p>
+                          <a14:m>
+                            <m:oMathPara xmlns:m="http://schemas.openxmlformats.org/officeDocument/2006/math">
+                              <m:oMathParaPr>
+                                <m:jc m:val="centerGroup"/>
+                              </m:oMathParaPr>
+                              <m:oMath xmlns:m="http://schemas.openxmlformats.org/officeDocument/2006/math">
+                                <m:sSub>
+                                  <m:sSubPr>
+                                    <m:ctrlPr>
+                                      <a:rPr lang="en-US" i="1" smtClean="0">
+                                        <a:solidFill>
+                                          <a:schemeClr val="tx1"/>
+                                        </a:solidFill>
+                                        <a:latin typeface="Cambria Math" panose="02040503050406030204" pitchFamily="18" charset="0"/>
+                                      </a:rPr>
+                                    </m:ctrlPr>
+                                  </m:sSubPr>
+                                  <m:e>
+                                    <m:r>
+                                      <a:rPr lang="en-US" b="1" i="1" smtClean="0">
+                                        <a:solidFill>
+                                          <a:schemeClr val="tx1"/>
+                                        </a:solidFill>
+                                        <a:latin typeface="Cambria Math" panose="02040503050406030204" pitchFamily="18" charset="0"/>
+                                      </a:rPr>
+                                      <m:t>𝒙</m:t>
+                                    </m:r>
+                                  </m:e>
+                                  <m:sub>
+                                    <m:r>
+                                      <a:rPr lang="en-US" b="1" i="1" smtClean="0">
+                                        <a:solidFill>
+                                          <a:schemeClr val="tx1"/>
+                                        </a:solidFill>
+                                        <a:latin typeface="Cambria Math" panose="02040503050406030204" pitchFamily="18" charset="0"/>
+                                      </a:rPr>
+                                      <m:t>𝟐</m:t>
+                                    </m:r>
+                                  </m:sub>
+                                </m:sSub>
+                              </m:oMath>
+                            </m:oMathPara>
+                          </a14:m>
+                          <a:endParaRPr lang="en-US" dirty="0"/>
+                        </a:p>
+                      </a:txBody>
+                      <a:tcPr>
+                        <a:lnL w="12700" cap="flat" cmpd="sng" algn="ctr">
+                          <a:solidFill>
+                            <a:schemeClr val="tx1"/>
+                          </a:solidFill>
+                          <a:prstDash val="solid"/>
+                          <a:round/>
+                          <a:headEnd type="none" w="med" len="med"/>
+                          <a:tailEnd type="none" w="med" len="med"/>
+                        </a:lnL>
+                        <a:lnR w="12700" cap="flat" cmpd="sng" algn="ctr">
+                          <a:solidFill>
+                            <a:schemeClr val="tx1"/>
+                          </a:solidFill>
+                          <a:prstDash val="solid"/>
+                          <a:round/>
+                          <a:headEnd type="none" w="med" len="med"/>
+                          <a:tailEnd type="none" w="med" len="med"/>
+                        </a:lnR>
+                        <a:lnT w="12700" cap="flat" cmpd="sng" algn="ctr">
+                          <a:solidFill>
+                            <a:schemeClr val="tx1"/>
+                          </a:solidFill>
+                          <a:prstDash val="solid"/>
+                          <a:round/>
+                          <a:headEnd type="none" w="med" len="med"/>
+                          <a:tailEnd type="none" w="med" len="med"/>
+                        </a:lnT>
+                        <a:lnB w="12700" cap="flat" cmpd="sng" algn="ctr">
+                          <a:solidFill>
+                            <a:schemeClr val="tx1"/>
+                          </a:solidFill>
+                          <a:prstDash val="solid"/>
+                          <a:round/>
+                          <a:headEnd type="none" w="med" len="med"/>
+                          <a:tailEnd type="none" w="med" len="med"/>
+                        </a:lnB>
+                        <a:lnTlToBr w="12700" cmpd="sng">
+                          <a:noFill/>
+                          <a:prstDash val="solid"/>
+                        </a:lnTlToBr>
+                        <a:lnBlToTr w="12700" cmpd="sng">
+                          <a:noFill/>
+                          <a:prstDash val="solid"/>
+                        </a:lnBlToTr>
+                        <a:solidFill>
+                          <a:schemeClr val="bg1"/>
+                        </a:solidFill>
+                      </a:tcPr>
+                    </a:tc>
+                    <a:extLst>
+                      <a:ext uri="{0D108BD9-81ED-4DB2-BD59-A6C34878D82A}">
+                        <a16:rowId xmlns:a16="http://schemas.microsoft.com/office/drawing/2014/main" val="4231577802"/>
+                      </a:ext>
+                    </a:extLst>
+                  </a:tr>
+                  <a:tr h="496052">
+                    <a:tc>
+                      <a:txBody>
+                        <a:bodyPr/>
+                        <a:lstStyle/>
+                        <a:p>
+                          <a14:m>
+                            <m:oMathPara xmlns:m="http://schemas.openxmlformats.org/officeDocument/2006/math">
+                              <m:oMathParaPr>
+                                <m:jc m:val="centerGroup"/>
+                              </m:oMathParaPr>
+                              <m:oMath xmlns:m="http://schemas.openxmlformats.org/officeDocument/2006/math">
+                                <m:sSub>
+                                  <m:sSubPr>
+                                    <m:ctrlPr>
+                                      <a:rPr lang="en-US" i="1" smtClean="0">
+                                        <a:solidFill>
+                                          <a:schemeClr val="tx1"/>
+                                        </a:solidFill>
+                                        <a:latin typeface="Cambria Math" panose="02040503050406030204" pitchFamily="18" charset="0"/>
+                                      </a:rPr>
+                                    </m:ctrlPr>
+                                  </m:sSubPr>
+                                  <m:e>
+                                    <m:r>
+                                      <a:rPr lang="en-US" b="1" i="1" smtClean="0">
+                                        <a:solidFill>
+                                          <a:schemeClr val="tx1"/>
+                                        </a:solidFill>
+                                        <a:latin typeface="Cambria Math" panose="02040503050406030204" pitchFamily="18" charset="0"/>
+                                      </a:rPr>
+                                      <m:t>𝒙</m:t>
+                                    </m:r>
+                                  </m:e>
+                                  <m:sub>
+                                    <m:r>
+                                      <a:rPr lang="en-US" b="1" i="1" smtClean="0">
+                                        <a:solidFill>
+                                          <a:schemeClr val="tx1"/>
+                                        </a:solidFill>
+                                        <a:latin typeface="Cambria Math" panose="02040503050406030204" pitchFamily="18" charset="0"/>
+                                      </a:rPr>
+                                      <m:t>𝟑</m:t>
+                                    </m:r>
+                                  </m:sub>
+                                </m:sSub>
+                              </m:oMath>
+                            </m:oMathPara>
+                          </a14:m>
+                          <a:endParaRPr lang="en-US" dirty="0"/>
+                        </a:p>
+                      </a:txBody>
+                      <a:tcPr>
+                        <a:lnL w="12700" cap="flat" cmpd="sng" algn="ctr">
+                          <a:solidFill>
+                            <a:schemeClr val="tx1"/>
+                          </a:solidFill>
+                          <a:prstDash val="solid"/>
+                          <a:round/>
+                          <a:headEnd type="none" w="med" len="med"/>
+                          <a:tailEnd type="none" w="med" len="med"/>
+                        </a:lnL>
+                        <a:lnR w="12700" cap="flat" cmpd="sng" algn="ctr">
+                          <a:solidFill>
+                            <a:schemeClr val="tx1"/>
+                          </a:solidFill>
+                          <a:prstDash val="solid"/>
+                          <a:round/>
+                          <a:headEnd type="none" w="med" len="med"/>
+                          <a:tailEnd type="none" w="med" len="med"/>
+                        </a:lnR>
+                        <a:lnT w="12700" cap="flat" cmpd="sng" algn="ctr">
+                          <a:solidFill>
+                            <a:schemeClr val="tx1"/>
+                          </a:solidFill>
+                          <a:prstDash val="solid"/>
+                          <a:round/>
+                          <a:headEnd type="none" w="med" len="med"/>
+                          <a:tailEnd type="none" w="med" len="med"/>
+                        </a:lnT>
+                        <a:lnB w="12700" cap="flat" cmpd="sng" algn="ctr">
+                          <a:solidFill>
+                            <a:schemeClr val="tx1"/>
+                          </a:solidFill>
+                          <a:prstDash val="solid"/>
+                          <a:round/>
+                          <a:headEnd type="none" w="med" len="med"/>
+                          <a:tailEnd type="none" w="med" len="med"/>
+                        </a:lnB>
+                        <a:lnTlToBr w="12700" cmpd="sng">
+                          <a:noFill/>
+                          <a:prstDash val="solid"/>
+                        </a:lnTlToBr>
+                        <a:lnBlToTr w="12700" cmpd="sng">
+                          <a:noFill/>
+                          <a:prstDash val="solid"/>
+                        </a:lnBlToTr>
+                        <a:solidFill>
+                          <a:schemeClr val="bg1"/>
+                        </a:solidFill>
+                      </a:tcPr>
+                    </a:tc>
+                    <a:extLst>
+                      <a:ext uri="{0D108BD9-81ED-4DB2-BD59-A6C34878D82A}">
+                        <a16:rowId xmlns:a16="http://schemas.microsoft.com/office/drawing/2014/main" val="1450664255"/>
+                      </a:ext>
+                    </a:extLst>
+                  </a:tr>
+                  <a:tr h="496052">
+                    <a:tc>
+                      <a:txBody>
+                        <a:bodyPr/>
+                        <a:lstStyle/>
+                        <a:p>
+                          <a14:m>
+                            <m:oMathPara xmlns:m="http://schemas.openxmlformats.org/officeDocument/2006/math">
+                              <m:oMathParaPr>
+                                <m:jc m:val="centerGroup"/>
+                              </m:oMathParaPr>
+                              <m:oMath xmlns:m="http://schemas.openxmlformats.org/officeDocument/2006/math">
+                                <m:sSub>
+                                  <m:sSubPr>
+                                    <m:ctrlPr>
+                                      <a:rPr lang="en-US" i="1" smtClean="0">
+                                        <a:solidFill>
+                                          <a:schemeClr val="tx1"/>
+                                        </a:solidFill>
+                                        <a:latin typeface="Cambria Math" panose="02040503050406030204" pitchFamily="18" charset="0"/>
+                                      </a:rPr>
+                                    </m:ctrlPr>
+                                  </m:sSubPr>
+                                  <m:e>
+                                    <m:r>
+                                      <a:rPr lang="en-US" b="1" i="1" smtClean="0">
+                                        <a:solidFill>
+                                          <a:schemeClr val="tx1"/>
+                                        </a:solidFill>
+                                        <a:latin typeface="Cambria Math" panose="02040503050406030204" pitchFamily="18" charset="0"/>
+                                      </a:rPr>
+                                      <m:t>𝒙</m:t>
+                                    </m:r>
+                                  </m:e>
+                                  <m:sub>
+                                    <m:r>
+                                      <a:rPr lang="en-US" b="1" i="1" smtClean="0">
+                                        <a:solidFill>
+                                          <a:schemeClr val="tx1"/>
+                                        </a:solidFill>
+                                        <a:latin typeface="Cambria Math" panose="02040503050406030204" pitchFamily="18" charset="0"/>
+                                      </a:rPr>
+                                      <m:t>𝟒</m:t>
+                                    </m:r>
+                                  </m:sub>
+                                </m:sSub>
+                              </m:oMath>
+                            </m:oMathPara>
+                          </a14:m>
+                          <a:endParaRPr lang="en-US" dirty="0"/>
+                        </a:p>
+                      </a:txBody>
+                      <a:tcPr>
+                        <a:lnL w="12700" cap="flat" cmpd="sng" algn="ctr">
+                          <a:solidFill>
+                            <a:schemeClr val="tx1"/>
+                          </a:solidFill>
+                          <a:prstDash val="solid"/>
+                          <a:round/>
+                          <a:headEnd type="none" w="med" len="med"/>
+                          <a:tailEnd type="none" w="med" len="med"/>
+                        </a:lnL>
+                        <a:lnR w="12700" cap="flat" cmpd="sng" algn="ctr">
+                          <a:solidFill>
+                            <a:schemeClr val="tx1"/>
+                          </a:solidFill>
+                          <a:prstDash val="solid"/>
+                          <a:round/>
+                          <a:headEnd type="none" w="med" len="med"/>
+                          <a:tailEnd type="none" w="med" len="med"/>
+                        </a:lnR>
+                        <a:lnT w="12700" cap="flat" cmpd="sng" algn="ctr">
+                          <a:solidFill>
+                            <a:schemeClr val="tx1"/>
+                          </a:solidFill>
+                          <a:prstDash val="solid"/>
+                          <a:round/>
+                          <a:headEnd type="none" w="med" len="med"/>
+                          <a:tailEnd type="none" w="med" len="med"/>
+                        </a:lnT>
+                        <a:lnB w="12700" cap="flat" cmpd="sng" algn="ctr">
+                          <a:solidFill>
+                            <a:schemeClr val="tx1"/>
+                          </a:solidFill>
+                          <a:prstDash val="solid"/>
+                          <a:round/>
+                          <a:headEnd type="none" w="med" len="med"/>
+                          <a:tailEnd type="none" w="med" len="med"/>
+                        </a:lnB>
+                        <a:lnTlToBr w="12700" cmpd="sng">
+                          <a:noFill/>
+                          <a:prstDash val="solid"/>
+                        </a:lnTlToBr>
+                        <a:lnBlToTr w="12700" cmpd="sng">
+                          <a:noFill/>
+                          <a:prstDash val="solid"/>
+                        </a:lnBlToTr>
+                        <a:solidFill>
+                          <a:schemeClr val="bg1"/>
+                        </a:solidFill>
+                      </a:tcPr>
+                    </a:tc>
+                    <a:extLst>
+                      <a:ext uri="{0D108BD9-81ED-4DB2-BD59-A6C34878D82A}">
+                        <a16:rowId xmlns:a16="http://schemas.microsoft.com/office/drawing/2014/main" val="1780212582"/>
+                      </a:ext>
+                    </a:extLst>
+                  </a:tr>
+                </a:tbl>
+              </a:graphicData>
+            </a:graphic>
+          </p:graphicFrame>
+        </mc:Choice>
+        <mc:Fallback>
+          <p:graphicFrame>
+            <p:nvGraphicFramePr>
+              <p:cNvPr id="14" name="Table 13">
+                <a:extLst>
+                  <a:ext uri="{FF2B5EF4-FFF2-40B4-BE49-F238E27FC236}">
+                    <a16:creationId xmlns:a16="http://schemas.microsoft.com/office/drawing/2014/main" id="{862149C5-A7CE-5D95-2698-C92B9E387C65}"/>
+                  </a:ext>
+                </a:extLst>
+              </p:cNvPr>
+              <p:cNvGraphicFramePr>
+                <a:graphicFrameLocks noGrp="1"/>
+              </p:cNvGraphicFramePr>
+              <p:nvPr>
+                <p:extLst>
+                  <p:ext uri="{D42A27DB-BD31-4B8C-83A1-F6EECF244321}">
+                    <p14:modId xmlns:p14="http://schemas.microsoft.com/office/powerpoint/2010/main" val="411337264"/>
+                  </p:ext>
+                </p:extLst>
+              </p:nvPr>
+            </p:nvGraphicFramePr>
+            <p:xfrm>
+              <a:off x="7185915" y="3089239"/>
+              <a:ext cx="1684594" cy="1984208"/>
+            </p:xfrm>
+            <a:graphic>
+              <a:graphicData uri="http://schemas.openxmlformats.org/drawingml/2006/table">
+                <a:tbl>
+                  <a:tblPr firstRow="1" bandRow="1">
+                    <a:tableStyleId>{5C22544A-7EE6-4342-B048-85BDC9FD1C3A}</a:tableStyleId>
+                  </a:tblPr>
+                  <a:tblGrid>
+                    <a:gridCol w="1684594">
+                      <a:extLst>
+                        <a:ext uri="{9D8B030D-6E8A-4147-A177-3AD203B41FA5}">
+                          <a16:colId xmlns:a16="http://schemas.microsoft.com/office/drawing/2014/main" val="2079826288"/>
+                        </a:ext>
+                      </a:extLst>
+                    </a:gridCol>
+                  </a:tblGrid>
+                  <a:tr h="496052">
+                    <a:tc>
+                      <a:txBody>
+                        <a:bodyPr/>
+                        <a:lstStyle/>
+                        <a:p>
+                          <a:endParaRPr lang="en-US"/>
+                        </a:p>
+                      </a:txBody>
+                      <a:tcPr>
+                        <a:lnL w="12700" cap="flat" cmpd="sng" algn="ctr">
+                          <a:solidFill>
+                            <a:schemeClr val="tx1"/>
+                          </a:solidFill>
+                          <a:prstDash val="solid"/>
+                          <a:round/>
+                          <a:headEnd type="none" w="med" len="med"/>
+                          <a:tailEnd type="none" w="med" len="med"/>
+                        </a:lnL>
+                        <a:lnR w="12700" cap="flat" cmpd="sng" algn="ctr">
+                          <a:solidFill>
+                            <a:schemeClr val="tx1"/>
+                          </a:solidFill>
+                          <a:prstDash val="solid"/>
+                          <a:round/>
+                          <a:headEnd type="none" w="med" len="med"/>
+                          <a:tailEnd type="none" w="med" len="med"/>
+                        </a:lnR>
+                        <a:lnT w="12700" cap="flat" cmpd="sng" algn="ctr">
+                          <a:solidFill>
+                            <a:schemeClr val="tx1"/>
+                          </a:solidFill>
+                          <a:prstDash val="solid"/>
+                          <a:round/>
+                          <a:headEnd type="none" w="med" len="med"/>
+                          <a:tailEnd type="none" w="med" len="med"/>
+                        </a:lnT>
+                        <a:lnB w="12700" cap="flat" cmpd="sng" algn="ctr">
+                          <a:solidFill>
+                            <a:schemeClr val="tx1"/>
+                          </a:solidFill>
+                          <a:prstDash val="solid"/>
+                          <a:round/>
+                          <a:headEnd type="none" w="med" len="med"/>
+                          <a:tailEnd type="none" w="med" len="med"/>
+                        </a:lnB>
+                        <a:lnTlToBr w="12700" cmpd="sng">
+                          <a:noFill/>
+                          <a:prstDash val="solid"/>
+                        </a:lnTlToBr>
+                        <a:lnBlToTr w="12700" cmpd="sng">
+                          <a:noFill/>
+                          <a:prstDash val="solid"/>
+                        </a:lnBlToTr>
+                        <a:blipFill>
+                          <a:blip r:embed="rId7"/>
+                          <a:stretch>
+                            <a:fillRect l="-360" t="-1220" r="-719" b="-301220"/>
+                          </a:stretch>
+                        </a:blipFill>
+                      </a:tcPr>
+                    </a:tc>
+                    <a:extLst>
+                      <a:ext uri="{0D108BD9-81ED-4DB2-BD59-A6C34878D82A}">
+                        <a16:rowId xmlns:a16="http://schemas.microsoft.com/office/drawing/2014/main" val="3349285775"/>
+                      </a:ext>
+                    </a:extLst>
+                  </a:tr>
+                  <a:tr h="496052">
+                    <a:tc>
+                      <a:txBody>
+                        <a:bodyPr/>
+                        <a:lstStyle/>
+                        <a:p>
+                          <a:endParaRPr lang="en-US"/>
+                        </a:p>
+                      </a:txBody>
+                      <a:tcPr>
+                        <a:lnL w="12700" cap="flat" cmpd="sng" algn="ctr">
+                          <a:solidFill>
+                            <a:schemeClr val="tx1"/>
+                          </a:solidFill>
+                          <a:prstDash val="solid"/>
+                          <a:round/>
+                          <a:headEnd type="none" w="med" len="med"/>
+                          <a:tailEnd type="none" w="med" len="med"/>
+                        </a:lnL>
+                        <a:lnR w="12700" cap="flat" cmpd="sng" algn="ctr">
+                          <a:solidFill>
+                            <a:schemeClr val="tx1"/>
+                          </a:solidFill>
+                          <a:prstDash val="solid"/>
+                          <a:round/>
+                          <a:headEnd type="none" w="med" len="med"/>
+                          <a:tailEnd type="none" w="med" len="med"/>
+                        </a:lnR>
+                        <a:lnT w="12700" cap="flat" cmpd="sng" algn="ctr">
+                          <a:solidFill>
+                            <a:schemeClr val="tx1"/>
+                          </a:solidFill>
+                          <a:prstDash val="solid"/>
+                          <a:round/>
+                          <a:headEnd type="none" w="med" len="med"/>
+                          <a:tailEnd type="none" w="med" len="med"/>
+                        </a:lnT>
+                        <a:lnB w="12700" cap="flat" cmpd="sng" algn="ctr">
+                          <a:solidFill>
+                            <a:schemeClr val="tx1"/>
+                          </a:solidFill>
+                          <a:prstDash val="solid"/>
+                          <a:round/>
+                          <a:headEnd type="none" w="med" len="med"/>
+                          <a:tailEnd type="none" w="med" len="med"/>
+                        </a:lnB>
+                        <a:lnTlToBr w="12700" cmpd="sng">
+                          <a:noFill/>
+                          <a:prstDash val="solid"/>
+                        </a:lnTlToBr>
+                        <a:lnBlToTr w="12700" cmpd="sng">
+                          <a:noFill/>
+                          <a:prstDash val="solid"/>
+                        </a:lnBlToTr>
+                        <a:blipFill>
+                          <a:blip r:embed="rId7"/>
+                          <a:stretch>
+                            <a:fillRect l="-360" t="-101220" r="-719" b="-201220"/>
+                          </a:stretch>
+                        </a:blipFill>
+                      </a:tcPr>
+                    </a:tc>
+                    <a:extLst>
+                      <a:ext uri="{0D108BD9-81ED-4DB2-BD59-A6C34878D82A}">
+                        <a16:rowId xmlns:a16="http://schemas.microsoft.com/office/drawing/2014/main" val="4231577802"/>
+                      </a:ext>
+                    </a:extLst>
+                  </a:tr>
+                  <a:tr h="496052">
+                    <a:tc>
+                      <a:txBody>
+                        <a:bodyPr/>
+                        <a:lstStyle/>
+                        <a:p>
+                          <a:endParaRPr lang="en-US"/>
+                        </a:p>
+                      </a:txBody>
+                      <a:tcPr>
+                        <a:lnL w="12700" cap="flat" cmpd="sng" algn="ctr">
+                          <a:solidFill>
+                            <a:schemeClr val="tx1"/>
+                          </a:solidFill>
+                          <a:prstDash val="solid"/>
+                          <a:round/>
+                          <a:headEnd type="none" w="med" len="med"/>
+                          <a:tailEnd type="none" w="med" len="med"/>
+                        </a:lnL>
+                        <a:lnR w="12700" cap="flat" cmpd="sng" algn="ctr">
+                          <a:solidFill>
+                            <a:schemeClr val="tx1"/>
+                          </a:solidFill>
+                          <a:prstDash val="solid"/>
+                          <a:round/>
+                          <a:headEnd type="none" w="med" len="med"/>
+                          <a:tailEnd type="none" w="med" len="med"/>
+                        </a:lnR>
+                        <a:lnT w="12700" cap="flat" cmpd="sng" algn="ctr">
+                          <a:solidFill>
+                            <a:schemeClr val="tx1"/>
+                          </a:solidFill>
+                          <a:prstDash val="solid"/>
+                          <a:round/>
+                          <a:headEnd type="none" w="med" len="med"/>
+                          <a:tailEnd type="none" w="med" len="med"/>
+                        </a:lnT>
+                        <a:lnB w="12700" cap="flat" cmpd="sng" algn="ctr">
+                          <a:solidFill>
+                            <a:schemeClr val="tx1"/>
+                          </a:solidFill>
+                          <a:prstDash val="solid"/>
+                          <a:round/>
+                          <a:headEnd type="none" w="med" len="med"/>
+                          <a:tailEnd type="none" w="med" len="med"/>
+                        </a:lnB>
+                        <a:lnTlToBr w="12700" cmpd="sng">
+                          <a:noFill/>
+                          <a:prstDash val="solid"/>
+                        </a:lnTlToBr>
+                        <a:lnBlToTr w="12700" cmpd="sng">
+                          <a:noFill/>
+                          <a:prstDash val="solid"/>
+                        </a:lnBlToTr>
+                        <a:blipFill>
+                          <a:blip r:embed="rId7"/>
+                          <a:stretch>
+                            <a:fillRect l="-360" t="-203704" r="-719" b="-103704"/>
+                          </a:stretch>
+                        </a:blipFill>
+                      </a:tcPr>
+                    </a:tc>
+                    <a:extLst>
+                      <a:ext uri="{0D108BD9-81ED-4DB2-BD59-A6C34878D82A}">
+                        <a16:rowId xmlns:a16="http://schemas.microsoft.com/office/drawing/2014/main" val="1450664255"/>
+                      </a:ext>
+                    </a:extLst>
+                  </a:tr>
+                  <a:tr h="496052">
+                    <a:tc>
+                      <a:txBody>
+                        <a:bodyPr/>
+                        <a:lstStyle/>
+                        <a:p>
+                          <a:endParaRPr lang="en-US"/>
+                        </a:p>
+                      </a:txBody>
+                      <a:tcPr>
+                        <a:lnL w="12700" cap="flat" cmpd="sng" algn="ctr">
+                          <a:solidFill>
+                            <a:schemeClr val="tx1"/>
+                          </a:solidFill>
+                          <a:prstDash val="solid"/>
+                          <a:round/>
+                          <a:headEnd type="none" w="med" len="med"/>
+                          <a:tailEnd type="none" w="med" len="med"/>
+                        </a:lnL>
+                        <a:lnR w="12700" cap="flat" cmpd="sng" algn="ctr">
+                          <a:solidFill>
+                            <a:schemeClr val="tx1"/>
+                          </a:solidFill>
+                          <a:prstDash val="solid"/>
+                          <a:round/>
+                          <a:headEnd type="none" w="med" len="med"/>
+                          <a:tailEnd type="none" w="med" len="med"/>
+                        </a:lnR>
+                        <a:lnT w="12700" cap="flat" cmpd="sng" algn="ctr">
+                          <a:solidFill>
+                            <a:schemeClr val="tx1"/>
+                          </a:solidFill>
+                          <a:prstDash val="solid"/>
+                          <a:round/>
+                          <a:headEnd type="none" w="med" len="med"/>
+                          <a:tailEnd type="none" w="med" len="med"/>
+                        </a:lnT>
+                        <a:lnB w="12700" cap="flat" cmpd="sng" algn="ctr">
+                          <a:solidFill>
+                            <a:schemeClr val="tx1"/>
+                          </a:solidFill>
+                          <a:prstDash val="solid"/>
+                          <a:round/>
+                          <a:headEnd type="none" w="med" len="med"/>
+                          <a:tailEnd type="none" w="med" len="med"/>
+                        </a:lnB>
+                        <a:lnTlToBr w="12700" cmpd="sng">
+                          <a:noFill/>
+                          <a:prstDash val="solid"/>
+                        </a:lnTlToBr>
+                        <a:lnBlToTr w="12700" cmpd="sng">
+                          <a:noFill/>
+                          <a:prstDash val="solid"/>
+                        </a:lnBlToTr>
+                        <a:blipFill>
+                          <a:blip r:embed="rId7"/>
+                          <a:stretch>
+                            <a:fillRect l="-360" t="-300000" r="-719" b="-2439"/>
+                          </a:stretch>
+                        </a:blipFill>
+                      </a:tcPr>
+                    </a:tc>
+                    <a:extLst>
+                      <a:ext uri="{0D108BD9-81ED-4DB2-BD59-A6C34878D82A}">
+                        <a16:rowId xmlns:a16="http://schemas.microsoft.com/office/drawing/2014/main" val="1780212582"/>
+                      </a:ext>
+                    </a:extLst>
+                  </a:tr>
+                </a:tbl>
+              </a:graphicData>
+            </a:graphic>
+          </p:graphicFrame>
+        </mc:Fallback>
+      </mc:AlternateContent>
+      <mc:AlternateContent xmlns:mc="http://schemas.openxmlformats.org/markup-compatibility/2006">
+        <mc:Choice xmlns:a14="http://schemas.microsoft.com/office/drawing/2010/main" Requires="a14">
+          <p:graphicFrame>
+            <p:nvGraphicFramePr>
+              <p:cNvPr id="15" name="Table 14">
+                <a:extLst>
+                  <a:ext uri="{FF2B5EF4-FFF2-40B4-BE49-F238E27FC236}">
+                    <a16:creationId xmlns:a16="http://schemas.microsoft.com/office/drawing/2014/main" id="{81EA60BA-2479-BF02-3BCC-68C8AC03DC07}"/>
+                  </a:ext>
+                </a:extLst>
+              </p:cNvPr>
+              <p:cNvGraphicFramePr>
+                <a:graphicFrameLocks noGrp="1"/>
+              </p:cNvGraphicFramePr>
+              <p:nvPr>
+                <p:extLst>
+                  <p:ext uri="{D42A27DB-BD31-4B8C-83A1-F6EECF244321}">
+                    <p14:modId xmlns:p14="http://schemas.microsoft.com/office/powerpoint/2010/main" val="3882056426"/>
+                  </p:ext>
+                </p:extLst>
+              </p:nvPr>
+            </p:nvGraphicFramePr>
+            <p:xfrm>
+              <a:off x="10032353" y="3089239"/>
+              <a:ext cx="1684594" cy="1984208"/>
+            </p:xfrm>
+            <a:graphic>
+              <a:graphicData uri="http://schemas.openxmlformats.org/drawingml/2006/table">
+                <a:tbl>
+                  <a:tblPr firstRow="1" bandRow="1">
+                    <a:tableStyleId>{5C22544A-7EE6-4342-B048-85BDC9FD1C3A}</a:tableStyleId>
+                  </a:tblPr>
+                  <a:tblGrid>
+                    <a:gridCol w="1684594">
+                      <a:extLst>
+                        <a:ext uri="{9D8B030D-6E8A-4147-A177-3AD203B41FA5}">
+                          <a16:colId xmlns:a16="http://schemas.microsoft.com/office/drawing/2014/main" val="2079826288"/>
+                        </a:ext>
+                      </a:extLst>
+                    </a:gridCol>
+                  </a:tblGrid>
+                  <a:tr h="496052">
+                    <a:tc>
+                      <a:txBody>
+                        <a:bodyPr/>
+                        <a:lstStyle/>
+                        <a:p>
+                          <a:pPr/>
+                          <a14:m>
+                            <m:oMathPara xmlns:m="http://schemas.openxmlformats.org/officeDocument/2006/math">
+                              <m:oMathParaPr>
+                                <m:jc m:val="centerGroup"/>
+                              </m:oMathParaPr>
+                              <m:oMath xmlns:m="http://schemas.openxmlformats.org/officeDocument/2006/math">
+                                <m:sSub>
+                                  <m:sSubPr>
+                                    <m:ctrlPr>
+                                      <a:rPr lang="en-US" i="1" smtClean="0">
+                                        <a:solidFill>
+                                          <a:schemeClr val="tx1"/>
+                                        </a:solidFill>
+                                        <a:latin typeface="Cambria Math" panose="02040503050406030204" pitchFamily="18" charset="0"/>
+                                      </a:rPr>
+                                    </m:ctrlPr>
+                                  </m:sSubPr>
+                                  <m:e>
+                                    <m:r>
+                                      <a:rPr lang="en-US" b="1" i="1" smtClean="0">
+                                        <a:solidFill>
+                                          <a:schemeClr val="tx1"/>
+                                        </a:solidFill>
+                                        <a:latin typeface="Cambria Math" panose="02040503050406030204" pitchFamily="18" charset="0"/>
+                                      </a:rPr>
+                                      <m:t>𝒃</m:t>
+                                    </m:r>
+                                  </m:e>
+                                  <m:sub>
+                                    <m:r>
+                                      <a:rPr lang="en-US" b="1" i="1" smtClean="0">
+                                        <a:solidFill>
+                                          <a:schemeClr val="tx1"/>
+                                        </a:solidFill>
+                                        <a:latin typeface="Cambria Math" panose="02040503050406030204" pitchFamily="18" charset="0"/>
+                                      </a:rPr>
+                                      <m:t>𝟏</m:t>
+                                    </m:r>
+                                  </m:sub>
+                                </m:sSub>
+                              </m:oMath>
+                            </m:oMathPara>
+                          </a14:m>
+                          <a:endParaRPr lang="en-US" dirty="0"/>
+                        </a:p>
+                      </a:txBody>
+                      <a:tcPr>
+                        <a:lnL w="12700" cap="flat" cmpd="sng" algn="ctr">
+                          <a:solidFill>
+                            <a:schemeClr val="tx1"/>
+                          </a:solidFill>
+                          <a:prstDash val="solid"/>
+                          <a:round/>
+                          <a:headEnd type="none" w="med" len="med"/>
+                          <a:tailEnd type="none" w="med" len="med"/>
+                        </a:lnL>
+                        <a:lnR w="12700" cap="flat" cmpd="sng" algn="ctr">
+                          <a:solidFill>
+                            <a:schemeClr val="tx1"/>
+                          </a:solidFill>
+                          <a:prstDash val="solid"/>
+                          <a:round/>
+                          <a:headEnd type="none" w="med" len="med"/>
+                          <a:tailEnd type="none" w="med" len="med"/>
+                        </a:lnR>
+                        <a:lnT w="12700" cap="flat" cmpd="sng" algn="ctr">
+                          <a:solidFill>
+                            <a:schemeClr val="tx1"/>
+                          </a:solidFill>
+                          <a:prstDash val="solid"/>
+                          <a:round/>
+                          <a:headEnd type="none" w="med" len="med"/>
+                          <a:tailEnd type="none" w="med" len="med"/>
+                        </a:lnT>
+                        <a:lnB w="12700" cap="flat" cmpd="sng" algn="ctr">
+                          <a:solidFill>
+                            <a:schemeClr val="tx1"/>
+                          </a:solidFill>
+                          <a:prstDash val="solid"/>
+                          <a:round/>
+                          <a:headEnd type="none" w="med" len="med"/>
+                          <a:tailEnd type="none" w="med" len="med"/>
+                        </a:lnB>
+                        <a:lnTlToBr w="12700" cmpd="sng">
+                          <a:noFill/>
+                          <a:prstDash val="solid"/>
+                        </a:lnTlToBr>
+                        <a:lnBlToTr w="12700" cmpd="sng">
+                          <a:noFill/>
+                          <a:prstDash val="solid"/>
+                        </a:lnBlToTr>
+                        <a:solidFill>
+                          <a:schemeClr val="bg1"/>
+                        </a:solidFill>
+                      </a:tcPr>
+                    </a:tc>
+                    <a:extLst>
+                      <a:ext uri="{0D108BD9-81ED-4DB2-BD59-A6C34878D82A}">
+                        <a16:rowId xmlns:a16="http://schemas.microsoft.com/office/drawing/2014/main" val="3349285775"/>
+                      </a:ext>
+                    </a:extLst>
+                  </a:tr>
+                  <a:tr h="496052">
+                    <a:tc>
+                      <a:txBody>
+                        <a:bodyPr/>
+                        <a:lstStyle/>
+                        <a:p>
+                          <a:pPr/>
+                          <a14:m>
+                            <m:oMathPara xmlns:m="http://schemas.openxmlformats.org/officeDocument/2006/math">
+                              <m:oMathParaPr>
+                                <m:jc m:val="centerGroup"/>
+                              </m:oMathParaPr>
+                              <m:oMath xmlns:m="http://schemas.openxmlformats.org/officeDocument/2006/math">
+                                <m:sSub>
+                                  <m:sSubPr>
+                                    <m:ctrlPr>
+                                      <a:rPr lang="en-US" i="1" smtClean="0">
+                                        <a:solidFill>
+                                          <a:schemeClr val="tx1"/>
+                                        </a:solidFill>
+                                        <a:latin typeface="Cambria Math" panose="02040503050406030204" pitchFamily="18" charset="0"/>
+                                      </a:rPr>
+                                    </m:ctrlPr>
+                                  </m:sSubPr>
+                                  <m:e>
+                                    <m:r>
+                                      <a:rPr lang="en-US" b="1" i="1" smtClean="0">
+                                        <a:solidFill>
+                                          <a:schemeClr val="tx1"/>
+                                        </a:solidFill>
+                                        <a:latin typeface="Cambria Math" panose="02040503050406030204" pitchFamily="18" charset="0"/>
+                                      </a:rPr>
+                                      <m:t>𝒃</m:t>
+                                    </m:r>
+                                  </m:e>
+                                  <m:sub>
+                                    <m:r>
+                                      <a:rPr lang="en-US" b="1" i="1" smtClean="0">
+                                        <a:solidFill>
+                                          <a:schemeClr val="tx1"/>
+                                        </a:solidFill>
+                                        <a:latin typeface="Cambria Math" panose="02040503050406030204" pitchFamily="18" charset="0"/>
+                                      </a:rPr>
+                                      <m:t>𝟐</m:t>
+                                    </m:r>
+                                  </m:sub>
+                                </m:sSub>
+                              </m:oMath>
+                            </m:oMathPara>
+                          </a14:m>
+                          <a:endParaRPr lang="en-US" dirty="0"/>
+                        </a:p>
+                      </a:txBody>
+                      <a:tcPr>
+                        <a:lnL w="12700" cap="flat" cmpd="sng" algn="ctr">
+                          <a:solidFill>
+                            <a:schemeClr val="tx1"/>
+                          </a:solidFill>
+                          <a:prstDash val="solid"/>
+                          <a:round/>
+                          <a:headEnd type="none" w="med" len="med"/>
+                          <a:tailEnd type="none" w="med" len="med"/>
+                        </a:lnL>
+                        <a:lnR w="12700" cap="flat" cmpd="sng" algn="ctr">
+                          <a:solidFill>
+                            <a:schemeClr val="tx1"/>
+                          </a:solidFill>
+                          <a:prstDash val="solid"/>
+                          <a:round/>
+                          <a:headEnd type="none" w="med" len="med"/>
+                          <a:tailEnd type="none" w="med" len="med"/>
+                        </a:lnR>
+                        <a:lnT w="12700" cap="flat" cmpd="sng" algn="ctr">
+                          <a:solidFill>
+                            <a:schemeClr val="tx1"/>
+                          </a:solidFill>
+                          <a:prstDash val="solid"/>
+                          <a:round/>
+                          <a:headEnd type="none" w="med" len="med"/>
+                          <a:tailEnd type="none" w="med" len="med"/>
+                        </a:lnT>
+                        <a:lnB w="12700" cap="flat" cmpd="sng" algn="ctr">
+                          <a:solidFill>
+                            <a:schemeClr val="tx1"/>
+                          </a:solidFill>
+                          <a:prstDash val="solid"/>
+                          <a:round/>
+                          <a:headEnd type="none" w="med" len="med"/>
+                          <a:tailEnd type="none" w="med" len="med"/>
+                        </a:lnB>
+                        <a:lnTlToBr w="12700" cmpd="sng">
+                          <a:noFill/>
+                          <a:prstDash val="solid"/>
+                        </a:lnTlToBr>
+                        <a:lnBlToTr w="12700" cmpd="sng">
+                          <a:noFill/>
+                          <a:prstDash val="solid"/>
+                        </a:lnBlToTr>
+                        <a:solidFill>
+                          <a:schemeClr val="bg1"/>
+                        </a:solidFill>
+                      </a:tcPr>
+                    </a:tc>
+                    <a:extLst>
+                      <a:ext uri="{0D108BD9-81ED-4DB2-BD59-A6C34878D82A}">
+                        <a16:rowId xmlns:a16="http://schemas.microsoft.com/office/drawing/2014/main" val="4231577802"/>
+                      </a:ext>
+                    </a:extLst>
+                  </a:tr>
+                  <a:tr h="496052">
+                    <a:tc>
+                      <a:txBody>
+                        <a:bodyPr/>
+                        <a:lstStyle/>
+                        <a:p>
+                          <a:pPr/>
+                          <a14:m>
+                            <m:oMathPara xmlns:m="http://schemas.openxmlformats.org/officeDocument/2006/math">
+                              <m:oMathParaPr>
+                                <m:jc m:val="centerGroup"/>
+                              </m:oMathParaPr>
+                              <m:oMath xmlns:m="http://schemas.openxmlformats.org/officeDocument/2006/math">
+                                <m:sSub>
+                                  <m:sSubPr>
+                                    <m:ctrlPr>
+                                      <a:rPr lang="en-US" i="1" smtClean="0">
+                                        <a:solidFill>
+                                          <a:schemeClr val="tx1"/>
+                                        </a:solidFill>
+                                        <a:latin typeface="Cambria Math" panose="02040503050406030204" pitchFamily="18" charset="0"/>
+                                      </a:rPr>
+                                    </m:ctrlPr>
+                                  </m:sSubPr>
+                                  <m:e>
+                                    <m:r>
+                                      <a:rPr lang="en-US" b="1" i="1" smtClean="0">
+                                        <a:solidFill>
+                                          <a:schemeClr val="tx1"/>
+                                        </a:solidFill>
+                                        <a:latin typeface="Cambria Math" panose="02040503050406030204" pitchFamily="18" charset="0"/>
+                                      </a:rPr>
+                                      <m:t>𝒃</m:t>
+                                    </m:r>
+                                  </m:e>
+                                  <m:sub>
+                                    <m:r>
+                                      <a:rPr lang="en-US" b="1" i="1" smtClean="0">
+                                        <a:solidFill>
+                                          <a:schemeClr val="tx1"/>
+                                        </a:solidFill>
+                                        <a:latin typeface="Cambria Math" panose="02040503050406030204" pitchFamily="18" charset="0"/>
+                                      </a:rPr>
+                                      <m:t>𝟑</m:t>
+                                    </m:r>
+                                  </m:sub>
+                                </m:sSub>
+                              </m:oMath>
+                            </m:oMathPara>
+                          </a14:m>
+                          <a:endParaRPr lang="en-US" dirty="0"/>
+                        </a:p>
+                      </a:txBody>
+                      <a:tcPr>
+                        <a:lnL w="12700" cap="flat" cmpd="sng" algn="ctr">
+                          <a:solidFill>
+                            <a:schemeClr val="tx1"/>
+                          </a:solidFill>
+                          <a:prstDash val="solid"/>
+                          <a:round/>
+                          <a:headEnd type="none" w="med" len="med"/>
+                          <a:tailEnd type="none" w="med" len="med"/>
+                        </a:lnL>
+                        <a:lnR w="12700" cap="flat" cmpd="sng" algn="ctr">
+                          <a:solidFill>
+                            <a:schemeClr val="tx1"/>
+                          </a:solidFill>
+                          <a:prstDash val="solid"/>
+                          <a:round/>
+                          <a:headEnd type="none" w="med" len="med"/>
+                          <a:tailEnd type="none" w="med" len="med"/>
+                        </a:lnR>
+                        <a:lnT w="12700" cap="flat" cmpd="sng" algn="ctr">
+                          <a:solidFill>
+                            <a:schemeClr val="tx1"/>
+                          </a:solidFill>
+                          <a:prstDash val="solid"/>
+                          <a:round/>
+                          <a:headEnd type="none" w="med" len="med"/>
+                          <a:tailEnd type="none" w="med" len="med"/>
+                        </a:lnT>
+                        <a:lnB w="12700" cap="flat" cmpd="sng" algn="ctr">
+                          <a:solidFill>
+                            <a:schemeClr val="tx1"/>
+                          </a:solidFill>
+                          <a:prstDash val="solid"/>
+                          <a:round/>
+                          <a:headEnd type="none" w="med" len="med"/>
+                          <a:tailEnd type="none" w="med" len="med"/>
+                        </a:lnB>
+                        <a:lnTlToBr w="12700" cmpd="sng">
+                          <a:noFill/>
+                          <a:prstDash val="solid"/>
+                        </a:lnTlToBr>
+                        <a:lnBlToTr w="12700" cmpd="sng">
+                          <a:noFill/>
+                          <a:prstDash val="solid"/>
+                        </a:lnBlToTr>
+                        <a:solidFill>
+                          <a:schemeClr val="bg1"/>
+                        </a:solidFill>
+                      </a:tcPr>
+                    </a:tc>
+                    <a:extLst>
+                      <a:ext uri="{0D108BD9-81ED-4DB2-BD59-A6C34878D82A}">
+                        <a16:rowId xmlns:a16="http://schemas.microsoft.com/office/drawing/2014/main" val="1450664255"/>
+                      </a:ext>
+                    </a:extLst>
+                  </a:tr>
+                  <a:tr h="496052">
+                    <a:tc>
+                      <a:txBody>
+                        <a:bodyPr/>
+                        <a:lstStyle/>
+                        <a:p>
+                          <a:pPr/>
+                          <a14:m>
+                            <m:oMathPara xmlns:m="http://schemas.openxmlformats.org/officeDocument/2006/math">
+                              <m:oMathParaPr>
+                                <m:jc m:val="centerGroup"/>
+                              </m:oMathParaPr>
+                              <m:oMath xmlns:m="http://schemas.openxmlformats.org/officeDocument/2006/math">
+                                <m:sSub>
+                                  <m:sSubPr>
+                                    <m:ctrlPr>
+                                      <a:rPr lang="en-US" i="1" smtClean="0">
+                                        <a:solidFill>
+                                          <a:schemeClr val="tx1"/>
+                                        </a:solidFill>
+                                        <a:latin typeface="Cambria Math" panose="02040503050406030204" pitchFamily="18" charset="0"/>
+                                      </a:rPr>
+                                    </m:ctrlPr>
+                                  </m:sSubPr>
+                                  <m:e>
+                                    <m:r>
+                                      <a:rPr lang="en-US" b="1" i="1" smtClean="0">
+                                        <a:solidFill>
+                                          <a:schemeClr val="tx1"/>
+                                        </a:solidFill>
+                                        <a:latin typeface="Cambria Math" panose="02040503050406030204" pitchFamily="18" charset="0"/>
+                                      </a:rPr>
+                                      <m:t>𝒃</m:t>
+                                    </m:r>
+                                  </m:e>
+                                  <m:sub>
+                                    <m:r>
+                                      <a:rPr lang="en-US" b="1" i="1" smtClean="0">
+                                        <a:solidFill>
+                                          <a:schemeClr val="tx1"/>
+                                        </a:solidFill>
+                                        <a:latin typeface="Cambria Math" panose="02040503050406030204" pitchFamily="18" charset="0"/>
+                                      </a:rPr>
+                                      <m:t>𝟒</m:t>
+                                    </m:r>
+                                  </m:sub>
+                                </m:sSub>
+                              </m:oMath>
+                            </m:oMathPara>
+                          </a14:m>
+                          <a:endParaRPr lang="en-US" dirty="0"/>
+                        </a:p>
+                      </a:txBody>
+                      <a:tcPr>
+                        <a:lnL w="12700" cap="flat" cmpd="sng" algn="ctr">
+                          <a:solidFill>
+                            <a:schemeClr val="tx1"/>
+                          </a:solidFill>
+                          <a:prstDash val="solid"/>
+                          <a:round/>
+                          <a:headEnd type="none" w="med" len="med"/>
+                          <a:tailEnd type="none" w="med" len="med"/>
+                        </a:lnL>
+                        <a:lnR w="12700" cap="flat" cmpd="sng" algn="ctr">
+                          <a:solidFill>
+                            <a:schemeClr val="tx1"/>
+                          </a:solidFill>
+                          <a:prstDash val="solid"/>
+                          <a:round/>
+                          <a:headEnd type="none" w="med" len="med"/>
+                          <a:tailEnd type="none" w="med" len="med"/>
+                        </a:lnR>
+                        <a:lnT w="12700" cap="flat" cmpd="sng" algn="ctr">
+                          <a:solidFill>
+                            <a:schemeClr val="tx1"/>
+                          </a:solidFill>
+                          <a:prstDash val="solid"/>
+                          <a:round/>
+                          <a:headEnd type="none" w="med" len="med"/>
+                          <a:tailEnd type="none" w="med" len="med"/>
+                        </a:lnT>
+                        <a:lnB w="12700" cap="flat" cmpd="sng" algn="ctr">
+                          <a:solidFill>
+                            <a:schemeClr val="tx1"/>
+                          </a:solidFill>
+                          <a:prstDash val="solid"/>
+                          <a:round/>
+                          <a:headEnd type="none" w="med" len="med"/>
+                          <a:tailEnd type="none" w="med" len="med"/>
+                        </a:lnB>
+                        <a:lnTlToBr w="12700" cmpd="sng">
+                          <a:noFill/>
+                          <a:prstDash val="solid"/>
+                        </a:lnTlToBr>
+                        <a:lnBlToTr w="12700" cmpd="sng">
+                          <a:noFill/>
+                          <a:prstDash val="solid"/>
+                        </a:lnBlToTr>
+                        <a:solidFill>
+                          <a:schemeClr val="bg1"/>
+                        </a:solidFill>
+                      </a:tcPr>
+                    </a:tc>
+                    <a:extLst>
+                      <a:ext uri="{0D108BD9-81ED-4DB2-BD59-A6C34878D82A}">
+                        <a16:rowId xmlns:a16="http://schemas.microsoft.com/office/drawing/2014/main" val="1780212582"/>
+                      </a:ext>
+                    </a:extLst>
+                  </a:tr>
+                </a:tbl>
+              </a:graphicData>
+            </a:graphic>
+          </p:graphicFrame>
+        </mc:Choice>
+        <mc:Fallback>
+          <p:graphicFrame>
+            <p:nvGraphicFramePr>
+              <p:cNvPr id="15" name="Table 14">
+                <a:extLst>
+                  <a:ext uri="{FF2B5EF4-FFF2-40B4-BE49-F238E27FC236}">
+                    <a16:creationId xmlns:a16="http://schemas.microsoft.com/office/drawing/2014/main" id="{81EA60BA-2479-BF02-3BCC-68C8AC03DC07}"/>
+                  </a:ext>
+                </a:extLst>
+              </p:cNvPr>
+              <p:cNvGraphicFramePr>
+                <a:graphicFrameLocks noGrp="1"/>
+              </p:cNvGraphicFramePr>
+              <p:nvPr>
+                <p:extLst>
+                  <p:ext uri="{D42A27DB-BD31-4B8C-83A1-F6EECF244321}">
+                    <p14:modId xmlns:p14="http://schemas.microsoft.com/office/powerpoint/2010/main" val="3882056426"/>
+                  </p:ext>
+                </p:extLst>
+              </p:nvPr>
+            </p:nvGraphicFramePr>
+            <p:xfrm>
+              <a:off x="10032353" y="3089239"/>
+              <a:ext cx="1684594" cy="1984208"/>
+            </p:xfrm>
+            <a:graphic>
+              <a:graphicData uri="http://schemas.openxmlformats.org/drawingml/2006/table">
+                <a:tbl>
+                  <a:tblPr firstRow="1" bandRow="1">
+                    <a:tableStyleId>{5C22544A-7EE6-4342-B048-85BDC9FD1C3A}</a:tableStyleId>
+                  </a:tblPr>
+                  <a:tblGrid>
+                    <a:gridCol w="1684594">
+                      <a:extLst>
+                        <a:ext uri="{9D8B030D-6E8A-4147-A177-3AD203B41FA5}">
+                          <a16:colId xmlns:a16="http://schemas.microsoft.com/office/drawing/2014/main" val="2079826288"/>
+                        </a:ext>
+                      </a:extLst>
+                    </a:gridCol>
+                  </a:tblGrid>
+                  <a:tr h="496052">
+                    <a:tc>
+                      <a:txBody>
+                        <a:bodyPr/>
+                        <a:lstStyle/>
+                        <a:p>
+                          <a:endParaRPr lang="en-US"/>
+                        </a:p>
+                      </a:txBody>
+                      <a:tcPr>
+                        <a:lnL w="12700" cap="flat" cmpd="sng" algn="ctr">
+                          <a:solidFill>
+                            <a:schemeClr val="tx1"/>
+                          </a:solidFill>
+                          <a:prstDash val="solid"/>
+                          <a:round/>
+                          <a:headEnd type="none" w="med" len="med"/>
+                          <a:tailEnd type="none" w="med" len="med"/>
+                        </a:lnL>
+                        <a:lnR w="12700" cap="flat" cmpd="sng" algn="ctr">
+                          <a:solidFill>
+                            <a:schemeClr val="tx1"/>
+                          </a:solidFill>
+                          <a:prstDash val="solid"/>
+                          <a:round/>
+                          <a:headEnd type="none" w="med" len="med"/>
+                          <a:tailEnd type="none" w="med" len="med"/>
+                        </a:lnR>
+                        <a:lnT w="12700" cap="flat" cmpd="sng" algn="ctr">
+                          <a:solidFill>
+                            <a:schemeClr val="tx1"/>
+                          </a:solidFill>
+                          <a:prstDash val="solid"/>
+                          <a:round/>
+                          <a:headEnd type="none" w="med" len="med"/>
+                          <a:tailEnd type="none" w="med" len="med"/>
+                        </a:lnT>
+                        <a:lnB w="12700" cap="flat" cmpd="sng" algn="ctr">
+                          <a:solidFill>
+                            <a:schemeClr val="tx1"/>
+                          </a:solidFill>
+                          <a:prstDash val="solid"/>
+                          <a:round/>
+                          <a:headEnd type="none" w="med" len="med"/>
+                          <a:tailEnd type="none" w="med" len="med"/>
+                        </a:lnB>
+                        <a:lnTlToBr w="12700" cmpd="sng">
+                          <a:noFill/>
+                          <a:prstDash val="solid"/>
+                        </a:lnTlToBr>
+                        <a:lnBlToTr w="12700" cmpd="sng">
+                          <a:noFill/>
+                          <a:prstDash val="solid"/>
+                        </a:lnBlToTr>
+                        <a:blipFill>
+                          <a:blip r:embed="rId8"/>
+                          <a:stretch>
+                            <a:fillRect l="-360" t="-1220" r="-719" b="-301220"/>
+                          </a:stretch>
+                        </a:blipFill>
+                      </a:tcPr>
+                    </a:tc>
+                    <a:extLst>
+                      <a:ext uri="{0D108BD9-81ED-4DB2-BD59-A6C34878D82A}">
+                        <a16:rowId xmlns:a16="http://schemas.microsoft.com/office/drawing/2014/main" val="3349285775"/>
+                      </a:ext>
+                    </a:extLst>
+                  </a:tr>
+                  <a:tr h="496052">
+                    <a:tc>
+                      <a:txBody>
+                        <a:bodyPr/>
+                        <a:lstStyle/>
+                        <a:p>
+                          <a:endParaRPr lang="en-US"/>
+                        </a:p>
+                      </a:txBody>
+                      <a:tcPr>
+                        <a:lnL w="12700" cap="flat" cmpd="sng" algn="ctr">
+                          <a:solidFill>
+                            <a:schemeClr val="tx1"/>
+                          </a:solidFill>
+                          <a:prstDash val="solid"/>
+                          <a:round/>
+                          <a:headEnd type="none" w="med" len="med"/>
+                          <a:tailEnd type="none" w="med" len="med"/>
+                        </a:lnL>
+                        <a:lnR w="12700" cap="flat" cmpd="sng" algn="ctr">
+                          <a:solidFill>
+                            <a:schemeClr val="tx1"/>
+                          </a:solidFill>
+                          <a:prstDash val="solid"/>
+                          <a:round/>
+                          <a:headEnd type="none" w="med" len="med"/>
+                          <a:tailEnd type="none" w="med" len="med"/>
+                        </a:lnR>
+                        <a:lnT w="12700" cap="flat" cmpd="sng" algn="ctr">
+                          <a:solidFill>
+                            <a:schemeClr val="tx1"/>
+                          </a:solidFill>
+                          <a:prstDash val="solid"/>
+                          <a:round/>
+                          <a:headEnd type="none" w="med" len="med"/>
+                          <a:tailEnd type="none" w="med" len="med"/>
+                        </a:lnT>
+                        <a:lnB w="12700" cap="flat" cmpd="sng" algn="ctr">
+                          <a:solidFill>
+                            <a:schemeClr val="tx1"/>
+                          </a:solidFill>
+                          <a:prstDash val="solid"/>
+                          <a:round/>
+                          <a:headEnd type="none" w="med" len="med"/>
+                          <a:tailEnd type="none" w="med" len="med"/>
+                        </a:lnB>
+                        <a:lnTlToBr w="12700" cmpd="sng">
+                          <a:noFill/>
+                          <a:prstDash val="solid"/>
+                        </a:lnTlToBr>
+                        <a:lnBlToTr w="12700" cmpd="sng">
+                          <a:noFill/>
+                          <a:prstDash val="solid"/>
+                        </a:lnBlToTr>
+                        <a:blipFill>
+                          <a:blip r:embed="rId8"/>
+                          <a:stretch>
+                            <a:fillRect l="-360" t="-101220" r="-719" b="-201220"/>
+                          </a:stretch>
+                        </a:blipFill>
+                      </a:tcPr>
+                    </a:tc>
+                    <a:extLst>
+                      <a:ext uri="{0D108BD9-81ED-4DB2-BD59-A6C34878D82A}">
+                        <a16:rowId xmlns:a16="http://schemas.microsoft.com/office/drawing/2014/main" val="4231577802"/>
+                      </a:ext>
+                    </a:extLst>
+                  </a:tr>
+                  <a:tr h="496052">
+                    <a:tc>
+                      <a:txBody>
+                        <a:bodyPr/>
+                        <a:lstStyle/>
+                        <a:p>
+                          <a:endParaRPr lang="en-US"/>
+                        </a:p>
+                      </a:txBody>
+                      <a:tcPr>
+                        <a:lnL w="12700" cap="flat" cmpd="sng" algn="ctr">
+                          <a:solidFill>
+                            <a:schemeClr val="tx1"/>
+                          </a:solidFill>
+                          <a:prstDash val="solid"/>
+                          <a:round/>
+                          <a:headEnd type="none" w="med" len="med"/>
+                          <a:tailEnd type="none" w="med" len="med"/>
+                        </a:lnL>
+                        <a:lnR w="12700" cap="flat" cmpd="sng" algn="ctr">
+                          <a:solidFill>
+                            <a:schemeClr val="tx1"/>
+                          </a:solidFill>
+                          <a:prstDash val="solid"/>
+                          <a:round/>
+                          <a:headEnd type="none" w="med" len="med"/>
+                          <a:tailEnd type="none" w="med" len="med"/>
+                        </a:lnR>
+                        <a:lnT w="12700" cap="flat" cmpd="sng" algn="ctr">
+                          <a:solidFill>
+                            <a:schemeClr val="tx1"/>
+                          </a:solidFill>
+                          <a:prstDash val="solid"/>
+                          <a:round/>
+                          <a:headEnd type="none" w="med" len="med"/>
+                          <a:tailEnd type="none" w="med" len="med"/>
+                        </a:lnT>
+                        <a:lnB w="12700" cap="flat" cmpd="sng" algn="ctr">
+                          <a:solidFill>
+                            <a:schemeClr val="tx1"/>
+                          </a:solidFill>
+                          <a:prstDash val="solid"/>
+                          <a:round/>
+                          <a:headEnd type="none" w="med" len="med"/>
+                          <a:tailEnd type="none" w="med" len="med"/>
+                        </a:lnB>
+                        <a:lnTlToBr w="12700" cmpd="sng">
+                          <a:noFill/>
+                          <a:prstDash val="solid"/>
+                        </a:lnTlToBr>
+                        <a:lnBlToTr w="12700" cmpd="sng">
+                          <a:noFill/>
+                          <a:prstDash val="solid"/>
+                        </a:lnBlToTr>
+                        <a:blipFill>
+                          <a:blip r:embed="rId8"/>
+                          <a:stretch>
+                            <a:fillRect l="-360" t="-203704" r="-719" b="-103704"/>
+                          </a:stretch>
+                        </a:blipFill>
+                      </a:tcPr>
+                    </a:tc>
+                    <a:extLst>
+                      <a:ext uri="{0D108BD9-81ED-4DB2-BD59-A6C34878D82A}">
+                        <a16:rowId xmlns:a16="http://schemas.microsoft.com/office/drawing/2014/main" val="1450664255"/>
+                      </a:ext>
+                    </a:extLst>
+                  </a:tr>
+                  <a:tr h="496052">
+                    <a:tc>
+                      <a:txBody>
+                        <a:bodyPr/>
+                        <a:lstStyle/>
+                        <a:p>
+                          <a:endParaRPr lang="en-US"/>
+                        </a:p>
+                      </a:txBody>
+                      <a:tcPr>
+                        <a:lnL w="12700" cap="flat" cmpd="sng" algn="ctr">
+                          <a:solidFill>
+                            <a:schemeClr val="tx1"/>
+                          </a:solidFill>
+                          <a:prstDash val="solid"/>
+                          <a:round/>
+                          <a:headEnd type="none" w="med" len="med"/>
+                          <a:tailEnd type="none" w="med" len="med"/>
+                        </a:lnL>
+                        <a:lnR w="12700" cap="flat" cmpd="sng" algn="ctr">
+                          <a:solidFill>
+                            <a:schemeClr val="tx1"/>
+                          </a:solidFill>
+                          <a:prstDash val="solid"/>
+                          <a:round/>
+                          <a:headEnd type="none" w="med" len="med"/>
+                          <a:tailEnd type="none" w="med" len="med"/>
+                        </a:lnR>
+                        <a:lnT w="12700" cap="flat" cmpd="sng" algn="ctr">
+                          <a:solidFill>
+                            <a:schemeClr val="tx1"/>
+                          </a:solidFill>
+                          <a:prstDash val="solid"/>
+                          <a:round/>
+                          <a:headEnd type="none" w="med" len="med"/>
+                          <a:tailEnd type="none" w="med" len="med"/>
+                        </a:lnT>
+                        <a:lnB w="12700" cap="flat" cmpd="sng" algn="ctr">
+                          <a:solidFill>
+                            <a:schemeClr val="tx1"/>
+                          </a:solidFill>
+                          <a:prstDash val="solid"/>
+                          <a:round/>
+                          <a:headEnd type="none" w="med" len="med"/>
+                          <a:tailEnd type="none" w="med" len="med"/>
+                        </a:lnB>
+                        <a:lnTlToBr w="12700" cmpd="sng">
+                          <a:noFill/>
+                          <a:prstDash val="solid"/>
+                        </a:lnTlToBr>
+                        <a:lnBlToTr w="12700" cmpd="sng">
+                          <a:noFill/>
+                          <a:prstDash val="solid"/>
+                        </a:lnBlToTr>
+                        <a:blipFill>
+                          <a:blip r:embed="rId8"/>
+                          <a:stretch>
+                            <a:fillRect l="-360" t="-300000" r="-719" b="-2439"/>
+                          </a:stretch>
+                        </a:blipFill>
+                      </a:tcPr>
+                    </a:tc>
+                    <a:extLst>
+                      <a:ext uri="{0D108BD9-81ED-4DB2-BD59-A6C34878D82A}">
+                        <a16:rowId xmlns:a16="http://schemas.microsoft.com/office/drawing/2014/main" val="1780212582"/>
+                      </a:ext>
+                    </a:extLst>
+                  </a:tr>
+                </a:tbl>
+              </a:graphicData>
+            </a:graphic>
+          </p:graphicFrame>
+        </mc:Fallback>
+      </mc:AlternateContent>
+      <mc:AlternateContent xmlns:mc="http://schemas.openxmlformats.org/markup-compatibility/2006">
+        <mc:Choice xmlns:a14="http://schemas.microsoft.com/office/drawing/2010/main" Requires="a14">
+          <p:sp>
+            <p:nvSpPr>
+              <p:cNvPr id="17" name="TextBox 16">
+                <a:extLst>
+                  <a:ext uri="{FF2B5EF4-FFF2-40B4-BE49-F238E27FC236}">
+                    <a16:creationId xmlns:a16="http://schemas.microsoft.com/office/drawing/2014/main" id="{A7DE2D7A-6674-D01F-6109-DFBEA797AE19}"/>
+                  </a:ext>
+                </a:extLst>
+              </p:cNvPr>
+              <p:cNvSpPr txBox="1"/>
+              <p:nvPr/>
+            </p:nvSpPr>
+            <p:spPr>
+              <a:xfrm>
+                <a:off x="9074348" y="3788955"/>
+                <a:ext cx="673509" cy="707886"/>
+              </a:xfrm>
+              <a:prstGeom prst="rect">
+                <a:avLst/>
+              </a:prstGeom>
+              <a:noFill/>
+            </p:spPr>
+            <p:txBody>
+              <a:bodyPr wrap="square">
+                <a:spAutoFit/>
+              </a:bodyPr>
+              <a:lstStyle/>
+              <a:p>
+                <a:pPr/>
+                <a14:m>
+                  <m:oMathPara xmlns:m="http://schemas.openxmlformats.org/officeDocument/2006/math">
+                    <m:oMathParaPr>
+                      <m:jc m:val="centerGroup"/>
+                    </m:oMathParaPr>
+                    <m:oMath xmlns:m="http://schemas.openxmlformats.org/officeDocument/2006/math">
+                      <m:r>
+                        <a:rPr lang="en-US" sz="4000" b="0" i="1" smtClean="0">
+                          <a:latin typeface="Cambria Math" panose="02040503050406030204" pitchFamily="18" charset="0"/>
+                          <a:ea typeface="Cambria Math" panose="02040503050406030204" pitchFamily="18" charset="0"/>
+                        </a:rPr>
+                        <m:t>≤</m:t>
+                      </m:r>
+                    </m:oMath>
+                  </m:oMathPara>
+                </a14:m>
+                <a:endParaRPr lang="en-US" sz="4000" dirty="0"/>
+              </a:p>
+            </p:txBody>
+          </p:sp>
+        </mc:Choice>
+        <mc:Fallback>
+          <p:sp>
+            <p:nvSpPr>
+              <p:cNvPr id="17" name="TextBox 16">
+                <a:extLst>
+                  <a:ext uri="{FF2B5EF4-FFF2-40B4-BE49-F238E27FC236}">
+                    <a16:creationId xmlns:a16="http://schemas.microsoft.com/office/drawing/2014/main" id="{A7DE2D7A-6674-D01F-6109-DFBEA797AE19}"/>
+                  </a:ext>
+                </a:extLst>
+              </p:cNvPr>
+              <p:cNvSpPr txBox="1">
+                <a:spLocks noRot="1" noChangeAspect="1" noMove="1" noResize="1" noEditPoints="1" noAdjustHandles="1" noChangeArrowheads="1" noChangeShapeType="1" noTextEdit="1"/>
+              </p:cNvSpPr>
+              <p:nvPr/>
+            </p:nvSpPr>
+            <p:spPr>
+              <a:xfrm>
+                <a:off x="9074348" y="3788955"/>
+                <a:ext cx="673509" cy="707886"/>
+              </a:xfrm>
+              <a:prstGeom prst="rect">
+                <a:avLst/>
+              </a:prstGeom>
+              <a:blipFill>
+                <a:blip r:embed="rId9"/>
+                <a:stretch>
+                  <a:fillRect/>
+                </a:stretch>
+              </a:blipFill>
+            </p:spPr>
+            <p:txBody>
+              <a:bodyPr/>
+              <a:lstStyle/>
+              <a:p>
+                <a:r>
+                  <a:rPr lang="en-US">
+                    <a:noFill/>
+                  </a:rPr>
+                  <a:t> </a:t>
+                </a:r>
+              </a:p>
+            </p:txBody>
+          </p:sp>
+        </mc:Fallback>
+      </mc:AlternateContent>
+    </p:spTree>
+    <p:extLst>
+      <p:ext uri="{BB962C8B-B14F-4D97-AF65-F5344CB8AC3E}">
+        <p14:creationId xmlns:p14="http://schemas.microsoft.com/office/powerpoint/2010/main" val="3160870811"/>
       </p:ext>
     </p:extLst>
   </p:cSld>
